--- a/docs/apresentacoes/Arquitetura BioCultural v2.pptx
+++ b/docs/apresentacoes/Arquitetura BioCultural v2.pptx
@@ -13638,7 +13638,7 @@
                 <a:cs typeface="Arial"/>
                 <a:sym typeface="Arial"/>
               </a:rPr>
-              <a:t>Quatro perguntas que só vocês podem responder</a:t>
+              <a:t>Cinco perguntas que só vocês podem responder</a:t>
             </a:r>
             <a:endParaRPr b="0" i="0" sz="5400" u="none" cap="none" strike="noStrike">
               <a:solidFill>
@@ -13660,7 +13660,7 @@
         </p:nvSpPr>
         <p:spPr>
           <a:xfrm>
-            <a:off x="1371600" y="3566160"/>
+            <a:off x="1371600" y="2750000"/>
             <a:ext cx="8046720" cy="411480"/>
           </a:xfrm>
           <a:prstGeom prst="rect">
@@ -13726,7 +13726,7 @@
         </p:nvSpPr>
         <p:spPr>
           <a:xfrm>
-            <a:off x="1371600" y="4114800"/>
+            <a:off x="1371600" y="3298640"/>
             <a:ext cx="7534656" cy="1463040"/>
           </a:xfrm>
           <a:prstGeom prst="rect">
@@ -13792,7 +13792,7 @@
         </p:nvSpPr>
         <p:spPr>
           <a:xfrm>
-            <a:off x="9601200" y="3566160"/>
+            <a:off x="9601200" y="2750000"/>
             <a:ext cx="8046720" cy="411480"/>
           </a:xfrm>
           <a:prstGeom prst="rect">
@@ -13858,7 +13858,7 @@
         </p:nvSpPr>
         <p:spPr>
           <a:xfrm>
-            <a:off x="9601200" y="4114800"/>
+            <a:off x="9601200" y="3298640"/>
             <a:ext cx="7534656" cy="1463040"/>
           </a:xfrm>
           <a:prstGeom prst="rect">
@@ -13924,7 +13924,7 @@
         </p:nvSpPr>
         <p:spPr>
           <a:xfrm>
-            <a:off x="1371600" y="5989320"/>
+            <a:off x="1371600" y="5000000"/>
             <a:ext cx="8046720" cy="411480"/>
           </a:xfrm>
           <a:prstGeom prst="rect">
@@ -13990,7 +13990,7 @@
         </p:nvSpPr>
         <p:spPr>
           <a:xfrm>
-            <a:off x="1371600" y="6537960"/>
+            <a:off x="1371600" y="5548640"/>
             <a:ext cx="7534656" cy="1463040"/>
           </a:xfrm>
           <a:prstGeom prst="rect">
@@ -14056,7 +14056,7 @@
         </p:nvSpPr>
         <p:spPr>
           <a:xfrm>
-            <a:off x="9601200" y="5989320"/>
+            <a:off x="9601200" y="5000000"/>
             <a:ext cx="8046720" cy="411480"/>
           </a:xfrm>
           <a:prstGeom prst="rect">
@@ -14122,7 +14122,7 @@
         </p:nvSpPr>
         <p:spPr>
           <a:xfrm>
-            <a:off x="9601200" y="6537960"/>
+            <a:off x="9601200" y="5548640"/>
             <a:ext cx="7534656" cy="1463040"/>
           </a:xfrm>
           <a:prstGeom prst="rect">
@@ -14188,7 +14188,7 @@
         </p:nvSpPr>
         <p:spPr>
           <a:xfrm>
-            <a:off x="1371600" y="8366760"/>
+            <a:off x="1371600" y="9050000"/>
             <a:ext cx="14712696" cy="822960"/>
           </a:xfrm>
           <a:prstGeom prst="rect">
@@ -14233,6 +14233,138 @@
                 <a:sym typeface="Arial"/>
               </a:rPr>
               <a:t>Nenhuma dessas perguntas tem resposta técnica, e nenhuma delas vamos responder sozinhos. Enquanto vocês não responderem, elas ficam registradas como pendências abertas — e nada é publicado.</a:t>
+            </a:r>
+            <a:endParaRPr b="0" i="0" sz="2250" u="none" cap="none" strike="noStrike">
+              <a:solidFill>
+                <a:schemeClr val="dk1"/>
+              </a:solidFill>
+              <a:latin typeface="Calibri"/>
+              <a:ea typeface="Calibri"/>
+              <a:cs typeface="Calibri"/>
+              <a:sym typeface="Calibri"/>
+            </a:endParaRPr>
+          </a:p>
+        </p:txBody>
+      </p:sp>
+      <p:sp>
+        <p:nvSpPr>
+          <p:cNvPr id="190" name="Google Shape;190;p22"/>
+          <p:cNvSpPr/>
+          <p:nvPr/>
+        </p:nvSpPr>
+        <p:spPr>
+          <a:xfrm>
+            <a:off x="1371600" y="7250000"/>
+            <a:ext cx="14712696" cy="411480"/>
+          </a:xfrm>
+          <a:prstGeom prst="rect">
+            <a:avLst/>
+          </a:prstGeom>
+          <a:noFill/>
+          <a:ln>
+            <a:noFill/>
+          </a:ln>
+        </p:spPr>
+        <p:txBody>
+          <a:bodyPr anchorCtr="0" anchor="t" bIns="25400" lIns="25400" spcFirstLastPara="1" rIns="25400" wrap="square" tIns="25400">
+            <a:noAutofit/>
+          </a:bodyPr>
+          <a:lstStyle/>
+          <a:p>
+            <a:pPr indent="0" lvl="0" marL="0" marR="0" rtl="0" algn="l">
+              <a:lnSpc>
+                <a:spcPct val="94203"/>
+              </a:lnSpc>
+              <a:spcBef>
+                <a:spcPts val="0"/>
+              </a:spcBef>
+              <a:spcAft>
+                <a:spcPts val="0"/>
+              </a:spcAft>
+              <a:buClr>
+                <a:srgbClr val="201F1D"/>
+              </a:buClr>
+              <a:buSzPts val="3600"/>
+              <a:buFont typeface="Arial"/>
+              <a:buNone/>
+            </a:pPr>
+            <a:r>
+              <a:rPr b="0" i="0" lang="en-US" sz="3600" u="none" cap="none" strike="noStrike">
+                <a:solidFill>
+                  <a:srgbClr val="201F1D"/>
+                </a:solidFill>
+                <a:latin typeface="Arial"/>
+                <a:ea typeface="Arial"/>
+                <a:cs typeface="Arial"/>
+                <a:sym typeface="Arial"/>
+              </a:rPr>
+              <a:t>O que é sagrado — e o que acontece com ele</a:t>
+            </a:r>
+            <a:endParaRPr b="0" i="0" sz="3600" u="none" cap="none" strike="noStrike">
+              <a:solidFill>
+                <a:schemeClr val="dk1"/>
+              </a:solidFill>
+              <a:latin typeface="Calibri"/>
+              <a:ea typeface="Calibri"/>
+              <a:cs typeface="Calibri"/>
+              <a:sym typeface="Calibri"/>
+            </a:endParaRPr>
+          </a:p>
+        </p:txBody>
+      </p:sp>
+      <p:sp>
+        <p:nvSpPr>
+          <p:cNvPr id="191" name="Google Shape;191;p22"/>
+          <p:cNvSpPr/>
+          <p:nvPr/>
+        </p:nvSpPr>
+        <p:spPr>
+          <a:xfrm>
+            <a:off x="1371600" y="7800000"/>
+            <a:ext cx="14712696" cy="1097280"/>
+          </a:xfrm>
+          <a:prstGeom prst="rect">
+            <a:avLst/>
+          </a:prstGeom>
+          <a:noFill/>
+          <a:ln>
+            <a:noFill/>
+          </a:ln>
+        </p:spPr>
+        <p:txBody>
+          <a:bodyPr anchorCtr="0" anchor="t" bIns="25400" lIns="25400" spcFirstLastPara="1" rIns="25400" wrap="square" tIns="25400">
+            <a:noAutofit/>
+          </a:bodyPr>
+          <a:lstStyle/>
+          <a:p>
+            <a:pPr indent="0" lvl="0" marL="0" marR="0" rtl="0" algn="l">
+              <a:lnSpc>
+                <a:spcPct val="151163"/>
+              </a:lnSpc>
+              <a:spcBef>
+                <a:spcPts val="0"/>
+              </a:spcBef>
+              <a:spcAft>
+                <a:spcPts val="0"/>
+              </a:spcAft>
+              <a:buClr>
+                <a:srgbClr val="201F1D"/>
+              </a:buClr>
+              <a:buSzPts val="2250"/>
+              <a:buFont typeface="Arial"/>
+              <a:buNone/>
+            </a:pPr>
+            <a:r>
+              <a:rPr b="0" i="0" lang="en-US" sz="2250" u="none" cap="none" strike="noStrike">
+                <a:solidFill>
+                  <a:srgbClr val="201F1D"/>
+                </a:solidFill>
+                <a:latin typeface="Arial"/>
+                <a:ea typeface="Arial"/>
+                <a:cs typeface="Arial"/>
+                <a:sym typeface="Arial"/>
+              </a:rPr>
+              <a:t>Quando um saber é sagrado, o registro dele deve sumir por inteiro, ou pode ficar visível que ele existe, sem mostrar o conteúdo? E quem diz que um saber é sagrado?</a:t>
             </a:r>
             <a:endParaRPr b="0" i="0" sz="2250" u="none" cap="none" strike="noStrike">
               <a:solidFill>

--- a/docs/apresentacoes/Arquitetura BioCultural v2.pptx
+++ b/docs/apresentacoes/Arquitetura BioCultural v2.pptx
@@ -5491,12 +5491,12 @@
           <a:spcPts val="0"/>
         </a:spcAft>
         <a:buClr>
-          <a:srgbClr val="000000"/>
+          <a:srgbClr val="201F1D"/>
         </a:buClr>
         <a:buFont typeface="Arial"/>
         <a:defRPr b="0" i="0" spc="0" sz="1400" u="none" cap="none" strike="noStrike">
           <a:solidFill>
-            <a:srgbClr val="000000"/>
+            <a:srgbClr val="201F1D"/>
           </a:solidFill>
           <a:latin typeface="Arial"/>
           <a:ea typeface="Arial"/>
@@ -5515,12 +5515,12 @@
           <a:spcPts val="0"/>
         </a:spcAft>
         <a:buClr>
-          <a:srgbClr val="000000"/>
+          <a:srgbClr val="201F1D"/>
         </a:buClr>
         <a:buFont typeface="Arial"/>
         <a:defRPr b="0" i="0" spc="0" sz="1400" u="none" cap="none" strike="noStrike">
           <a:solidFill>
-            <a:srgbClr val="000000"/>
+            <a:srgbClr val="201F1D"/>
           </a:solidFill>
           <a:latin typeface="Arial"/>
           <a:ea typeface="Arial"/>
@@ -5539,12 +5539,12 @@
           <a:spcPts val="0"/>
         </a:spcAft>
         <a:buClr>
-          <a:srgbClr val="000000"/>
+          <a:srgbClr val="201F1D"/>
         </a:buClr>
         <a:buFont typeface="Arial"/>
         <a:defRPr b="0" i="0" spc="0" sz="1400" u="none" cap="none" strike="noStrike">
           <a:solidFill>
-            <a:srgbClr val="000000"/>
+            <a:srgbClr val="201F1D"/>
           </a:solidFill>
           <a:latin typeface="Arial"/>
           <a:ea typeface="Arial"/>
@@ -5563,12 +5563,12 @@
           <a:spcPts val="0"/>
         </a:spcAft>
         <a:buClr>
-          <a:srgbClr val="000000"/>
+          <a:srgbClr val="201F1D"/>
         </a:buClr>
         <a:buFont typeface="Arial"/>
         <a:defRPr b="0" i="0" spc="0" sz="1400" u="none" cap="none" strike="noStrike">
           <a:solidFill>
-            <a:srgbClr val="000000"/>
+            <a:srgbClr val="201F1D"/>
           </a:solidFill>
           <a:latin typeface="Arial"/>
           <a:ea typeface="Arial"/>
@@ -5587,12 +5587,12 @@
           <a:spcPts val="0"/>
         </a:spcAft>
         <a:buClr>
-          <a:srgbClr val="000000"/>
+          <a:srgbClr val="201F1D"/>
         </a:buClr>
         <a:buFont typeface="Arial"/>
         <a:defRPr b="0" i="0" spc="0" sz="1400" u="none" cap="none" strike="noStrike">
           <a:solidFill>
-            <a:srgbClr val="000000"/>
+            <a:srgbClr val="201F1D"/>
           </a:solidFill>
           <a:latin typeface="Arial"/>
           <a:ea typeface="Arial"/>
@@ -5611,12 +5611,12 @@
           <a:spcPts val="0"/>
         </a:spcAft>
         <a:buClr>
-          <a:srgbClr val="000000"/>
+          <a:srgbClr val="201F1D"/>
         </a:buClr>
         <a:buFont typeface="Arial"/>
         <a:defRPr b="0" i="0" spc="0" sz="1400" u="none" cap="none" strike="noStrike">
           <a:solidFill>
-            <a:srgbClr val="000000"/>
+            <a:srgbClr val="201F1D"/>
           </a:solidFill>
           <a:latin typeface="Arial"/>
           <a:ea typeface="Arial"/>
@@ -5635,12 +5635,12 @@
           <a:spcPts val="0"/>
         </a:spcAft>
         <a:buClr>
-          <a:srgbClr val="000000"/>
+          <a:srgbClr val="201F1D"/>
         </a:buClr>
         <a:buFont typeface="Arial"/>
         <a:defRPr b="0" i="0" spc="0" sz="1400" u="none" cap="none" strike="noStrike">
           <a:solidFill>
-            <a:srgbClr val="000000"/>
+            <a:srgbClr val="201F1D"/>
           </a:solidFill>
           <a:latin typeface="Arial"/>
           <a:ea typeface="Arial"/>
@@ -5659,12 +5659,12 @@
           <a:spcPts val="0"/>
         </a:spcAft>
         <a:buClr>
-          <a:srgbClr val="000000"/>
+          <a:srgbClr val="201F1D"/>
         </a:buClr>
         <a:buFont typeface="Arial"/>
         <a:defRPr b="0" i="0" spc="0" sz="1400" u="none" cap="none" strike="noStrike">
           <a:solidFill>
-            <a:srgbClr val="000000"/>
+            <a:srgbClr val="201F1D"/>
           </a:solidFill>
           <a:latin typeface="Arial"/>
           <a:ea typeface="Arial"/>
@@ -5683,12 +5683,12 @@
           <a:spcPts val="0"/>
         </a:spcAft>
         <a:buClr>
-          <a:srgbClr val="000000"/>
+          <a:srgbClr val="201F1D"/>
         </a:buClr>
         <a:buFont typeface="Arial"/>
         <a:defRPr b="0" i="0" spc="0" sz="1400" u="none" cap="none" strike="noStrike">
           <a:solidFill>
-            <a:srgbClr val="000000"/>
+            <a:srgbClr val="201F1D"/>
           </a:solidFill>
           <a:latin typeface="Arial"/>
           <a:ea typeface="Arial"/>
@@ -5720,12 +5720,12 @@
           <a:spcPts val="0"/>
         </a:spcAft>
         <a:buClr>
-          <a:srgbClr val="000000"/>
+          <a:srgbClr val="201F1D"/>
         </a:buClr>
         <a:buFont typeface="Arial"/>
         <a:defRPr b="0" i="0" spc="0" sz="1400" u="none" cap="none" strike="noStrike">
           <a:solidFill>
-            <a:srgbClr val="000000"/>
+            <a:srgbClr val="201F1D"/>
           </a:solidFill>
           <a:latin typeface="Arial"/>
           <a:ea typeface="Arial"/>
@@ -5744,12 +5744,12 @@
           <a:spcPts val="0"/>
         </a:spcAft>
         <a:buClr>
-          <a:srgbClr val="000000"/>
+          <a:srgbClr val="201F1D"/>
         </a:buClr>
         <a:buFont typeface="Arial"/>
         <a:defRPr b="0" i="0" spc="0" sz="1400" u="none" cap="none" strike="noStrike">
           <a:solidFill>
-            <a:srgbClr val="000000"/>
+            <a:srgbClr val="201F1D"/>
           </a:solidFill>
           <a:latin typeface="Arial"/>
           <a:ea typeface="Arial"/>
@@ -5768,12 +5768,12 @@
           <a:spcPts val="0"/>
         </a:spcAft>
         <a:buClr>
-          <a:srgbClr val="000000"/>
+          <a:srgbClr val="201F1D"/>
         </a:buClr>
         <a:buFont typeface="Arial"/>
         <a:defRPr b="0" i="0" spc="0" sz="1400" u="none" cap="none" strike="noStrike">
           <a:solidFill>
-            <a:srgbClr val="000000"/>
+            <a:srgbClr val="201F1D"/>
           </a:solidFill>
           <a:latin typeface="Arial"/>
           <a:ea typeface="Arial"/>
@@ -5792,12 +5792,12 @@
           <a:spcPts val="0"/>
         </a:spcAft>
         <a:buClr>
-          <a:srgbClr val="000000"/>
+          <a:srgbClr val="201F1D"/>
         </a:buClr>
         <a:buFont typeface="Arial"/>
         <a:defRPr b="0" i="0" spc="0" sz="1400" u="none" cap="none" strike="noStrike">
           <a:solidFill>
-            <a:srgbClr val="000000"/>
+            <a:srgbClr val="201F1D"/>
           </a:solidFill>
           <a:latin typeface="Arial"/>
           <a:ea typeface="Arial"/>
@@ -5816,12 +5816,12 @@
           <a:spcPts val="0"/>
         </a:spcAft>
         <a:buClr>
-          <a:srgbClr val="000000"/>
+          <a:srgbClr val="201F1D"/>
         </a:buClr>
         <a:buFont typeface="Arial"/>
         <a:defRPr b="0" i="0" spc="0" sz="1400" u="none" cap="none" strike="noStrike">
           <a:solidFill>
-            <a:srgbClr val="000000"/>
+            <a:srgbClr val="201F1D"/>
           </a:solidFill>
           <a:latin typeface="Arial"/>
           <a:ea typeface="Arial"/>
@@ -5840,12 +5840,12 @@
           <a:spcPts val="0"/>
         </a:spcAft>
         <a:buClr>
-          <a:srgbClr val="000000"/>
+          <a:srgbClr val="201F1D"/>
         </a:buClr>
         <a:buFont typeface="Arial"/>
         <a:defRPr b="0" i="0" spc="0" sz="1400" u="none" cap="none" strike="noStrike">
           <a:solidFill>
-            <a:srgbClr val="000000"/>
+            <a:srgbClr val="201F1D"/>
           </a:solidFill>
           <a:latin typeface="Arial"/>
           <a:ea typeface="Arial"/>
@@ -5864,12 +5864,12 @@
           <a:spcPts val="0"/>
         </a:spcAft>
         <a:buClr>
-          <a:srgbClr val="000000"/>
+          <a:srgbClr val="201F1D"/>
         </a:buClr>
         <a:buFont typeface="Arial"/>
         <a:defRPr b="0" i="0" spc="0" sz="1400" u="none" cap="none" strike="noStrike">
           <a:solidFill>
-            <a:srgbClr val="000000"/>
+            <a:srgbClr val="201F1D"/>
           </a:solidFill>
           <a:latin typeface="Arial"/>
           <a:ea typeface="Arial"/>
@@ -5888,12 +5888,12 @@
           <a:spcPts val="0"/>
         </a:spcAft>
         <a:buClr>
-          <a:srgbClr val="000000"/>
+          <a:srgbClr val="201F1D"/>
         </a:buClr>
         <a:buFont typeface="Arial"/>
         <a:defRPr b="0" i="0" spc="0" sz="1400" u="none" cap="none" strike="noStrike">
           <a:solidFill>
-            <a:srgbClr val="000000"/>
+            <a:srgbClr val="201F1D"/>
           </a:solidFill>
           <a:latin typeface="Arial"/>
           <a:ea typeface="Arial"/>
@@ -5912,12 +5912,12 @@
           <a:spcPts val="0"/>
         </a:spcAft>
         <a:buClr>
-          <a:srgbClr val="000000"/>
+          <a:srgbClr val="201F1D"/>
         </a:buClr>
         <a:buFont typeface="Arial"/>
         <a:defRPr b="0" i="0" spc="0" sz="1400" u="none" cap="none" strike="noStrike">
           <a:solidFill>
-            <a:srgbClr val="000000"/>
+            <a:srgbClr val="201F1D"/>
           </a:solidFill>
           <a:latin typeface="Arial"/>
           <a:ea typeface="Arial"/>
@@ -5949,12 +5949,12 @@
           <a:spcPts val="0"/>
         </a:spcAft>
         <a:buClr>
-          <a:srgbClr val="000000"/>
+          <a:srgbClr val="201F1D"/>
         </a:buClr>
         <a:buFont typeface="Arial"/>
         <a:defRPr b="0" i="0" spc="0" sz="1400" u="none" cap="none" strike="noStrike">
           <a:solidFill>
-            <a:srgbClr val="000000"/>
+            <a:srgbClr val="201F1D"/>
           </a:solidFill>
           <a:latin typeface="Arial"/>
           <a:ea typeface="Arial"/>
@@ -5973,12 +5973,12 @@
           <a:spcPts val="0"/>
         </a:spcAft>
         <a:buClr>
-          <a:srgbClr val="000000"/>
+          <a:srgbClr val="201F1D"/>
         </a:buClr>
         <a:buFont typeface="Arial"/>
         <a:defRPr b="0" i="0" spc="0" sz="1400" u="none" cap="none" strike="noStrike">
           <a:solidFill>
-            <a:srgbClr val="000000"/>
+            <a:srgbClr val="201F1D"/>
           </a:solidFill>
           <a:latin typeface="Arial"/>
           <a:ea typeface="Arial"/>
@@ -5997,12 +5997,12 @@
           <a:spcPts val="0"/>
         </a:spcAft>
         <a:buClr>
-          <a:srgbClr val="000000"/>
+          <a:srgbClr val="201F1D"/>
         </a:buClr>
         <a:buFont typeface="Arial"/>
         <a:defRPr b="0" i="0" spc="0" sz="1400" u="none" cap="none" strike="noStrike">
           <a:solidFill>
-            <a:srgbClr val="000000"/>
+            <a:srgbClr val="201F1D"/>
           </a:solidFill>
           <a:latin typeface="Arial"/>
           <a:ea typeface="Arial"/>
@@ -6021,12 +6021,12 @@
           <a:spcPts val="0"/>
         </a:spcAft>
         <a:buClr>
-          <a:srgbClr val="000000"/>
+          <a:srgbClr val="201F1D"/>
         </a:buClr>
         <a:buFont typeface="Arial"/>
         <a:defRPr b="0" i="0" spc="0" sz="1400" u="none" cap="none" strike="noStrike">
           <a:solidFill>
-            <a:srgbClr val="000000"/>
+            <a:srgbClr val="201F1D"/>
           </a:solidFill>
           <a:latin typeface="Arial"/>
           <a:ea typeface="Arial"/>
@@ -6045,12 +6045,12 @@
           <a:spcPts val="0"/>
         </a:spcAft>
         <a:buClr>
-          <a:srgbClr val="000000"/>
+          <a:srgbClr val="201F1D"/>
         </a:buClr>
         <a:buFont typeface="Arial"/>
         <a:defRPr b="0" i="0" spc="0" sz="1400" u="none" cap="none" strike="noStrike">
           <a:solidFill>
-            <a:srgbClr val="000000"/>
+            <a:srgbClr val="201F1D"/>
           </a:solidFill>
           <a:latin typeface="Arial"/>
           <a:ea typeface="Arial"/>
@@ -6069,12 +6069,12 @@
           <a:spcPts val="0"/>
         </a:spcAft>
         <a:buClr>
-          <a:srgbClr val="000000"/>
+          <a:srgbClr val="201F1D"/>
         </a:buClr>
         <a:buFont typeface="Arial"/>
         <a:defRPr b="0" i="0" spc="0" sz="1400" u="none" cap="none" strike="noStrike">
           <a:solidFill>
-            <a:srgbClr val="000000"/>
+            <a:srgbClr val="201F1D"/>
           </a:solidFill>
           <a:latin typeface="Arial"/>
           <a:ea typeface="Arial"/>
@@ -6093,12 +6093,12 @@
           <a:spcPts val="0"/>
         </a:spcAft>
         <a:buClr>
-          <a:srgbClr val="000000"/>
+          <a:srgbClr val="201F1D"/>
         </a:buClr>
         <a:buFont typeface="Arial"/>
         <a:defRPr b="0" i="0" spc="0" sz="1400" u="none" cap="none" strike="noStrike">
           <a:solidFill>
-            <a:srgbClr val="000000"/>
+            <a:srgbClr val="201F1D"/>
           </a:solidFill>
           <a:latin typeface="Arial"/>
           <a:ea typeface="Arial"/>
@@ -6117,12 +6117,12 @@
           <a:spcPts val="0"/>
         </a:spcAft>
         <a:buClr>
-          <a:srgbClr val="000000"/>
+          <a:srgbClr val="201F1D"/>
         </a:buClr>
         <a:buFont typeface="Arial"/>
         <a:defRPr b="0" i="0" spc="0" sz="1400" u="none" cap="none" strike="noStrike">
           <a:solidFill>
-            <a:srgbClr val="000000"/>
+            <a:srgbClr val="201F1D"/>
           </a:solidFill>
           <a:latin typeface="Arial"/>
           <a:ea typeface="Arial"/>
@@ -6141,12 +6141,12 @@
           <a:spcPts val="0"/>
         </a:spcAft>
         <a:buClr>
-          <a:srgbClr val="000000"/>
+          <a:srgbClr val="201F1D"/>
         </a:buClr>
         <a:buFont typeface="Arial"/>
         <a:defRPr b="0" i="0" spc="0" sz="1400" u="none" cap="none" strike="noStrike">
           <a:solidFill>
-            <a:srgbClr val="000000"/>
+            <a:srgbClr val="201F1D"/>
           </a:solidFill>
           <a:latin typeface="Arial"/>
           <a:ea typeface="Arial"/>
@@ -6165,7 +6165,7 @@
     <p:bg>
       <p:bgPr>
         <a:solidFill>
-          <a:srgbClr val="F3F2F2"/>
+          <a:srgbClr val="FAF6EF"/>
         </a:solidFill>
       </p:bgPr>
     </p:bg>
@@ -6576,7 +6576,7 @@
     <p:bg>
       <p:bgPr>
         <a:solidFill>
-          <a:srgbClr val="F3F2F2"/>
+          <a:srgbClr val="FAF6EF"/>
         </a:solidFill>
       </p:bgPr>
     </p:bg>
@@ -6954,7 +6954,7 @@
     <p:bg>
       <p:bgPr>
         <a:solidFill>
-          <a:srgbClr val="F3F2F2"/>
+          <a:srgbClr val="FAF6EF"/>
         </a:solidFill>
       </p:bgPr>
     </p:bg>
@@ -7265,7 +7265,7 @@
     <p:bg>
       <p:bgPr>
         <a:solidFill>
-          <a:srgbClr val="F3F2F2"/>
+          <a:srgbClr val="FAF6EF"/>
         </a:solidFill>
       </p:bgPr>
     </p:bg>
@@ -7510,7 +7510,7 @@
     <p:bg>
       <p:bgPr>
         <a:solidFill>
-          <a:srgbClr val="262525"/>
+          <a:srgbClr val="26221D"/>
         </a:solidFill>
       </p:bgPr>
     </p:bg>
@@ -7564,7 +7564,7 @@
                 <a:spcPts val="0"/>
               </a:spcAft>
               <a:buClr>
-                <a:srgbClr val="F3F2F2"/>
+                <a:srgbClr val="FAF6EF"/>
               </a:buClr>
               <a:buSzPts val="5400"/>
               <a:buFont typeface="Arial"/>
@@ -7573,7 +7573,7 @@
             <a:r>
               <a:rPr b="0" i="0" lang="en-US" sz="5400" u="none" cap="none" strike="noStrike">
                 <a:solidFill>
-                  <a:srgbClr val="F3F2F2"/>
+                  <a:srgbClr val="FAF6EF"/>
                 </a:solidFill>
                 <a:latin typeface="Arial"/>
                 <a:ea typeface="Arial"/>
@@ -7608,7 +7608,7 @@
     <p:bg>
       <p:bgPr>
         <a:solidFill>
-          <a:srgbClr val="F3F2F2"/>
+          <a:srgbClr val="FAF6EF"/>
         </a:solidFill>
       </p:bgPr>
     </p:bg>
@@ -9085,7 +9085,7 @@
     <p:bg>
       <p:bgPr>
         <a:solidFill>
-          <a:srgbClr val="262525"/>
+          <a:srgbClr val="26221D"/>
         </a:solidFill>
       </p:bgPr>
     </p:bg>
@@ -9139,7 +9139,7 @@
                 <a:spcPts val="0"/>
               </a:spcAft>
               <a:buClr>
-                <a:srgbClr val="F3F2F2"/>
+                <a:srgbClr val="FAF6EF"/>
               </a:buClr>
               <a:buSzPts val="5400"/>
               <a:buFont typeface="Arial"/>
@@ -9148,7 +9148,7 @@
             <a:r>
               <a:rPr b="0" i="0" lang="en-US" sz="5400" u="none" cap="none" strike="noStrike">
                 <a:solidFill>
-                  <a:srgbClr val="F3F2F2"/>
+                  <a:srgbClr val="FAF6EF"/>
                 </a:solidFill>
                 <a:latin typeface="Arial"/>
                 <a:ea typeface="Arial"/>
@@ -9183,7 +9183,7 @@
     <p:bg>
       <p:bgPr>
         <a:solidFill>
-          <a:srgbClr val="F3F2F2"/>
+          <a:srgbClr val="FAF6EF"/>
         </a:solidFill>
       </p:bgPr>
     </p:bg>
@@ -9282,7 +9282,7 @@
             <a:avLst/>
           </a:prstGeom>
           <a:solidFill>
-            <a:srgbClr val="1F1F1F">
+            <a:srgbClr val="201F1D">
               <a:alpha val="16078"/>
             </a:srgbClr>
           </a:solidFill>
@@ -9459,7 +9459,7 @@
             <a:avLst/>
           </a:prstGeom>
           <a:solidFill>
-            <a:srgbClr val="1F1F1F">
+            <a:srgbClr val="201F1D">
               <a:alpha val="16078"/>
             </a:srgbClr>
           </a:solidFill>
@@ -9636,7 +9636,7 @@
             <a:avLst/>
           </a:prstGeom>
           <a:solidFill>
-            <a:srgbClr val="1F1F1F">
+            <a:srgbClr val="201F1D">
               <a:alpha val="16078"/>
             </a:srgbClr>
           </a:solidFill>
@@ -9813,7 +9813,7 @@
             <a:avLst/>
           </a:prstGeom>
           <a:solidFill>
-            <a:srgbClr val="1F1F1F">
+            <a:srgbClr val="201F1D">
               <a:alpha val="16078"/>
             </a:srgbClr>
           </a:solidFill>
@@ -9990,7 +9990,7 @@
             <a:avLst/>
           </a:prstGeom>
           <a:solidFill>
-            <a:srgbClr val="1F1F1F">
+            <a:srgbClr val="201F1D">
               <a:alpha val="16078"/>
             </a:srgbClr>
           </a:solidFill>
@@ -10167,7 +10167,7 @@
             <a:avLst/>
           </a:prstGeom>
           <a:solidFill>
-            <a:srgbClr val="1F1F1F">
+            <a:srgbClr val="201F1D">
               <a:alpha val="16078"/>
             </a:srgbClr>
           </a:solidFill>
@@ -10238,7 +10238,7 @@
     <p:bg>
       <p:bgPr>
         <a:solidFill>
-          <a:srgbClr val="F3F2F2"/>
+          <a:srgbClr val="FAF6EF"/>
         </a:solidFill>
       </p:bgPr>
     </p:bg>
@@ -10864,7 +10864,7 @@
     <p:bg>
       <p:bgPr>
         <a:solidFill>
-          <a:srgbClr val="F3F2F2"/>
+          <a:srgbClr val="FAF6EF"/>
         </a:solidFill>
       </p:bgPr>
     </p:bg>
@@ -10963,7 +10963,7 @@
             <a:avLst/>
           </a:prstGeom>
           <a:solidFill>
-            <a:srgbClr val="1F1F1F">
+            <a:srgbClr val="201F1D">
               <a:alpha val="16078"/>
             </a:srgbClr>
           </a:solidFill>
@@ -11074,7 +11074,7 @@
             <a:avLst/>
           </a:prstGeom>
           <a:solidFill>
-            <a:srgbClr val="1F1F1F">
+            <a:srgbClr val="201F1D">
               <a:alpha val="16078"/>
             </a:srgbClr>
           </a:solidFill>
@@ -11185,7 +11185,7 @@
             <a:avLst/>
           </a:prstGeom>
           <a:solidFill>
-            <a:srgbClr val="1F1F1F">
+            <a:srgbClr val="201F1D">
               <a:alpha val="16078"/>
             </a:srgbClr>
           </a:solidFill>
@@ -11296,7 +11296,7 @@
             <a:avLst/>
           </a:prstGeom>
           <a:solidFill>
-            <a:srgbClr val="1F1F1F">
+            <a:srgbClr val="201F1D">
               <a:alpha val="16078"/>
             </a:srgbClr>
           </a:solidFill>
@@ -11407,7 +11407,7 @@
             <a:avLst/>
           </a:prstGeom>
           <a:solidFill>
-            <a:srgbClr val="1F1F1F">
+            <a:srgbClr val="201F1D">
               <a:alpha val="16078"/>
             </a:srgbClr>
           </a:solidFill>
@@ -11518,7 +11518,7 @@
             <a:avLst/>
           </a:prstGeom>
           <a:solidFill>
-            <a:srgbClr val="1F1F1F">
+            <a:srgbClr val="201F1D">
               <a:alpha val="16078"/>
             </a:srgbClr>
           </a:solidFill>
@@ -11629,7 +11629,7 @@
             <a:avLst/>
           </a:prstGeom>
           <a:solidFill>
-            <a:srgbClr val="1F1F1F">
+            <a:srgbClr val="201F1D">
               <a:alpha val="16078"/>
             </a:srgbClr>
           </a:solidFill>
@@ -11740,7 +11740,7 @@
             <a:avLst/>
           </a:prstGeom>
           <a:solidFill>
-            <a:srgbClr val="1F1F1F">
+            <a:srgbClr val="201F1D">
               <a:alpha val="16078"/>
             </a:srgbClr>
           </a:solidFill>
@@ -11851,7 +11851,7 @@
             <a:avLst/>
           </a:prstGeom>
           <a:solidFill>
-            <a:srgbClr val="1F1F1F">
+            <a:srgbClr val="201F1D">
               <a:alpha val="16078"/>
             </a:srgbClr>
           </a:solidFill>
@@ -11962,7 +11962,7 @@
             <a:avLst/>
           </a:prstGeom>
           <a:solidFill>
-            <a:srgbClr val="1F1F1F">
+            <a:srgbClr val="201F1D">
               <a:alpha val="16078"/>
             </a:srgbClr>
           </a:solidFill>
@@ -12073,7 +12073,7 @@
             <a:avLst/>
           </a:prstGeom>
           <a:solidFill>
-            <a:srgbClr val="1F1F1F">
+            <a:srgbClr val="201F1D">
               <a:alpha val="16078"/>
             </a:srgbClr>
           </a:solidFill>
@@ -12184,7 +12184,7 @@
             <a:avLst/>
           </a:prstGeom>
           <a:solidFill>
-            <a:srgbClr val="1F1F1F">
+            <a:srgbClr val="201F1D">
               <a:alpha val="16078"/>
             </a:srgbClr>
           </a:solidFill>
@@ -14392,7 +14392,7 @@
     <p:bg>
       <p:bgPr>
         <a:solidFill>
-          <a:srgbClr val="F3F2F2"/>
+          <a:srgbClr val="FAF6EF"/>
         </a:solidFill>
       </p:bgPr>
     </p:bg>
@@ -14754,7 +14754,7 @@
     <p:bg>
       <p:bgPr>
         <a:solidFill>
-          <a:srgbClr val="262525"/>
+          <a:srgbClr val="26221D"/>
         </a:solidFill>
       </p:bgPr>
     </p:bg>
@@ -14808,7 +14808,7 @@
                 <a:spcPts val="0"/>
               </a:spcAft>
               <a:buClr>
-                <a:srgbClr val="F3F2F2"/>
+                <a:srgbClr val="FAF6EF"/>
               </a:buClr>
               <a:buSzPts val="5400"/>
               <a:buFont typeface="Arial"/>
@@ -14817,7 +14817,7 @@
             <a:r>
               <a:rPr b="0" i="0" lang="en-US" sz="5400" u="none" cap="none" strike="noStrike">
                 <a:solidFill>
-                  <a:srgbClr val="F3F2F2"/>
+                  <a:srgbClr val="FAF6EF"/>
                 </a:solidFill>
                 <a:latin typeface="Arial"/>
                 <a:ea typeface="Arial"/>
@@ -14852,7 +14852,7 @@
     <p:bg>
       <p:bgPr>
         <a:solidFill>
-          <a:srgbClr val="F3F2F2"/>
+          <a:srgbClr val="FAF6EF"/>
         </a:solidFill>
       </p:bgPr>
     </p:bg>
@@ -15163,7 +15163,7 @@
     <p:bg>
       <p:bgPr>
         <a:solidFill>
-          <a:srgbClr val="F3F2F2"/>
+          <a:srgbClr val="FAF6EF"/>
         </a:solidFill>
       </p:bgPr>
     </p:bg>
@@ -15552,7 +15552,7 @@
     <p:bg>
       <p:bgPr>
         <a:solidFill>
-          <a:srgbClr val="262525"/>
+          <a:srgbClr val="26221D"/>
         </a:solidFill>
       </p:bgPr>
     </p:bg>
@@ -15606,7 +15606,7 @@
                 <a:spcPts val="0"/>
               </a:spcAft>
               <a:buClr>
-                <a:srgbClr val="F3F2F2"/>
+                <a:srgbClr val="FAF6EF"/>
               </a:buClr>
               <a:buSzPts val="5400"/>
               <a:buFont typeface="Arial"/>
@@ -15615,7 +15615,7 @@
             <a:r>
               <a:rPr b="0" i="0" lang="en-US" sz="5400" u="none" cap="none" strike="noStrike">
                 <a:solidFill>
-                  <a:srgbClr val="F3F2F2"/>
+                  <a:srgbClr val="FAF6EF"/>
                 </a:solidFill>
                 <a:latin typeface="Arial"/>
                 <a:ea typeface="Arial"/>
@@ -15650,7 +15650,7 @@
     <p:bg>
       <p:bgPr>
         <a:solidFill>
-          <a:srgbClr val="F3F2F2"/>
+          <a:srgbClr val="FAF6EF"/>
         </a:solidFill>
       </p:bgPr>
     </p:bg>
@@ -16338,7 +16338,7 @@
     <p:bg>
       <p:bgPr>
         <a:solidFill>
-          <a:srgbClr val="F3F2F2"/>
+          <a:srgbClr val="FAF6EF"/>
         </a:solidFill>
       </p:bgPr>
     </p:bg>
@@ -16747,7 +16747,7 @@
     <p:bg>
       <p:bgPr>
         <a:solidFill>
-          <a:srgbClr val="262525"/>
+          <a:srgbClr val="26221D"/>
         </a:solidFill>
       </p:bgPr>
     </p:bg>
@@ -16801,7 +16801,7 @@
                 <a:spcPts val="0"/>
               </a:spcAft>
               <a:buClr>
-                <a:srgbClr val="F3F2F2"/>
+                <a:srgbClr val="FAF6EF"/>
               </a:buClr>
               <a:buSzPts val="5400"/>
               <a:buFont typeface="Arial"/>
@@ -16810,7 +16810,7 @@
             <a:r>
               <a:rPr b="0" i="0" lang="en-US" sz="5400" u="none" cap="none" strike="noStrike">
                 <a:solidFill>
-                  <a:srgbClr val="F3F2F2"/>
+                  <a:srgbClr val="FAF6EF"/>
                 </a:solidFill>
                 <a:latin typeface="Arial"/>
                 <a:ea typeface="Arial"/>
@@ -16844,10 +16844,10 @@
   <a:themeElements>
     <a:clrScheme name="Office">
       <a:dk1>
-        <a:srgbClr val="000000"/>
+        <a:srgbClr val="201F1D"/>
       </a:dk1>
       <a:lt1>
-        <a:srgbClr val="FFFFFF"/>
+        <a:srgbClr val="FAF6EF"/>
       </a:lt1>
       <a:dk2>
         <a:srgbClr val="44546A"/>
@@ -17123,10 +17123,10 @@
   <a:themeElements>
     <a:clrScheme name="Office">
       <a:dk1>
-        <a:srgbClr val="000000"/>
+        <a:srgbClr val="201F1D"/>
       </a:dk1>
       <a:lt1>
-        <a:srgbClr val="FFFFFF"/>
+        <a:srgbClr val="FAF6EF"/>
       </a:lt1>
       <a:dk2>
         <a:srgbClr val="44546A"/>

--- a/docs/apresentacoes/Arquitetura BioCultural v2.pptx
+++ b/docs/apresentacoes/Arquitetura BioCultural v2.pptx
@@ -7608,7 +7608,7 @@
         </p:nvSpPr>
         <p:spPr>
           <a:xfrm>
-            <a:off x="1746360" y="5685840"/>
+            <a:off x="3388715" y="5685840"/>
             <a:ext cx="164160" cy="164160"/>
           </a:xfrm>
           <a:prstGeom prst="ellipse">
@@ -7667,8 +7667,8 @@
         </p:nvSpPr>
         <p:spPr>
           <a:xfrm>
-            <a:off x="932760" y="5230440"/>
-            <a:ext cx="1791720" cy="292320"/>
+            <a:off x="2660795" y="5230440"/>
+            <a:ext cx="1620000" cy="292320"/>
           </a:xfrm>
           <a:prstGeom prst="rect">
             <a:avLst/>
@@ -7737,8 +7737,8 @@
         </p:nvSpPr>
         <p:spPr>
           <a:xfrm>
-            <a:off x="941760" y="3017520"/>
-            <a:ext cx="1773720" cy="2121120"/>
+            <a:off x="2660795" y="3017520"/>
+            <a:ext cx="1620000" cy="2121120"/>
           </a:xfrm>
           <a:prstGeom prst="rect">
             <a:avLst/>
@@ -7825,7 +7825,7 @@
         </p:nvSpPr>
         <p:spPr>
           <a:xfrm>
-            <a:off x="3575160" y="5685840"/>
+            <a:off x="5033030" y="5685840"/>
             <a:ext cx="164160" cy="164160"/>
           </a:xfrm>
           <a:prstGeom prst="ellipse">
@@ -7884,8 +7884,8 @@
         </p:nvSpPr>
         <p:spPr>
           <a:xfrm>
-            <a:off x="2761560" y="5989320"/>
-            <a:ext cx="1791720" cy="292320"/>
+            <a:off x="4305110" y="5989320"/>
+            <a:ext cx="1620000" cy="292320"/>
           </a:xfrm>
           <a:prstGeom prst="rect">
             <a:avLst/>
@@ -7954,8 +7954,8 @@
         </p:nvSpPr>
         <p:spPr>
           <a:xfrm>
-            <a:off x="2770560" y="6355080"/>
-            <a:ext cx="1773720" cy="2121120"/>
+            <a:off x="4305110" y="6355080"/>
+            <a:ext cx="1620000" cy="2121120"/>
           </a:xfrm>
           <a:prstGeom prst="rect">
             <a:avLst/>
@@ -8042,7 +8042,7 @@
         </p:nvSpPr>
         <p:spPr>
           <a:xfrm>
-            <a:off x="5403960" y="5685840"/>
+            <a:off x="6677345" y="5685840"/>
             <a:ext cx="164160" cy="164160"/>
           </a:xfrm>
           <a:prstGeom prst="ellipse">
@@ -8101,8 +8101,8 @@
         </p:nvSpPr>
         <p:spPr>
           <a:xfrm>
-            <a:off x="4590360" y="5230440"/>
-            <a:ext cx="1791720" cy="292320"/>
+            <a:off x="5949425" y="5230440"/>
+            <a:ext cx="1620000" cy="292320"/>
           </a:xfrm>
           <a:prstGeom prst="rect">
             <a:avLst/>
@@ -8171,8 +8171,8 @@
         </p:nvSpPr>
         <p:spPr>
           <a:xfrm>
-            <a:off x="4599360" y="3017520"/>
-            <a:ext cx="1773720" cy="2121120"/>
+            <a:off x="5949425" y="3017520"/>
+            <a:ext cx="1620000" cy="2121120"/>
           </a:xfrm>
           <a:prstGeom prst="rect">
             <a:avLst/>
@@ -8259,7 +8259,7 @@
         </p:nvSpPr>
         <p:spPr>
           <a:xfrm>
-            <a:off x="7232760" y="5685840"/>
+            <a:off x="8321660" y="5685840"/>
             <a:ext cx="164160" cy="164160"/>
           </a:xfrm>
           <a:prstGeom prst="ellipse">
@@ -8318,8 +8318,8 @@
         </p:nvSpPr>
         <p:spPr>
           <a:xfrm>
-            <a:off x="6419160" y="5989320"/>
-            <a:ext cx="1791720" cy="292320"/>
+            <a:off x="7593740" y="5989320"/>
+            <a:ext cx="1620000" cy="292320"/>
           </a:xfrm>
           <a:prstGeom prst="rect">
             <a:avLst/>
@@ -8388,8 +8388,8 @@
         </p:nvSpPr>
         <p:spPr>
           <a:xfrm>
-            <a:off x="6428160" y="6355080"/>
-            <a:ext cx="1773720" cy="2121120"/>
+            <a:off x="7593740" y="6355080"/>
+            <a:ext cx="1620000" cy="2121120"/>
           </a:xfrm>
           <a:prstGeom prst="rect">
             <a:avLst/>
@@ -8476,7 +8476,7 @@
         </p:nvSpPr>
         <p:spPr>
           <a:xfrm>
-            <a:off x="9061560" y="5685840"/>
+            <a:off x="9965975" y="5685840"/>
             <a:ext cx="164160" cy="164160"/>
           </a:xfrm>
           <a:prstGeom prst="ellipse">
@@ -8535,8 +8535,8 @@
         </p:nvSpPr>
         <p:spPr>
           <a:xfrm>
-            <a:off x="8247960" y="5230440"/>
-            <a:ext cx="1791720" cy="292320"/>
+            <a:off x="9238055" y="5230440"/>
+            <a:ext cx="1620000" cy="292320"/>
           </a:xfrm>
           <a:prstGeom prst="rect">
             <a:avLst/>
@@ -8605,8 +8605,8 @@
         </p:nvSpPr>
         <p:spPr>
           <a:xfrm>
-            <a:off x="8256960" y="3017520"/>
-            <a:ext cx="1773720" cy="2121120"/>
+            <a:off x="9238055" y="3017520"/>
+            <a:ext cx="1620000" cy="2121120"/>
           </a:xfrm>
           <a:prstGeom prst="rect">
             <a:avLst/>
@@ -8693,7 +8693,7 @@
         </p:nvSpPr>
         <p:spPr>
           <a:xfrm>
-            <a:off x="10890360" y="5685840"/>
+            <a:off x="11610290" y="5685840"/>
             <a:ext cx="164160" cy="164160"/>
           </a:xfrm>
           <a:prstGeom prst="ellipse">
@@ -8752,8 +8752,8 @@
         </p:nvSpPr>
         <p:spPr>
           <a:xfrm>
-            <a:off x="10076760" y="5989320"/>
-            <a:ext cx="1791720" cy="292320"/>
+            <a:off x="10882370" y="5989320"/>
+            <a:ext cx="1620000" cy="292320"/>
           </a:xfrm>
           <a:prstGeom prst="rect">
             <a:avLst/>
@@ -8822,8 +8822,8 @@
         </p:nvSpPr>
         <p:spPr>
           <a:xfrm>
-            <a:off x="10085760" y="6355080"/>
-            <a:ext cx="1773720" cy="2121120"/>
+            <a:off x="10882370" y="6355080"/>
+            <a:ext cx="1620000" cy="2121120"/>
           </a:xfrm>
           <a:prstGeom prst="rect">
             <a:avLst/>
@@ -8910,7 +8910,7 @@
         </p:nvSpPr>
         <p:spPr>
           <a:xfrm>
-            <a:off x="12719160" y="5685840"/>
+            <a:off x="13254605" y="5685840"/>
             <a:ext cx="164160" cy="164160"/>
           </a:xfrm>
           <a:prstGeom prst="ellipse">
@@ -8969,8 +8969,8 @@
         </p:nvSpPr>
         <p:spPr>
           <a:xfrm>
-            <a:off x="11905560" y="5230440"/>
-            <a:ext cx="1791720" cy="292320"/>
+            <a:off x="12526685" y="5230440"/>
+            <a:ext cx="1620000" cy="292320"/>
           </a:xfrm>
           <a:prstGeom prst="rect">
             <a:avLst/>
@@ -9039,8 +9039,8 @@
         </p:nvSpPr>
         <p:spPr>
           <a:xfrm>
-            <a:off x="11914560" y="3017520"/>
-            <a:ext cx="1773720" cy="2121120"/>
+            <a:off x="12526685" y="3017520"/>
+            <a:ext cx="1620000" cy="2121120"/>
           </a:xfrm>
           <a:prstGeom prst="rect">
             <a:avLst/>
@@ -9127,7 +9127,7 @@
         </p:nvSpPr>
         <p:spPr>
           <a:xfrm>
-            <a:off x="14547960" y="5685840"/>
+            <a:off x="14898920" y="5685840"/>
             <a:ext cx="164160" cy="164160"/>
           </a:xfrm>
           <a:prstGeom prst="ellipse">
@@ -9186,8 +9186,8 @@
         </p:nvSpPr>
         <p:spPr>
           <a:xfrm>
-            <a:off x="13734360" y="5989320"/>
-            <a:ext cx="1791720" cy="292320"/>
+            <a:off x="14171000" y="5989320"/>
+            <a:ext cx="1620000" cy="292320"/>
           </a:xfrm>
           <a:prstGeom prst="rect">
             <a:avLst/>
@@ -9256,8 +9256,8 @@
         </p:nvSpPr>
         <p:spPr>
           <a:xfrm>
-            <a:off x="13743360" y="6355080"/>
-            <a:ext cx="1773720" cy="2121120"/>
+            <a:off x="14171000" y="6355080"/>
+            <a:ext cx="1620000" cy="2121120"/>
           </a:xfrm>
           <a:prstGeom prst="rect">
             <a:avLst/>
@@ -9344,7 +9344,7 @@
         </p:nvSpPr>
         <p:spPr>
           <a:xfrm>
-            <a:off x="16376760" y="5685840"/>
+            <a:off x="16543235" y="5685840"/>
             <a:ext cx="164160" cy="164160"/>
           </a:xfrm>
           <a:prstGeom prst="ellipse">
@@ -9403,8 +9403,8 @@
         </p:nvSpPr>
         <p:spPr>
           <a:xfrm>
-            <a:off x="15563160" y="5230440"/>
-            <a:ext cx="1791720" cy="292320"/>
+            <a:off x="15815315" y="5230440"/>
+            <a:ext cx="1620000" cy="292320"/>
           </a:xfrm>
           <a:prstGeom prst="rect">
             <a:avLst/>
@@ -9473,8 +9473,8 @@
         </p:nvSpPr>
         <p:spPr>
           <a:xfrm>
-            <a:off x="15572160" y="3017520"/>
-            <a:ext cx="1773720" cy="2121120"/>
+            <a:off x="15815315" y="3017520"/>
+            <a:ext cx="1620000" cy="2121120"/>
           </a:xfrm>
           <a:prstGeom prst="rect">
             <a:avLst/>
@@ -9541,6 +9541,211 @@
                 <a:ea typeface="Arial"/>
               </a:rPr>
               <a:t>o Relato, o consentimento como processo, as gravações e as oficinas</a:t>
+            </a:r>
+            <a:endParaRPr lang="pt-BR" sz="1250" b="0" u="none" strike="noStrike">
+              <a:solidFill>
+                <a:srgbClr val="000000"/>
+              </a:solidFill>
+              <a:effectLst/>
+              <a:uFillTx/>
+              <a:latin typeface="Arial"/>
+            </a:endParaRPr>
+          </a:p>
+        </p:txBody>
+      </p:sp>
+      <p:sp>
+        <p:nvSpPr>
+          <p:cNvPr id="200" name="Oval 200"/>
+          <p:cNvSpPr/>
+          <p:nvPr/>
+        </p:nvSpPr>
+        <p:spPr>
+          <a:xfrm>
+            <a:off x="1744400" y="5685840"/>
+            <a:ext cx="164160" cy="164160"/>
+          </a:xfrm>
+          <a:prstGeom prst="ellipse">
+            <a:avLst/>
+          </a:prstGeom>
+          <a:solidFill>
+            <a:srgbClr val="B4542F"/>
+          </a:solidFill>
+          <a:ln w="19050">
+            <a:solidFill>
+              <a:srgbClr val="FAF6EF"/>
+            </a:solidFill>
+            <a:round/>
+          </a:ln>
+          <a:effectLst>
+            <a:outerShdw blurRad="39960" dir="5400000" dist="23040" rotWithShape="0">
+              <a:srgbClr val="000000">
+                <a:alpha val="35000"/>
+              </a:srgbClr>
+            </a:outerShdw>
+          </a:effectLst>
+        </p:spPr>
+        <p:style>
+          <a:lnRef idx="1">
+            <a:schemeClr val="accent1"/>
+          </a:lnRef>
+          <a:fillRef idx="3">
+            <a:schemeClr val="accent1"/>
+          </a:fillRef>
+          <a:effectRef idx="2">
+            <a:schemeClr val="accent1"/>
+          </a:effectRef>
+          <a:fontRef idx="minor"/>
+        </p:style>
+        <p:txBody>
+          <a:bodyPr lIns="90000" tIns="45000" rIns="90000" bIns="45000" anchor="ctr">
+            <a:noAutofit/>
+          </a:bodyPr>
+          <a:p>
+            <a:endParaRPr lang="pt-BR" sz="1400" b="0" u="none" strike="noStrike">
+              <a:solidFill>
+                <a:schemeClr val="lt1"/>
+              </a:solidFill>
+              <a:effectLst/>
+              <a:uFillTx/>
+              <a:latin typeface="Arial"/>
+            </a:endParaRPr>
+          </a:p>
+        </p:txBody>
+      </p:sp>
+      <p:sp>
+        <p:nvSpPr>
+          <p:cNvPr id="201" name="TextBox 201"/>
+          <p:cNvSpPr/>
+          <p:nvPr/>
+        </p:nvSpPr>
+        <p:spPr>
+          <a:xfrm>
+            <a:off x="1016480" y="5989320"/>
+            <a:ext cx="1620000" cy="292320"/>
+          </a:xfrm>
+          <a:prstGeom prst="rect">
+            <a:avLst/>
+          </a:prstGeom>
+          <a:noFill/>
+          <a:ln w="0">
+            <a:noFill/>
+          </a:ln>
+        </p:spPr>
+        <p:style>
+          <a:lnRef idx="0"/>
+          <a:fillRef idx="0"/>
+          <a:effectRef idx="0"/>
+          <a:fontRef idx="minor"/>
+        </p:style>
+        <p:txBody>
+          <a:bodyPr lIns="0" tIns="0" rIns="0" bIns="0" anchor="t">
+            <a:spAutoFit/>
+          </a:bodyPr>
+          <a:p>
+            <a:pPr algn="ctr">
+              <a:lnSpc>
+                <a:spcPct val="100000"/>
+              </a:lnSpc>
+            </a:pPr>
+            <a:r>
+              <a:rPr lang="pt-BR" sz="1350" b="1" u="none" strike="noStrike">
+                <a:solidFill>
+                  <a:srgbClr val="201F1D"/>
+                </a:solidFill>
+                <a:effectLst/>
+                <a:uFillTx/>
+                <a:latin typeface="Arial"/>
+                <a:ea typeface="Arial"/>
+              </a:rPr>
+              <a:t>jan/2024 · v0.1</a:t>
+            </a:r>
+            <a:endParaRPr lang="pt-BR" sz="1350" b="0" u="none" strike="noStrike">
+              <a:solidFill>
+                <a:srgbClr val="000000"/>
+              </a:solidFill>
+              <a:effectLst/>
+              <a:uFillTx/>
+              <a:latin typeface="Arial"/>
+            </a:endParaRPr>
+          </a:p>
+        </p:txBody>
+      </p:sp>
+      <p:sp>
+        <p:nvSpPr>
+          <p:cNvPr id="202" name="TextBox 202"/>
+          <p:cNvSpPr/>
+          <p:nvPr/>
+        </p:nvSpPr>
+        <p:spPr>
+          <a:xfrm>
+            <a:off x="1016480" y="6355080"/>
+            <a:ext cx="1620000" cy="2121120"/>
+          </a:xfrm>
+          <a:prstGeom prst="rect">
+            <a:avLst/>
+          </a:prstGeom>
+          <a:noFill/>
+          <a:ln w="0">
+            <a:noFill/>
+          </a:ln>
+        </p:spPr>
+        <p:style>
+          <a:lnRef idx="0"/>
+          <a:fillRef idx="0"/>
+          <a:effectRef idx="0"/>
+          <a:fontRef idx="minor"/>
+        </p:style>
+        <p:txBody>
+          <a:bodyPr lIns="0" tIns="0" rIns="0" bIns="0" anchor="t">
+            <a:spAutoFit/>
+          </a:bodyPr>
+          <a:p>
+            <a:pPr algn="ctr">
+              <a:lnSpc>
+                <a:spcPct val="100000"/>
+              </a:lnSpc>
+            </a:pPr>
+            <a:r>
+              <a:rPr lang="pt-BR" sz="1600" b="1" u="none" strike="noStrike">
+                <a:solidFill>
+                  <a:srgbClr val="B4542F"/>
+                </a:solidFill>
+                <a:effectLst/>
+                <a:uFillTx/>
+                <a:latin typeface="Arial"/>
+                <a:ea typeface="Arial"/>
+              </a:rPr>
+              <a:t>Base de Dados de Plantas Medicinais</a:t>
+            </a:r>
+            <a:endParaRPr lang="pt-BR" sz="1600" b="0" u="none" strike="noStrike">
+              <a:solidFill>
+                <a:srgbClr val="000000"/>
+              </a:solidFill>
+              <a:effectLst/>
+              <a:uFillTx/>
+              <a:latin typeface="Arial"/>
+            </a:endParaRPr>
+          </a:p>
+          <a:p>
+            <a:pPr algn="ctr">
+              <a:lnSpc>
+                <a:spcPct val="100000"/>
+              </a:lnSpc>
+              <a:spcBef>
+                <a:spcPts val="400"/>
+              </a:spcBef>
+            </a:pPr>
+            <a:r>
+              <a:rPr lang="pt-BR" sz="1250" b="0" u="none" strike="noStrike">
+                <a:solidFill>
+                  <a:srgbClr val="5C554C"/>
+                </a:solidFill>
+                <a:effectLst/>
+                <a:uFillTx/>
+                <a:latin typeface="Arial"/>
+                <a:ea typeface="Arial"/>
+              </a:rPr>
+              <a:t>Dra. Viviane Fonseca · gitserver.jbrj.gov.br/edalcin/bdmedicinais</a:t>
             </a:r>
             <a:endParaRPr lang="pt-BR" sz="1250" b="0" u="none" strike="noStrike">
               <a:solidFill>

--- a/docs/apresentacoes/Arquitetura BioCultural v2.pptx
+++ b/docs/apresentacoes/Arquitetura BioCultural v2.pptx
@@ -33,7 +33,6 @@
     <p:sldId id="278" r:id="rId26"/>
     <p:sldId id="279" r:id="rId27"/>
     <p:sldId id="280" r:id="rId28"/>
-    <p:sldId id="281" r:id="rId29"/>
   </p:sldIdLst>
   <p:sldSz cx="18288000" cy="10287000"/>
   <p:notesSz cx="10287000" cy="18288000"/>
@@ -86,7 +85,7 @@
           </a:bodyPr>
           <a:p>
             <a:r>
-              <a:rPr lang="pt-BR" sz="1400" b="0" u="none" strike="noStrike">
+              <a:rPr lang="pt-BR" sz="4400" b="0" u="none" strike="noStrike">
                 <a:solidFill>
                   <a:srgbClr val="000000"/>
                 </a:solidFill>
@@ -96,7 +95,7 @@
               </a:rPr>
               <a:t>Clique para mover o slide</a:t>
             </a:r>
-            <a:endParaRPr lang="pt-BR" sz="1400" b="0" u="none" strike="noStrike">
+            <a:endParaRPr lang="pt-BR" sz="4400" b="0" u="none" strike="noStrike">
               <a:solidFill>
                 <a:srgbClr val="000000"/>
               </a:solidFill>
@@ -389,7 +388,7 @@
             <a:pPr indent="0" algn="r">
               <a:buNone/>
             </a:pPr>
-            <a:fld id="{B3A37133-8CC5-4360-9B96-E8B728F58461}" type="slidenum">
+            <a:fld id="{E739FDF2-0745-4E31-BBAF-BAC67940CBCA}" type="slidenum">
               <a:rPr lang="pt-BR" sz="1400" b="0" u="none" strike="noStrike">
                 <a:solidFill>
                   <a:srgbClr val="000000"/>
@@ -436,7 +435,7 @@
       </p:grpSpPr>
       <p:sp>
         <p:nvSpPr>
-          <p:cNvPr id="172" name="PlaceHolder 1"/>
+          <p:cNvPr id="160" name="PlaceHolder 1"/>
           <p:cNvSpPr>
             <a:spLocks noGrp="1"/>
           </p:cNvSpPr>
@@ -447,19 +446,19 @@
         <p:spPr>
           <a:xfrm>
             <a:off x="685800" y="1143000"/>
-            <a:ext cx="5486040" cy="3085920"/>
-          </a:xfrm>
-          <a:prstGeom prst="rect">
-            <a:avLst/>
-          </a:prstGeom>
-          <a:ln w="0">
-            <a:noFill/>
-          </a:ln>
-        </p:spPr>
-      </p:sp>
-      <p:sp>
-        <p:nvSpPr>
-          <p:cNvPr id="173" name="PlaceHolder 2"/>
+            <a:ext cx="5484960" cy="3084840"/>
+          </a:xfrm>
+          <a:prstGeom prst="rect">
+            <a:avLst/>
+          </a:prstGeom>
+          <a:ln w="0">
+            <a:noFill/>
+          </a:ln>
+        </p:spPr>
+      </p:sp>
+      <p:sp>
+        <p:nvSpPr>
+          <p:cNvPr id="161" name="PlaceHolder 2"/>
           <p:cNvSpPr>
             <a:spLocks noGrp="1"/>
           </p:cNvSpPr>
@@ -470,7 +469,7 @@
         <p:spPr>
           <a:xfrm>
             <a:off x="685800" y="4400640"/>
-            <a:ext cx="5486040" cy="3600000"/>
+            <a:ext cx="5484960" cy="3598920"/>
           </a:xfrm>
           <a:prstGeom prst="rect">
             <a:avLst/>
@@ -485,7 +484,7 @@
             <a:noAutofit/>
           </a:bodyPr>
           <a:p>
-            <a:pPr indent="0" algn="l">
+            <a:pPr marL="216000" indent="0" algn="l">
               <a:lnSpc>
                 <a:spcPct val="100000"/>
               </a:lnSpc>
@@ -519,7 +518,7 @@
       </p:sp>
       <p:sp>
         <p:nvSpPr>
-          <p:cNvPr id="174" name="PlaceHolder 3"/>
+          <p:cNvPr id="162" name="PlaceHolder 3"/>
           <p:cNvSpPr>
             <a:spLocks noGrp="1"/>
           </p:cNvSpPr>
@@ -530,7 +529,7 @@
         <p:spPr>
           <a:xfrm>
             <a:off x="3884760" y="8685360"/>
-            <a:ext cx="2971440" cy="458280"/>
+            <a:ext cx="2970360" cy="457200"/>
           </a:xfrm>
           <a:prstGeom prst="rect">
             <a:avLst/>
@@ -573,7 +572,7 @@
                 <a:tab pos="0" algn="l"/>
               </a:tabLst>
             </a:pPr>
-            <a:fld id="{B0813F8D-E5F1-4497-8A72-60C6F232F40C}" type="slidenum">
+            <a:fld id="{B3A1A42B-EA56-40CB-B321-7467A69E0F6D}" type="slidenum">
               <a:rPr lang="en-US" sz="1400" b="0" u="none" strike="noStrike">
                 <a:solidFill>
                   <a:srgbClr val="000000"/>
@@ -619,7 +618,7 @@
       </p:grpSpPr>
       <p:sp>
         <p:nvSpPr>
-          <p:cNvPr id="199" name="PlaceHolder 1"/>
+          <p:cNvPr id="187" name="PlaceHolder 1"/>
           <p:cNvSpPr>
             <a:spLocks noGrp="1"/>
           </p:cNvSpPr>
@@ -630,19 +629,19 @@
         <p:spPr>
           <a:xfrm>
             <a:off x="685800" y="1143000"/>
-            <a:ext cx="5486040" cy="3085920"/>
-          </a:xfrm>
-          <a:prstGeom prst="rect">
-            <a:avLst/>
-          </a:prstGeom>
-          <a:ln w="0">
-            <a:noFill/>
-          </a:ln>
-        </p:spPr>
-      </p:sp>
-      <p:sp>
-        <p:nvSpPr>
-          <p:cNvPr id="200" name="PlaceHolder 2"/>
+            <a:ext cx="5484960" cy="3084840"/>
+          </a:xfrm>
+          <a:prstGeom prst="rect">
+            <a:avLst/>
+          </a:prstGeom>
+          <a:ln w="0">
+            <a:noFill/>
+          </a:ln>
+        </p:spPr>
+      </p:sp>
+      <p:sp>
+        <p:nvSpPr>
+          <p:cNvPr id="188" name="PlaceHolder 2"/>
           <p:cNvSpPr>
             <a:spLocks noGrp="1"/>
           </p:cNvSpPr>
@@ -653,7 +652,7 @@
         <p:spPr>
           <a:xfrm>
             <a:off x="685800" y="4400640"/>
-            <a:ext cx="5486040" cy="3600000"/>
+            <a:ext cx="5484960" cy="3598920"/>
           </a:xfrm>
           <a:prstGeom prst="rect">
             <a:avLst/>
@@ -668,7 +667,7 @@
             <a:noAutofit/>
           </a:bodyPr>
           <a:p>
-            <a:pPr indent="0" algn="l">
+            <a:pPr marL="216000" indent="0" algn="l">
               <a:lnSpc>
                 <a:spcPct val="100000"/>
               </a:lnSpc>
@@ -702,7 +701,7 @@
       </p:sp>
       <p:sp>
         <p:nvSpPr>
-          <p:cNvPr id="201" name="PlaceHolder 3"/>
+          <p:cNvPr id="189" name="PlaceHolder 3"/>
           <p:cNvSpPr>
             <a:spLocks noGrp="1"/>
           </p:cNvSpPr>
@@ -713,7 +712,7 @@
         <p:spPr>
           <a:xfrm>
             <a:off x="3884760" y="8685360"/>
-            <a:ext cx="2971440" cy="458280"/>
+            <a:ext cx="2970360" cy="457200"/>
           </a:xfrm>
           <a:prstGeom prst="rect">
             <a:avLst/>
@@ -756,7 +755,7 @@
                 <a:tab pos="0" algn="l"/>
               </a:tabLst>
             </a:pPr>
-            <a:fld id="{2C0FED16-3D45-4D58-941E-85AE856CA30B}" type="slidenum">
+            <a:fld id="{577B93E0-BBE6-444B-A1FD-4FAB687D04D5}" type="slidenum">
               <a:rPr lang="en-US" sz="1400" b="0" u="none" strike="noStrike">
                 <a:solidFill>
                   <a:srgbClr val="000000"/>
@@ -802,7 +801,7 @@
       </p:grpSpPr>
       <p:sp>
         <p:nvSpPr>
-          <p:cNvPr id="202" name="PlaceHolder 1"/>
+          <p:cNvPr id="190" name="PlaceHolder 1"/>
           <p:cNvSpPr>
             <a:spLocks noGrp="1"/>
           </p:cNvSpPr>
@@ -813,19 +812,19 @@
         <p:spPr>
           <a:xfrm>
             <a:off x="685800" y="1143000"/>
-            <a:ext cx="5486040" cy="3085920"/>
-          </a:xfrm>
-          <a:prstGeom prst="rect">
-            <a:avLst/>
-          </a:prstGeom>
-          <a:ln w="0">
-            <a:noFill/>
-          </a:ln>
-        </p:spPr>
-      </p:sp>
-      <p:sp>
-        <p:nvSpPr>
-          <p:cNvPr id="203" name="PlaceHolder 2"/>
+            <a:ext cx="5484960" cy="3084840"/>
+          </a:xfrm>
+          <a:prstGeom prst="rect">
+            <a:avLst/>
+          </a:prstGeom>
+          <a:ln w="0">
+            <a:noFill/>
+          </a:ln>
+        </p:spPr>
+      </p:sp>
+      <p:sp>
+        <p:nvSpPr>
+          <p:cNvPr id="191" name="PlaceHolder 2"/>
           <p:cNvSpPr>
             <a:spLocks noGrp="1"/>
           </p:cNvSpPr>
@@ -836,7 +835,7 @@
         <p:spPr>
           <a:xfrm>
             <a:off x="685800" y="4400640"/>
-            <a:ext cx="5486040" cy="3600360"/>
+            <a:ext cx="5484960" cy="3599280"/>
           </a:xfrm>
           <a:prstGeom prst="rect">
             <a:avLst/>
@@ -854,20 +853,20 @@
             <a:pPr indent="0" algn="l">
               <a:buNone/>
             </a:pPr>
-            <a:endParaRPr lang="pt-BR" sz="1200" b="0" u="none" strike="noStrike">
-              <a:solidFill>
-                <a:schemeClr val="dk1"/>
-              </a:solidFill>
-              <a:effectLst/>
-              <a:uFillTx/>
-              <a:latin typeface="Calibri"/>
-            </a:endParaRPr>
-          </a:p>
-        </p:txBody>
-      </p:sp>
-      <p:sp>
-        <p:nvSpPr>
-          <p:cNvPr id="204" name="PlaceHolder 3"/>
+            <a:endParaRPr lang="pt-BR" sz="1800" b="0" u="none" strike="noStrike">
+              <a:solidFill>
+                <a:srgbClr val="000000"/>
+              </a:solidFill>
+              <a:effectLst/>
+              <a:uFillTx/>
+              <a:latin typeface="Arial"/>
+            </a:endParaRPr>
+          </a:p>
+        </p:txBody>
+      </p:sp>
+      <p:sp>
+        <p:nvSpPr>
+          <p:cNvPr id="192" name="PlaceHolder 3"/>
           <p:cNvSpPr>
             <a:spLocks noGrp="1"/>
           </p:cNvSpPr>
@@ -878,7 +877,7 @@
         <p:spPr>
           <a:xfrm>
             <a:off x="3884760" y="8685360"/>
-            <a:ext cx="2971440" cy="458280"/>
+            <a:ext cx="2970360" cy="457200"/>
           </a:xfrm>
           <a:prstGeom prst="rect">
             <a:avLst/>
@@ -921,7 +920,7 @@
                 <a:tab pos="0" algn="l"/>
               </a:tabLst>
             </a:pPr>
-            <a:fld id="{8B1F86A6-1F7A-4D95-BED3-54B5142A8A5C}" type="slidenum">
+            <a:fld id="{FD34EA3A-CADF-4828-8A6B-94A8B20EF4E9}" type="slidenum">
               <a:rPr lang="en-US" sz="1400" b="0" u="none" strike="noStrike">
                 <a:solidFill>
                   <a:srgbClr val="000000"/>
@@ -967,7 +966,7 @@
       </p:grpSpPr>
       <p:sp>
         <p:nvSpPr>
-          <p:cNvPr id="205" name="PlaceHolder 1"/>
+          <p:cNvPr id="193" name="PlaceHolder 1"/>
           <p:cNvSpPr>
             <a:spLocks noGrp="1"/>
           </p:cNvSpPr>
@@ -978,19 +977,19 @@
         <p:spPr>
           <a:xfrm>
             <a:off x="685800" y="1143000"/>
-            <a:ext cx="5486040" cy="3085920"/>
-          </a:xfrm>
-          <a:prstGeom prst="rect">
-            <a:avLst/>
-          </a:prstGeom>
-          <a:ln w="0">
-            <a:noFill/>
-          </a:ln>
-        </p:spPr>
-      </p:sp>
-      <p:sp>
-        <p:nvSpPr>
-          <p:cNvPr id="206" name="PlaceHolder 2"/>
+            <a:ext cx="5484960" cy="3084840"/>
+          </a:xfrm>
+          <a:prstGeom prst="rect">
+            <a:avLst/>
+          </a:prstGeom>
+          <a:ln w="0">
+            <a:noFill/>
+          </a:ln>
+        </p:spPr>
+      </p:sp>
+      <p:sp>
+        <p:nvSpPr>
+          <p:cNvPr id="194" name="PlaceHolder 2"/>
           <p:cNvSpPr>
             <a:spLocks noGrp="1"/>
           </p:cNvSpPr>
@@ -1001,7 +1000,7 @@
         <p:spPr>
           <a:xfrm>
             <a:off x="685800" y="4400640"/>
-            <a:ext cx="5486040" cy="3600000"/>
+            <a:ext cx="5484960" cy="3598920"/>
           </a:xfrm>
           <a:prstGeom prst="rect">
             <a:avLst/>
@@ -1016,7 +1015,7 @@
             <a:noAutofit/>
           </a:bodyPr>
           <a:p>
-            <a:pPr indent="0" algn="l">
+            <a:pPr marL="216000" indent="0" algn="l">
               <a:lnSpc>
                 <a:spcPct val="100000"/>
               </a:lnSpc>
@@ -1050,7 +1049,7 @@
       </p:sp>
       <p:sp>
         <p:nvSpPr>
-          <p:cNvPr id="207" name="PlaceHolder 3"/>
+          <p:cNvPr id="195" name="PlaceHolder 3"/>
           <p:cNvSpPr>
             <a:spLocks noGrp="1"/>
           </p:cNvSpPr>
@@ -1061,7 +1060,7 @@
         <p:spPr>
           <a:xfrm>
             <a:off x="3884760" y="8685360"/>
-            <a:ext cx="2971440" cy="458280"/>
+            <a:ext cx="2970360" cy="457200"/>
           </a:xfrm>
           <a:prstGeom prst="rect">
             <a:avLst/>
@@ -1104,7 +1103,7 @@
                 <a:tab pos="0" algn="l"/>
               </a:tabLst>
             </a:pPr>
-            <a:fld id="{8B49D55D-88D6-468A-88BC-CBF74A2B4B0E}" type="slidenum">
+            <a:fld id="{84AB9436-4968-4B6E-BE60-3B20D3423990}" type="slidenum">
               <a:rPr lang="en-US" sz="1400" b="0" u="none" strike="noStrike">
                 <a:solidFill>
                   <a:srgbClr val="000000"/>
@@ -1150,7 +1149,7 @@
       </p:grpSpPr>
       <p:sp>
         <p:nvSpPr>
-          <p:cNvPr id="208" name="PlaceHolder 1"/>
+          <p:cNvPr id="196" name="PlaceHolder 1"/>
           <p:cNvSpPr>
             <a:spLocks noGrp="1"/>
           </p:cNvSpPr>
@@ -1161,19 +1160,19 @@
         <p:spPr>
           <a:xfrm>
             <a:off x="685800" y="1143000"/>
-            <a:ext cx="5486040" cy="3085920"/>
-          </a:xfrm>
-          <a:prstGeom prst="rect">
-            <a:avLst/>
-          </a:prstGeom>
-          <a:ln w="0">
-            <a:noFill/>
-          </a:ln>
-        </p:spPr>
-      </p:sp>
-      <p:sp>
-        <p:nvSpPr>
-          <p:cNvPr id="209" name="PlaceHolder 2"/>
+            <a:ext cx="5484960" cy="3084840"/>
+          </a:xfrm>
+          <a:prstGeom prst="rect">
+            <a:avLst/>
+          </a:prstGeom>
+          <a:ln w="0">
+            <a:noFill/>
+          </a:ln>
+        </p:spPr>
+      </p:sp>
+      <p:sp>
+        <p:nvSpPr>
+          <p:cNvPr id="197" name="PlaceHolder 2"/>
           <p:cNvSpPr>
             <a:spLocks noGrp="1"/>
           </p:cNvSpPr>
@@ -1184,7 +1183,7 @@
         <p:spPr>
           <a:xfrm>
             <a:off x="685800" y="4400640"/>
-            <a:ext cx="5486040" cy="3600360"/>
+            <a:ext cx="5484960" cy="3599280"/>
           </a:xfrm>
           <a:prstGeom prst="rect">
             <a:avLst/>
@@ -1202,20 +1201,20 @@
             <a:pPr indent="0" algn="l">
               <a:buNone/>
             </a:pPr>
-            <a:endParaRPr lang="pt-BR" sz="1200" b="0" u="none" strike="noStrike">
-              <a:solidFill>
-                <a:schemeClr val="dk1"/>
-              </a:solidFill>
-              <a:effectLst/>
-              <a:uFillTx/>
-              <a:latin typeface="Calibri"/>
-            </a:endParaRPr>
-          </a:p>
-        </p:txBody>
-      </p:sp>
-      <p:sp>
-        <p:nvSpPr>
-          <p:cNvPr id="210" name="PlaceHolder 3"/>
+            <a:endParaRPr lang="pt-BR" sz="1800" b="0" u="none" strike="noStrike">
+              <a:solidFill>
+                <a:srgbClr val="000000"/>
+              </a:solidFill>
+              <a:effectLst/>
+              <a:uFillTx/>
+              <a:latin typeface="Arial"/>
+            </a:endParaRPr>
+          </a:p>
+        </p:txBody>
+      </p:sp>
+      <p:sp>
+        <p:nvSpPr>
+          <p:cNvPr id="198" name="PlaceHolder 3"/>
           <p:cNvSpPr>
             <a:spLocks noGrp="1"/>
           </p:cNvSpPr>
@@ -1226,7 +1225,7 @@
         <p:spPr>
           <a:xfrm>
             <a:off x="3884760" y="8685360"/>
-            <a:ext cx="2971440" cy="458280"/>
+            <a:ext cx="2970360" cy="457200"/>
           </a:xfrm>
           <a:prstGeom prst="rect">
             <a:avLst/>
@@ -1269,7 +1268,7 @@
                 <a:tab pos="0" algn="l"/>
               </a:tabLst>
             </a:pPr>
-            <a:fld id="{BAF7F289-456F-4FD7-A9B5-C59A6DD862FA}" type="slidenum">
+            <a:fld id="{B6F3992F-28C2-4EE2-911B-D90C6763D86F}" type="slidenum">
               <a:rPr lang="en-US" sz="1400" b="0" u="none" strike="noStrike">
                 <a:solidFill>
                   <a:srgbClr val="000000"/>
@@ -1315,7 +1314,7 @@
       </p:grpSpPr>
       <p:sp>
         <p:nvSpPr>
-          <p:cNvPr id="211" name="PlaceHolder 1"/>
+          <p:cNvPr id="199" name="PlaceHolder 1"/>
           <p:cNvSpPr>
             <a:spLocks noGrp="1"/>
           </p:cNvSpPr>
@@ -1326,19 +1325,19 @@
         <p:spPr>
           <a:xfrm>
             <a:off x="685800" y="1143000"/>
-            <a:ext cx="5486040" cy="3085920"/>
-          </a:xfrm>
-          <a:prstGeom prst="rect">
-            <a:avLst/>
-          </a:prstGeom>
-          <a:ln w="0">
-            <a:noFill/>
-          </a:ln>
-        </p:spPr>
-      </p:sp>
-      <p:sp>
-        <p:nvSpPr>
-          <p:cNvPr id="212" name="PlaceHolder 2"/>
+            <a:ext cx="5484960" cy="3084840"/>
+          </a:xfrm>
+          <a:prstGeom prst="rect">
+            <a:avLst/>
+          </a:prstGeom>
+          <a:ln w="0">
+            <a:noFill/>
+          </a:ln>
+        </p:spPr>
+      </p:sp>
+      <p:sp>
+        <p:nvSpPr>
+          <p:cNvPr id="200" name="PlaceHolder 2"/>
           <p:cNvSpPr>
             <a:spLocks noGrp="1"/>
           </p:cNvSpPr>
@@ -1349,7 +1348,7 @@
         <p:spPr>
           <a:xfrm>
             <a:off x="685800" y="4400640"/>
-            <a:ext cx="5486040" cy="3600000"/>
+            <a:ext cx="5484960" cy="3598920"/>
           </a:xfrm>
           <a:prstGeom prst="rect">
             <a:avLst/>
@@ -1364,7 +1363,7 @@
             <a:noAutofit/>
           </a:bodyPr>
           <a:p>
-            <a:pPr indent="0" algn="l">
+            <a:pPr marL="216000" indent="0" algn="l">
               <a:lnSpc>
                 <a:spcPct val="100000"/>
               </a:lnSpc>
@@ -1398,7 +1397,7 @@
       </p:sp>
       <p:sp>
         <p:nvSpPr>
-          <p:cNvPr id="213" name="PlaceHolder 3"/>
+          <p:cNvPr id="201" name="PlaceHolder 3"/>
           <p:cNvSpPr>
             <a:spLocks noGrp="1"/>
           </p:cNvSpPr>
@@ -1409,7 +1408,7 @@
         <p:spPr>
           <a:xfrm>
             <a:off x="3884760" y="8685360"/>
-            <a:ext cx="2971440" cy="458280"/>
+            <a:ext cx="2970360" cy="457200"/>
           </a:xfrm>
           <a:prstGeom prst="rect">
             <a:avLst/>
@@ -1452,7 +1451,7 @@
                 <a:tab pos="0" algn="l"/>
               </a:tabLst>
             </a:pPr>
-            <a:fld id="{3DAB2EE0-B4BB-41C8-AEEC-EE2E4EEA19A1}" type="slidenum">
+            <a:fld id="{DB276B4F-5DBD-4734-92A6-B0A9860536F2}" type="slidenum">
               <a:rPr lang="en-US" sz="1400" b="0" u="none" strike="noStrike">
                 <a:solidFill>
                   <a:srgbClr val="000000"/>
@@ -1498,7 +1497,7 @@
       </p:grpSpPr>
       <p:sp>
         <p:nvSpPr>
-          <p:cNvPr id="214" name="PlaceHolder 1"/>
+          <p:cNvPr id="202" name="PlaceHolder 1"/>
           <p:cNvSpPr>
             <a:spLocks noGrp="1"/>
           </p:cNvSpPr>
@@ -1509,19 +1508,19 @@
         <p:spPr>
           <a:xfrm>
             <a:off x="685800" y="1143000"/>
-            <a:ext cx="5486040" cy="3085920"/>
-          </a:xfrm>
-          <a:prstGeom prst="rect">
-            <a:avLst/>
-          </a:prstGeom>
-          <a:ln w="0">
-            <a:noFill/>
-          </a:ln>
-        </p:spPr>
-      </p:sp>
-      <p:sp>
-        <p:nvSpPr>
-          <p:cNvPr id="215" name="PlaceHolder 2"/>
+            <a:ext cx="5484960" cy="3084840"/>
+          </a:xfrm>
+          <a:prstGeom prst="rect">
+            <a:avLst/>
+          </a:prstGeom>
+          <a:ln w="0">
+            <a:noFill/>
+          </a:ln>
+        </p:spPr>
+      </p:sp>
+      <p:sp>
+        <p:nvSpPr>
+          <p:cNvPr id="203" name="PlaceHolder 2"/>
           <p:cNvSpPr>
             <a:spLocks noGrp="1"/>
           </p:cNvSpPr>
@@ -1532,7 +1531,7 @@
         <p:spPr>
           <a:xfrm>
             <a:off x="685800" y="4400640"/>
-            <a:ext cx="5486040" cy="3600360"/>
+            <a:ext cx="5484960" cy="3599280"/>
           </a:xfrm>
           <a:prstGeom prst="rect">
             <a:avLst/>
@@ -1550,20 +1549,20 @@
             <a:pPr indent="0" algn="l">
               <a:buNone/>
             </a:pPr>
-            <a:endParaRPr lang="pt-BR" sz="1200" b="0" u="none" strike="noStrike">
-              <a:solidFill>
-                <a:schemeClr val="dk1"/>
-              </a:solidFill>
-              <a:effectLst/>
-              <a:uFillTx/>
-              <a:latin typeface="Calibri"/>
-            </a:endParaRPr>
-          </a:p>
-        </p:txBody>
-      </p:sp>
-      <p:sp>
-        <p:nvSpPr>
-          <p:cNvPr id="216" name="PlaceHolder 3"/>
+            <a:endParaRPr lang="pt-BR" sz="1800" b="0" u="none" strike="noStrike">
+              <a:solidFill>
+                <a:srgbClr val="000000"/>
+              </a:solidFill>
+              <a:effectLst/>
+              <a:uFillTx/>
+              <a:latin typeface="Arial"/>
+            </a:endParaRPr>
+          </a:p>
+        </p:txBody>
+      </p:sp>
+      <p:sp>
+        <p:nvSpPr>
+          <p:cNvPr id="204" name="PlaceHolder 3"/>
           <p:cNvSpPr>
             <a:spLocks noGrp="1"/>
           </p:cNvSpPr>
@@ -1574,7 +1573,7 @@
         <p:spPr>
           <a:xfrm>
             <a:off x="3884760" y="8685360"/>
-            <a:ext cx="2971440" cy="458280"/>
+            <a:ext cx="2970360" cy="457200"/>
           </a:xfrm>
           <a:prstGeom prst="rect">
             <a:avLst/>
@@ -1617,7 +1616,7 @@
                 <a:tab pos="0" algn="l"/>
               </a:tabLst>
             </a:pPr>
-            <a:fld id="{7C1E033D-2D9C-4615-8B70-A9F26E68E184}" type="slidenum">
+            <a:fld id="{513C7DA6-24D7-404D-9A59-57C49F633353}" type="slidenum">
               <a:rPr lang="en-US" sz="1400" b="0" u="none" strike="noStrike">
                 <a:solidFill>
                   <a:srgbClr val="000000"/>
@@ -1663,7 +1662,7 @@
       </p:grpSpPr>
       <p:sp>
         <p:nvSpPr>
-          <p:cNvPr id="217" name="PlaceHolder 1"/>
+          <p:cNvPr id="205" name="PlaceHolder 1"/>
           <p:cNvSpPr>
             <a:spLocks noGrp="1"/>
           </p:cNvSpPr>
@@ -1674,19 +1673,19 @@
         <p:spPr>
           <a:xfrm>
             <a:off x="685800" y="1143000"/>
-            <a:ext cx="5486040" cy="3085920"/>
-          </a:xfrm>
-          <a:prstGeom prst="rect">
-            <a:avLst/>
-          </a:prstGeom>
-          <a:ln w="0">
-            <a:noFill/>
-          </a:ln>
-        </p:spPr>
-      </p:sp>
-      <p:sp>
-        <p:nvSpPr>
-          <p:cNvPr id="218" name="PlaceHolder 2"/>
+            <a:ext cx="5484960" cy="3084840"/>
+          </a:xfrm>
+          <a:prstGeom prst="rect">
+            <a:avLst/>
+          </a:prstGeom>
+          <a:ln w="0">
+            <a:noFill/>
+          </a:ln>
+        </p:spPr>
+      </p:sp>
+      <p:sp>
+        <p:nvSpPr>
+          <p:cNvPr id="206" name="PlaceHolder 2"/>
           <p:cNvSpPr>
             <a:spLocks noGrp="1"/>
           </p:cNvSpPr>
@@ -1697,7 +1696,7 @@
         <p:spPr>
           <a:xfrm>
             <a:off x="685800" y="4400640"/>
-            <a:ext cx="5486040" cy="3600000"/>
+            <a:ext cx="5484960" cy="3598920"/>
           </a:xfrm>
           <a:prstGeom prst="rect">
             <a:avLst/>
@@ -1712,7 +1711,7 @@
             <a:noAutofit/>
           </a:bodyPr>
           <a:p>
-            <a:pPr indent="0" algn="l">
+            <a:pPr marL="216000" indent="0" algn="l">
               <a:lnSpc>
                 <a:spcPct val="100000"/>
               </a:lnSpc>
@@ -1746,7 +1745,7 @@
       </p:sp>
       <p:sp>
         <p:nvSpPr>
-          <p:cNvPr id="219" name="PlaceHolder 3"/>
+          <p:cNvPr id="207" name="PlaceHolder 3"/>
           <p:cNvSpPr>
             <a:spLocks noGrp="1"/>
           </p:cNvSpPr>
@@ -1757,7 +1756,7 @@
         <p:spPr>
           <a:xfrm>
             <a:off x="3884760" y="8685360"/>
-            <a:ext cx="2971440" cy="458280"/>
+            <a:ext cx="2970360" cy="457200"/>
           </a:xfrm>
           <a:prstGeom prst="rect">
             <a:avLst/>
@@ -1800,7 +1799,7 @@
                 <a:tab pos="0" algn="l"/>
               </a:tabLst>
             </a:pPr>
-            <a:fld id="{E0D4B459-6C13-4CDA-BB03-F8CF10F2EE93}" type="slidenum">
+            <a:fld id="{8FA15BFA-6B7C-4E5D-8331-3363D80220C0}" type="slidenum">
               <a:rPr lang="en-US" sz="1400" b="0" u="none" strike="noStrike">
                 <a:solidFill>
                   <a:srgbClr val="000000"/>
@@ -1846,7 +1845,7 @@
       </p:grpSpPr>
       <p:sp>
         <p:nvSpPr>
-          <p:cNvPr id="220" name="PlaceHolder 1"/>
+          <p:cNvPr id="208" name="PlaceHolder 1"/>
           <p:cNvSpPr>
             <a:spLocks noGrp="1"/>
           </p:cNvSpPr>
@@ -1857,19 +1856,19 @@
         <p:spPr>
           <a:xfrm>
             <a:off x="685800" y="1143000"/>
-            <a:ext cx="5486040" cy="3085920"/>
-          </a:xfrm>
-          <a:prstGeom prst="rect">
-            <a:avLst/>
-          </a:prstGeom>
-          <a:ln w="0">
-            <a:noFill/>
-          </a:ln>
-        </p:spPr>
-      </p:sp>
-      <p:sp>
-        <p:nvSpPr>
-          <p:cNvPr id="221" name="PlaceHolder 2"/>
+            <a:ext cx="5484960" cy="3084840"/>
+          </a:xfrm>
+          <a:prstGeom prst="rect">
+            <a:avLst/>
+          </a:prstGeom>
+          <a:ln w="0">
+            <a:noFill/>
+          </a:ln>
+        </p:spPr>
+      </p:sp>
+      <p:sp>
+        <p:nvSpPr>
+          <p:cNvPr id="209" name="PlaceHolder 2"/>
           <p:cNvSpPr>
             <a:spLocks noGrp="1"/>
           </p:cNvSpPr>
@@ -1880,7 +1879,7 @@
         <p:spPr>
           <a:xfrm>
             <a:off x="685800" y="4400640"/>
-            <a:ext cx="5486040" cy="3600000"/>
+            <a:ext cx="5484960" cy="3598920"/>
           </a:xfrm>
           <a:prstGeom prst="rect">
             <a:avLst/>
@@ -1895,7 +1894,7 @@
             <a:noAutofit/>
           </a:bodyPr>
           <a:p>
-            <a:pPr indent="0" algn="l">
+            <a:pPr marL="216000" indent="0" algn="l">
               <a:lnSpc>
                 <a:spcPct val="100000"/>
               </a:lnSpc>
@@ -1929,7 +1928,7 @@
       </p:sp>
       <p:sp>
         <p:nvSpPr>
-          <p:cNvPr id="222" name="PlaceHolder 3"/>
+          <p:cNvPr id="210" name="PlaceHolder 3"/>
           <p:cNvSpPr>
             <a:spLocks noGrp="1"/>
           </p:cNvSpPr>
@@ -1940,7 +1939,7 @@
         <p:spPr>
           <a:xfrm>
             <a:off x="3884760" y="8685360"/>
-            <a:ext cx="2971440" cy="458280"/>
+            <a:ext cx="2970360" cy="457200"/>
           </a:xfrm>
           <a:prstGeom prst="rect">
             <a:avLst/>
@@ -1983,7 +1982,7 @@
                 <a:tab pos="0" algn="l"/>
               </a:tabLst>
             </a:pPr>
-            <a:fld id="{7CC3DCD1-D104-4141-9811-56FD62492B6B}" type="slidenum">
+            <a:fld id="{65DF443B-A1A5-4884-9BC1-14EC9A9DE711}" type="slidenum">
               <a:rPr lang="en-US" sz="1400" b="0" u="none" strike="noStrike">
                 <a:solidFill>
                   <a:srgbClr val="000000"/>
@@ -2029,7 +2028,7 @@
       </p:grpSpPr>
       <p:sp>
         <p:nvSpPr>
-          <p:cNvPr id="223" name="PlaceHolder 1"/>
+          <p:cNvPr id="211" name="PlaceHolder 1"/>
           <p:cNvSpPr>
             <a:spLocks noGrp="1"/>
           </p:cNvSpPr>
@@ -2040,19 +2039,19 @@
         <p:spPr>
           <a:xfrm>
             <a:off x="685800" y="1143000"/>
-            <a:ext cx="5486040" cy="3085920"/>
-          </a:xfrm>
-          <a:prstGeom prst="rect">
-            <a:avLst/>
-          </a:prstGeom>
-          <a:ln w="0">
-            <a:noFill/>
-          </a:ln>
-        </p:spPr>
-      </p:sp>
-      <p:sp>
-        <p:nvSpPr>
-          <p:cNvPr id="224" name="PlaceHolder 2"/>
+            <a:ext cx="5484960" cy="3084840"/>
+          </a:xfrm>
+          <a:prstGeom prst="rect">
+            <a:avLst/>
+          </a:prstGeom>
+          <a:ln w="0">
+            <a:noFill/>
+          </a:ln>
+        </p:spPr>
+      </p:sp>
+      <p:sp>
+        <p:nvSpPr>
+          <p:cNvPr id="212" name="PlaceHolder 2"/>
           <p:cNvSpPr>
             <a:spLocks noGrp="1"/>
           </p:cNvSpPr>
@@ -2063,7 +2062,7 @@
         <p:spPr>
           <a:xfrm>
             <a:off x="685800" y="4400640"/>
-            <a:ext cx="5486040" cy="3600000"/>
+            <a:ext cx="5484960" cy="3598920"/>
           </a:xfrm>
           <a:prstGeom prst="rect">
             <a:avLst/>
@@ -2078,7 +2077,7 @@
             <a:noAutofit/>
           </a:bodyPr>
           <a:p>
-            <a:pPr indent="0" algn="l">
+            <a:pPr marL="216000" indent="0" algn="l">
               <a:lnSpc>
                 <a:spcPct val="100000"/>
               </a:lnSpc>
@@ -2112,7 +2111,7 @@
       </p:sp>
       <p:sp>
         <p:nvSpPr>
-          <p:cNvPr id="225" name="PlaceHolder 3"/>
+          <p:cNvPr id="213" name="PlaceHolder 3"/>
           <p:cNvSpPr>
             <a:spLocks noGrp="1"/>
           </p:cNvSpPr>
@@ -2123,7 +2122,7 @@
         <p:spPr>
           <a:xfrm>
             <a:off x="3884760" y="8685360"/>
-            <a:ext cx="2971440" cy="458280"/>
+            <a:ext cx="2970360" cy="457200"/>
           </a:xfrm>
           <a:prstGeom prst="rect">
             <a:avLst/>
@@ -2166,7 +2165,7 @@
                 <a:tab pos="0" algn="l"/>
               </a:tabLst>
             </a:pPr>
-            <a:fld id="{2D4B047A-F54E-4BAA-A393-5A8D23217759}" type="slidenum">
+            <a:fld id="{D3230D2B-BD59-4A9C-88C0-50D728EE2DCD}" type="slidenum">
               <a:rPr lang="en-US" sz="1400" b="0" u="none" strike="noStrike">
                 <a:solidFill>
                   <a:srgbClr val="000000"/>
@@ -2212,7 +2211,7 @@
       </p:grpSpPr>
       <p:sp>
         <p:nvSpPr>
-          <p:cNvPr id="226" name="PlaceHolder 1"/>
+          <p:cNvPr id="214" name="PlaceHolder 1"/>
           <p:cNvSpPr>
             <a:spLocks noGrp="1"/>
           </p:cNvSpPr>
@@ -2223,19 +2222,19 @@
         <p:spPr>
           <a:xfrm>
             <a:off x="685800" y="1143000"/>
-            <a:ext cx="5486040" cy="3085920"/>
-          </a:xfrm>
-          <a:prstGeom prst="rect">
-            <a:avLst/>
-          </a:prstGeom>
-          <a:ln w="0">
-            <a:noFill/>
-          </a:ln>
-        </p:spPr>
-      </p:sp>
-      <p:sp>
-        <p:nvSpPr>
-          <p:cNvPr id="227" name="PlaceHolder 2"/>
+            <a:ext cx="5484960" cy="3084840"/>
+          </a:xfrm>
+          <a:prstGeom prst="rect">
+            <a:avLst/>
+          </a:prstGeom>
+          <a:ln w="0">
+            <a:noFill/>
+          </a:ln>
+        </p:spPr>
+      </p:sp>
+      <p:sp>
+        <p:nvSpPr>
+          <p:cNvPr id="215" name="PlaceHolder 2"/>
           <p:cNvSpPr>
             <a:spLocks noGrp="1"/>
           </p:cNvSpPr>
@@ -2246,7 +2245,7 @@
         <p:spPr>
           <a:xfrm>
             <a:off x="685800" y="4400640"/>
-            <a:ext cx="5486040" cy="3600000"/>
+            <a:ext cx="5484960" cy="3598920"/>
           </a:xfrm>
           <a:prstGeom prst="rect">
             <a:avLst/>
@@ -2261,7 +2260,7 @@
             <a:noAutofit/>
           </a:bodyPr>
           <a:p>
-            <a:pPr indent="0" algn="l">
+            <a:pPr marL="216000" indent="0" algn="l">
               <a:lnSpc>
                 <a:spcPct val="100000"/>
               </a:lnSpc>
@@ -2295,7 +2294,7 @@
       </p:sp>
       <p:sp>
         <p:nvSpPr>
-          <p:cNvPr id="228" name="PlaceHolder 3"/>
+          <p:cNvPr id="216" name="PlaceHolder 3"/>
           <p:cNvSpPr>
             <a:spLocks noGrp="1"/>
           </p:cNvSpPr>
@@ -2306,7 +2305,7 @@
         <p:spPr>
           <a:xfrm>
             <a:off x="3884760" y="8685360"/>
-            <a:ext cx="2971440" cy="458280"/>
+            <a:ext cx="2970360" cy="457200"/>
           </a:xfrm>
           <a:prstGeom prst="rect">
             <a:avLst/>
@@ -2349,7 +2348,7 @@
                 <a:tab pos="0" algn="l"/>
               </a:tabLst>
             </a:pPr>
-            <a:fld id="{EBEBF878-2C27-4717-8526-32E54E9F8CF7}" type="slidenum">
+            <a:fld id="{56C4DAE8-6CED-4B3B-89E1-B00BF8090265}" type="slidenum">
               <a:rPr lang="en-US" sz="1400" b="0" u="none" strike="noStrike">
                 <a:solidFill>
                   <a:srgbClr val="000000"/>
@@ -2395,7 +2394,7 @@
       </p:grpSpPr>
       <p:sp>
         <p:nvSpPr>
-          <p:cNvPr id="175" name="PlaceHolder 1"/>
+          <p:cNvPr id="163" name="PlaceHolder 1"/>
           <p:cNvSpPr>
             <a:spLocks noGrp="1"/>
           </p:cNvSpPr>
@@ -2406,19 +2405,19 @@
         <p:spPr>
           <a:xfrm>
             <a:off x="685800" y="1143000"/>
-            <a:ext cx="5486040" cy="3085920"/>
-          </a:xfrm>
-          <a:prstGeom prst="rect">
-            <a:avLst/>
-          </a:prstGeom>
-          <a:ln w="0">
-            <a:noFill/>
-          </a:ln>
-        </p:spPr>
-      </p:sp>
-      <p:sp>
-        <p:nvSpPr>
-          <p:cNvPr id="176" name="PlaceHolder 2"/>
+            <a:ext cx="5484960" cy="3084840"/>
+          </a:xfrm>
+          <a:prstGeom prst="rect">
+            <a:avLst/>
+          </a:prstGeom>
+          <a:ln w="0">
+            <a:noFill/>
+          </a:ln>
+        </p:spPr>
+      </p:sp>
+      <p:sp>
+        <p:nvSpPr>
+          <p:cNvPr id="164" name="PlaceHolder 2"/>
           <p:cNvSpPr>
             <a:spLocks noGrp="1"/>
           </p:cNvSpPr>
@@ -2429,7 +2428,7 @@
         <p:spPr>
           <a:xfrm>
             <a:off x="685800" y="4400640"/>
-            <a:ext cx="5486040" cy="3600000"/>
+            <a:ext cx="5484960" cy="3598920"/>
           </a:xfrm>
           <a:prstGeom prst="rect">
             <a:avLst/>
@@ -2444,7 +2443,7 @@
             <a:noAutofit/>
           </a:bodyPr>
           <a:p>
-            <a:pPr indent="0" algn="l">
+            <a:pPr marL="216000" indent="0" algn="l">
               <a:lnSpc>
                 <a:spcPct val="100000"/>
               </a:lnSpc>
@@ -2478,7 +2477,7 @@
       </p:sp>
       <p:sp>
         <p:nvSpPr>
-          <p:cNvPr id="177" name="PlaceHolder 3"/>
+          <p:cNvPr id="165" name="PlaceHolder 3"/>
           <p:cNvSpPr>
             <a:spLocks noGrp="1"/>
           </p:cNvSpPr>
@@ -2489,7 +2488,7 @@
         <p:spPr>
           <a:xfrm>
             <a:off x="3884760" y="8685360"/>
-            <a:ext cx="2971440" cy="458280"/>
+            <a:ext cx="2970360" cy="457200"/>
           </a:xfrm>
           <a:prstGeom prst="rect">
             <a:avLst/>
@@ -2532,7 +2531,7 @@
                 <a:tab pos="0" algn="l"/>
               </a:tabLst>
             </a:pPr>
-            <a:fld id="{3059A479-5601-4A7B-B751-D76BC32FFA89}" type="slidenum">
+            <a:fld id="{E93CB795-BF53-4181-9A41-840947F78ED2}" type="slidenum">
               <a:rPr lang="en-US" sz="1400" b="0" u="none" strike="noStrike">
                 <a:solidFill>
                   <a:srgbClr val="000000"/>
@@ -2578,7 +2577,7 @@
       </p:grpSpPr>
       <p:sp>
         <p:nvSpPr>
-          <p:cNvPr id="229" name="PlaceHolder 1"/>
+          <p:cNvPr id="217" name="PlaceHolder 1"/>
           <p:cNvSpPr>
             <a:spLocks noGrp="1"/>
           </p:cNvSpPr>
@@ -2589,19 +2588,19 @@
         <p:spPr>
           <a:xfrm>
             <a:off x="685800" y="1143000"/>
-            <a:ext cx="5486040" cy="3085920"/>
-          </a:xfrm>
-          <a:prstGeom prst="rect">
-            <a:avLst/>
-          </a:prstGeom>
-          <a:ln w="0">
-            <a:noFill/>
-          </a:ln>
-        </p:spPr>
-      </p:sp>
-      <p:sp>
-        <p:nvSpPr>
-          <p:cNvPr id="230" name="PlaceHolder 2"/>
+            <a:ext cx="5484960" cy="3084840"/>
+          </a:xfrm>
+          <a:prstGeom prst="rect">
+            <a:avLst/>
+          </a:prstGeom>
+          <a:ln w="0">
+            <a:noFill/>
+          </a:ln>
+        </p:spPr>
+      </p:sp>
+      <p:sp>
+        <p:nvSpPr>
+          <p:cNvPr id="218" name="PlaceHolder 2"/>
           <p:cNvSpPr>
             <a:spLocks noGrp="1"/>
           </p:cNvSpPr>
@@ -2612,7 +2611,7 @@
         <p:spPr>
           <a:xfrm>
             <a:off x="685800" y="4400640"/>
-            <a:ext cx="5486040" cy="3600000"/>
+            <a:ext cx="5484960" cy="3598920"/>
           </a:xfrm>
           <a:prstGeom prst="rect">
             <a:avLst/>
@@ -2627,7 +2626,7 @@
             <a:noAutofit/>
           </a:bodyPr>
           <a:p>
-            <a:pPr indent="0" algn="l">
+            <a:pPr marL="216000" indent="0" algn="l">
               <a:lnSpc>
                 <a:spcPct val="100000"/>
               </a:lnSpc>
@@ -2661,7 +2660,7 @@
       </p:sp>
       <p:sp>
         <p:nvSpPr>
-          <p:cNvPr id="231" name="PlaceHolder 3"/>
+          <p:cNvPr id="219" name="PlaceHolder 3"/>
           <p:cNvSpPr>
             <a:spLocks noGrp="1"/>
           </p:cNvSpPr>
@@ -2672,7 +2671,7 @@
         <p:spPr>
           <a:xfrm>
             <a:off x="3884760" y="8685360"/>
-            <a:ext cx="2971440" cy="458280"/>
+            <a:ext cx="2970360" cy="457200"/>
           </a:xfrm>
           <a:prstGeom prst="rect">
             <a:avLst/>
@@ -2715,7 +2714,7 @@
                 <a:tab pos="0" algn="l"/>
               </a:tabLst>
             </a:pPr>
-            <a:fld id="{91DA6184-2B9D-4309-B073-1E69ADA0C84F}" type="slidenum">
+            <a:fld id="{B2AEF7A1-662B-400A-BEC3-83105274DC58}" type="slidenum">
               <a:rPr lang="en-US" sz="1400" b="0" u="none" strike="noStrike">
                 <a:solidFill>
                   <a:srgbClr val="000000"/>
@@ -2761,7 +2760,7 @@
       </p:grpSpPr>
       <p:sp>
         <p:nvSpPr>
-          <p:cNvPr id="232" name="PlaceHolder 1"/>
+          <p:cNvPr id="220" name="PlaceHolder 1"/>
           <p:cNvSpPr>
             <a:spLocks noGrp="1"/>
           </p:cNvSpPr>
@@ -2772,19 +2771,19 @@
         <p:spPr>
           <a:xfrm>
             <a:off x="685800" y="1143000"/>
-            <a:ext cx="5486040" cy="3085920"/>
-          </a:xfrm>
-          <a:prstGeom prst="rect">
-            <a:avLst/>
-          </a:prstGeom>
-          <a:ln w="0">
-            <a:noFill/>
-          </a:ln>
-        </p:spPr>
-      </p:sp>
-      <p:sp>
-        <p:nvSpPr>
-          <p:cNvPr id="233" name="PlaceHolder 2"/>
+            <a:ext cx="5484960" cy="3084840"/>
+          </a:xfrm>
+          <a:prstGeom prst="rect">
+            <a:avLst/>
+          </a:prstGeom>
+          <a:ln w="0">
+            <a:noFill/>
+          </a:ln>
+        </p:spPr>
+      </p:sp>
+      <p:sp>
+        <p:nvSpPr>
+          <p:cNvPr id="221" name="PlaceHolder 2"/>
           <p:cNvSpPr>
             <a:spLocks noGrp="1"/>
           </p:cNvSpPr>
@@ -2795,7 +2794,7 @@
         <p:spPr>
           <a:xfrm>
             <a:off x="685800" y="4400640"/>
-            <a:ext cx="5486040" cy="3600360"/>
+            <a:ext cx="5484960" cy="3599280"/>
           </a:xfrm>
           <a:prstGeom prst="rect">
             <a:avLst/>
@@ -2813,20 +2812,20 @@
             <a:pPr indent="0" algn="l">
               <a:buNone/>
             </a:pPr>
-            <a:endParaRPr lang="pt-BR" sz="1200" b="0" u="none" strike="noStrike">
-              <a:solidFill>
-                <a:schemeClr val="dk1"/>
-              </a:solidFill>
-              <a:effectLst/>
-              <a:uFillTx/>
-              <a:latin typeface="Calibri"/>
-            </a:endParaRPr>
-          </a:p>
-        </p:txBody>
-      </p:sp>
-      <p:sp>
-        <p:nvSpPr>
-          <p:cNvPr id="234" name="PlaceHolder 3"/>
+            <a:endParaRPr lang="pt-BR" sz="1800" b="0" u="none" strike="noStrike">
+              <a:solidFill>
+                <a:srgbClr val="000000"/>
+              </a:solidFill>
+              <a:effectLst/>
+              <a:uFillTx/>
+              <a:latin typeface="Arial"/>
+            </a:endParaRPr>
+          </a:p>
+        </p:txBody>
+      </p:sp>
+      <p:sp>
+        <p:nvSpPr>
+          <p:cNvPr id="222" name="PlaceHolder 3"/>
           <p:cNvSpPr>
             <a:spLocks noGrp="1"/>
           </p:cNvSpPr>
@@ -2837,7 +2836,7 @@
         <p:spPr>
           <a:xfrm>
             <a:off x="3884760" y="8685360"/>
-            <a:ext cx="2971440" cy="458280"/>
+            <a:ext cx="2970360" cy="457200"/>
           </a:xfrm>
           <a:prstGeom prst="rect">
             <a:avLst/>
@@ -2880,7 +2879,7 @@
                 <a:tab pos="0" algn="l"/>
               </a:tabLst>
             </a:pPr>
-            <a:fld id="{9AFC923B-C770-4B80-950D-FAE258D21DFF}" type="slidenum">
+            <a:fld id="{7B3E33E3-94CB-404C-B553-0F08207F23FA}" type="slidenum">
               <a:rPr lang="en-US" sz="1400" b="0" u="none" strike="noStrike">
                 <a:solidFill>
                   <a:srgbClr val="000000"/>
@@ -2926,7 +2925,7 @@
       </p:grpSpPr>
       <p:sp>
         <p:nvSpPr>
-          <p:cNvPr id="235" name="PlaceHolder 1"/>
+          <p:cNvPr id="223" name="PlaceHolder 1"/>
           <p:cNvSpPr>
             <a:spLocks noGrp="1"/>
           </p:cNvSpPr>
@@ -2937,19 +2936,19 @@
         <p:spPr>
           <a:xfrm>
             <a:off x="685800" y="1143000"/>
-            <a:ext cx="5486040" cy="3085920"/>
-          </a:xfrm>
-          <a:prstGeom prst="rect">
-            <a:avLst/>
-          </a:prstGeom>
-          <a:ln w="0">
-            <a:noFill/>
-          </a:ln>
-        </p:spPr>
-      </p:sp>
-      <p:sp>
-        <p:nvSpPr>
-          <p:cNvPr id="236" name="PlaceHolder 2"/>
+            <a:ext cx="5484960" cy="3084840"/>
+          </a:xfrm>
+          <a:prstGeom prst="rect">
+            <a:avLst/>
+          </a:prstGeom>
+          <a:ln w="0">
+            <a:noFill/>
+          </a:ln>
+        </p:spPr>
+      </p:sp>
+      <p:sp>
+        <p:nvSpPr>
+          <p:cNvPr id="224" name="PlaceHolder 2"/>
           <p:cNvSpPr>
             <a:spLocks noGrp="1"/>
           </p:cNvSpPr>
@@ -2960,7 +2959,7 @@
         <p:spPr>
           <a:xfrm>
             <a:off x="685800" y="4400640"/>
-            <a:ext cx="5486040" cy="3600360"/>
+            <a:ext cx="5484960" cy="3599280"/>
           </a:xfrm>
           <a:prstGeom prst="rect">
             <a:avLst/>
@@ -2978,20 +2977,20 @@
             <a:pPr indent="0" algn="l">
               <a:buNone/>
             </a:pPr>
-            <a:endParaRPr lang="pt-BR" sz="1200" b="0" u="none" strike="noStrike">
-              <a:solidFill>
-                <a:schemeClr val="dk1"/>
-              </a:solidFill>
-              <a:effectLst/>
-              <a:uFillTx/>
-              <a:latin typeface="Calibri"/>
-            </a:endParaRPr>
-          </a:p>
-        </p:txBody>
-      </p:sp>
-      <p:sp>
-        <p:nvSpPr>
-          <p:cNvPr id="237" name="PlaceHolder 3"/>
+            <a:endParaRPr lang="pt-BR" sz="1800" b="0" u="none" strike="noStrike">
+              <a:solidFill>
+                <a:srgbClr val="000000"/>
+              </a:solidFill>
+              <a:effectLst/>
+              <a:uFillTx/>
+              <a:latin typeface="Arial"/>
+            </a:endParaRPr>
+          </a:p>
+        </p:txBody>
+      </p:sp>
+      <p:sp>
+        <p:nvSpPr>
+          <p:cNvPr id="225" name="PlaceHolder 3"/>
           <p:cNvSpPr>
             <a:spLocks noGrp="1"/>
           </p:cNvSpPr>
@@ -3002,7 +3001,7 @@
         <p:spPr>
           <a:xfrm>
             <a:off x="3884760" y="8685360"/>
-            <a:ext cx="2971440" cy="458280"/>
+            <a:ext cx="2970360" cy="457200"/>
           </a:xfrm>
           <a:prstGeom prst="rect">
             <a:avLst/>
@@ -3045,7 +3044,7 @@
                 <a:tab pos="0" algn="l"/>
               </a:tabLst>
             </a:pPr>
-            <a:fld id="{F5EA74BD-2D1F-4AFC-91BB-E8FF222D708A}" type="slidenum">
+            <a:fld id="{8D78BCC5-4008-4CB0-9762-CFE9F85AE166}" type="slidenum">
               <a:rPr lang="en-US" sz="1400" b="0" u="none" strike="noStrike">
                 <a:solidFill>
                   <a:srgbClr val="000000"/>
@@ -3091,7 +3090,7 @@
       </p:grpSpPr>
       <p:sp>
         <p:nvSpPr>
-          <p:cNvPr id="238" name="PlaceHolder 1"/>
+          <p:cNvPr id="226" name="PlaceHolder 1"/>
           <p:cNvSpPr>
             <a:spLocks noGrp="1"/>
           </p:cNvSpPr>
@@ -3102,19 +3101,19 @@
         <p:spPr>
           <a:xfrm>
             <a:off x="685800" y="1143000"/>
-            <a:ext cx="5486040" cy="3085920"/>
-          </a:xfrm>
-          <a:prstGeom prst="rect">
-            <a:avLst/>
-          </a:prstGeom>
-          <a:ln w="0">
-            <a:noFill/>
-          </a:ln>
-        </p:spPr>
-      </p:sp>
-      <p:sp>
-        <p:nvSpPr>
-          <p:cNvPr id="239" name="PlaceHolder 2"/>
+            <a:ext cx="5484960" cy="3084840"/>
+          </a:xfrm>
+          <a:prstGeom prst="rect">
+            <a:avLst/>
+          </a:prstGeom>
+          <a:ln w="0">
+            <a:noFill/>
+          </a:ln>
+        </p:spPr>
+      </p:sp>
+      <p:sp>
+        <p:nvSpPr>
+          <p:cNvPr id="227" name="PlaceHolder 2"/>
           <p:cNvSpPr>
             <a:spLocks noGrp="1"/>
           </p:cNvSpPr>
@@ -3125,7 +3124,7 @@
         <p:spPr>
           <a:xfrm>
             <a:off x="685800" y="4400640"/>
-            <a:ext cx="5486040" cy="3600000"/>
+            <a:ext cx="5484960" cy="3598920"/>
           </a:xfrm>
           <a:prstGeom prst="rect">
             <a:avLst/>
@@ -3252,8 +3251,27 @@
                 <a:latin typeface="Calibri"/>
                 <a:ea typeface="Calibri"/>
               </a:rPr>
-              <a:t>Consequência prática: em registro de Conhecimento, só a comunidade aplica as marcas de uso; a instituição, no máximo, declara um aviso. E a narrativa da comunidade sobre uma peça de museu fica guardada com a comunidade, não dentro do banco do museu — as duas </a:t>
-            </a:r>
+              <a:t>Consequência prática: em registro de Conhecimento, só a comunidade aplica as marcas de uso; a instituição, no máximo, declara um aviso. E a narrativa da comunidade sobre uma peça de museu fica guardada com a comunidade, não dentro do banco do museu — as duas se encontram sem que uma engula a outra.</a:t>
+            </a:r>
+            <a:endParaRPr lang="pt-BR" sz="1200" b="0" u="none" strike="noStrike">
+              <a:solidFill>
+                <a:srgbClr val="000000"/>
+              </a:solidFill>
+              <a:effectLst/>
+              <a:uFillTx/>
+              <a:latin typeface="Arial"/>
+            </a:endParaRPr>
+          </a:p>
+          <a:p>
+            <a:pPr marL="457200" indent="-228600" algn="l">
+              <a:lnSpc>
+                <a:spcPct val="100000"/>
+              </a:lnSpc>
+              <a:buNone/>
+              <a:tabLst>
+                <a:tab pos="0" algn="l"/>
+              </a:tabLst>
+            </a:pPr>
             <a:r>
               <a:rPr lang="pt-BR" sz="1200" b="0" u="none" strike="noStrike">
                 <a:solidFill>
@@ -3264,7 +3282,7 @@
                 <a:latin typeface="Calibri"/>
                 <a:ea typeface="Calibri"/>
               </a:rPr>
-              <a:t>se encontram sem que uma engula a outra.</a:t>
+              <a:t>Emenda para o próximo slide: é justamente por causa dessa distinção que as quatro perguntas seguintes não podem ser respondidas por nós.</a:t>
             </a:r>
             <a:endParaRPr lang="pt-BR" sz="1200" b="0" u="none" strike="noStrike">
               <a:solidFill>
@@ -3275,42 +3293,11 @@
               <a:latin typeface="Arial"/>
             </a:endParaRPr>
           </a:p>
-          <a:p>
-            <a:pPr marL="457200" indent="-228600" algn="l">
-              <a:lnSpc>
-                <a:spcPct val="100000"/>
-              </a:lnSpc>
-              <a:buNone/>
-              <a:tabLst>
-                <a:tab pos="0" algn="l"/>
-              </a:tabLst>
-            </a:pPr>
-            <a:r>
-              <a:rPr lang="pt-BR" sz="1200" b="0" u="none" strike="noStrike">
-                <a:solidFill>
-                  <a:schemeClr val="dk1"/>
-                </a:solidFill>
-                <a:effectLst/>
-                <a:uFillTx/>
-                <a:latin typeface="Calibri"/>
-                <a:ea typeface="Calibri"/>
-              </a:rPr>
-              <a:t>Emenda para o próximo slide: é justamente por causa dessa distinção que as quatro perguntas seguintes não podem ser respondidas por nós.</a:t>
-            </a:r>
-            <a:endParaRPr lang="pt-BR" sz="1200" b="0" u="none" strike="noStrike">
-              <a:solidFill>
-                <a:srgbClr val="000000"/>
-              </a:solidFill>
-              <a:effectLst/>
-              <a:uFillTx/>
-              <a:latin typeface="Arial"/>
-            </a:endParaRPr>
-          </a:p>
-        </p:txBody>
-      </p:sp>
-      <p:sp>
-        <p:nvSpPr>
-          <p:cNvPr id="240" name="PlaceHolder 3"/>
+        </p:txBody>
+      </p:sp>
+      <p:sp>
+        <p:nvSpPr>
+          <p:cNvPr id="228" name="PlaceHolder 3"/>
           <p:cNvSpPr>
             <a:spLocks noGrp="1"/>
           </p:cNvSpPr>
@@ -3321,7 +3308,7 @@
         <p:spPr>
           <a:xfrm>
             <a:off x="3884760" y="8685360"/>
-            <a:ext cx="2971440" cy="458280"/>
+            <a:ext cx="2970360" cy="457200"/>
           </a:xfrm>
           <a:prstGeom prst="rect">
             <a:avLst/>
@@ -3365,7 +3352,7 @@
                 <a:tab pos="0" algn="l"/>
               </a:tabLst>
             </a:pPr>
-            <a:fld id="{ADEE9AFF-1ADE-491A-86AF-CEE433F1BF5F}" type="slidenum">
+            <a:fld id="{55349B70-9082-48C4-B7DD-CCA323BD6039}" type="slidenum">
               <a:rPr lang="en-US" sz="1200" b="0" u="none" strike="noStrike">
                 <a:solidFill>
                   <a:schemeClr val="dk1"/>
@@ -3412,7 +3399,7 @@
       </p:grpSpPr>
       <p:sp>
         <p:nvSpPr>
-          <p:cNvPr id="241" name="PlaceHolder 1"/>
+          <p:cNvPr id="229" name="PlaceHolder 1"/>
           <p:cNvSpPr>
             <a:spLocks noGrp="1"/>
           </p:cNvSpPr>
@@ -3423,19 +3410,19 @@
         <p:spPr>
           <a:xfrm>
             <a:off x="685800" y="1143000"/>
-            <a:ext cx="5486040" cy="3085920"/>
-          </a:xfrm>
-          <a:prstGeom prst="rect">
-            <a:avLst/>
-          </a:prstGeom>
-          <a:ln w="0">
-            <a:noFill/>
-          </a:ln>
-        </p:spPr>
-      </p:sp>
-      <p:sp>
-        <p:nvSpPr>
-          <p:cNvPr id="242" name="PlaceHolder 2"/>
+            <a:ext cx="5484960" cy="3084840"/>
+          </a:xfrm>
+          <a:prstGeom prst="rect">
+            <a:avLst/>
+          </a:prstGeom>
+          <a:ln w="0">
+            <a:noFill/>
+          </a:ln>
+        </p:spPr>
+      </p:sp>
+      <p:sp>
+        <p:nvSpPr>
+          <p:cNvPr id="230" name="PlaceHolder 2"/>
           <p:cNvSpPr>
             <a:spLocks noGrp="1"/>
           </p:cNvSpPr>
@@ -3446,7 +3433,7 @@
         <p:spPr>
           <a:xfrm>
             <a:off x="685800" y="4400640"/>
-            <a:ext cx="5486040" cy="3600000"/>
+            <a:ext cx="5484960" cy="3598920"/>
           </a:xfrm>
           <a:prstGeom prst="rect">
             <a:avLst/>
@@ -3650,7 +3637,7 @@
       </p:sp>
       <p:sp>
         <p:nvSpPr>
-          <p:cNvPr id="243" name="PlaceHolder 3"/>
+          <p:cNvPr id="231" name="PlaceHolder 3"/>
           <p:cNvSpPr>
             <a:spLocks noGrp="1"/>
           </p:cNvSpPr>
@@ -3661,7 +3648,7 @@
         <p:spPr>
           <a:xfrm>
             <a:off x="3884760" y="8685360"/>
-            <a:ext cx="2971440" cy="458280"/>
+            <a:ext cx="2970360" cy="457200"/>
           </a:xfrm>
           <a:prstGeom prst="rect">
             <a:avLst/>
@@ -3705,7 +3692,7 @@
                 <a:tab pos="0" algn="l"/>
               </a:tabLst>
             </a:pPr>
-            <a:fld id="{97F1541F-DD85-45E6-9F4B-FC5CEDCF2A58}" type="slidenum">
+            <a:fld id="{9496CAB6-8F94-4DD2-A54D-39AF6A541C7D}" type="slidenum">
               <a:rPr lang="en-US" sz="1200" b="0" u="none" strike="noStrike">
                 <a:solidFill>
                   <a:schemeClr val="dk1"/>
@@ -3752,7 +3739,7 @@
       </p:grpSpPr>
       <p:sp>
         <p:nvSpPr>
-          <p:cNvPr id="244" name="PlaceHolder 1"/>
+          <p:cNvPr id="232" name="PlaceHolder 1"/>
           <p:cNvSpPr>
             <a:spLocks noGrp="1"/>
           </p:cNvSpPr>
@@ -3763,19 +3750,19 @@
         <p:spPr>
           <a:xfrm>
             <a:off x="685800" y="1143000"/>
-            <a:ext cx="5486040" cy="3085920"/>
-          </a:xfrm>
-          <a:prstGeom prst="rect">
-            <a:avLst/>
-          </a:prstGeom>
-          <a:ln w="0">
-            <a:noFill/>
-          </a:ln>
-        </p:spPr>
-      </p:sp>
-      <p:sp>
-        <p:nvSpPr>
-          <p:cNvPr id="245" name="PlaceHolder 2"/>
+            <a:ext cx="5484960" cy="3084840"/>
+          </a:xfrm>
+          <a:prstGeom prst="rect">
+            <a:avLst/>
+          </a:prstGeom>
+          <a:ln w="0">
+            <a:noFill/>
+          </a:ln>
+        </p:spPr>
+      </p:sp>
+      <p:sp>
+        <p:nvSpPr>
+          <p:cNvPr id="233" name="PlaceHolder 2"/>
           <p:cNvSpPr>
             <a:spLocks noGrp="1"/>
           </p:cNvSpPr>
@@ -3786,7 +3773,7 @@
         <p:spPr>
           <a:xfrm>
             <a:off x="685800" y="4400640"/>
-            <a:ext cx="5486040" cy="3600000"/>
+            <a:ext cx="5484960" cy="3598920"/>
           </a:xfrm>
           <a:prstGeom prst="rect">
             <a:avLst/>
@@ -4021,7 +4008,7 @@
       </p:sp>
       <p:sp>
         <p:nvSpPr>
-          <p:cNvPr id="246" name="PlaceHolder 3"/>
+          <p:cNvPr id="234" name="PlaceHolder 3"/>
           <p:cNvSpPr>
             <a:spLocks noGrp="1"/>
           </p:cNvSpPr>
@@ -4032,7 +4019,7 @@
         <p:spPr>
           <a:xfrm>
             <a:off x="3884760" y="8685360"/>
-            <a:ext cx="2971440" cy="458280"/>
+            <a:ext cx="2970360" cy="457200"/>
           </a:xfrm>
           <a:prstGeom prst="rect">
             <a:avLst/>
@@ -4076,7 +4063,7 @@
                 <a:tab pos="0" algn="l"/>
               </a:tabLst>
             </a:pPr>
-            <a:fld id="{F8E0C335-FB88-47C0-AFF3-9976B4E8914F}" type="slidenum">
+            <a:fld id="{238BE3FA-446A-496E-9312-CE0CBDA00866}" type="slidenum">
               <a:rPr lang="en-US" sz="1200" b="0" u="none" strike="noStrike">
                 <a:solidFill>
                   <a:schemeClr val="dk1"/>
@@ -4086,192 +4073,9 @@
                 <a:latin typeface="Calibri"/>
                 <a:ea typeface="Calibri"/>
               </a:rPr>
-              <a:t>1</a:t>
+              <a:t>&lt;número&gt;</a:t>
             </a:fld>
             <a:endParaRPr lang="pt-BR" sz="1200" b="0" u="none" strike="noStrike">
-              <a:solidFill>
-                <a:srgbClr val="000000"/>
-              </a:solidFill>
-              <a:effectLst/>
-              <a:uFillTx/>
-              <a:latin typeface="Times New Roman"/>
-            </a:endParaRPr>
-          </a:p>
-        </p:txBody>
-      </p:sp>
-    </p:spTree>
-  </p:cSld>
-</p:notes>
-</file>
-
-<file path=ppt/notesSlides/notesSlide26.xml><?xml version="1.0" encoding="utf-8"?>
-<p:notes xmlns:a="http://schemas.openxmlformats.org/drawingml/2006/main" xmlns:p="http://schemas.openxmlformats.org/presentationml/2006/main" xmlns:r="http://schemas.openxmlformats.org/officeDocument/2006/relationships" xmlns:p14="http://schemas.microsoft.com/office/powerpoint/2010/main" xmlns:p15="http://schemas.microsoft.com/office/powerpoint/2012/main" xmlns:mc="http://schemas.openxmlformats.org/markup-compatibility/2006">
-  <p:cSld>
-    <p:spTree>
-      <p:nvGrpSpPr>
-        <p:cNvPr id="1" name=""/>
-        <p:cNvGrpSpPr/>
-        <p:nvPr/>
-      </p:nvGrpSpPr>
-      <p:grpSpPr>
-        <a:xfrm>
-          <a:off x="0" y="0"/>
-          <a:ext cx="0" cy="0"/>
-          <a:chOff x="0" y="0"/>
-          <a:chExt cx="0" cy="0"/>
-        </a:xfrm>
-      </p:grpSpPr>
-      <p:sp>
-        <p:nvSpPr>
-          <p:cNvPr id="247" name="PlaceHolder 1"/>
-          <p:cNvSpPr>
-            <a:spLocks noGrp="1"/>
-          </p:cNvSpPr>
-          <p:nvPr>
-            <p:ph type="sldImg"/>
-          </p:nvPr>
-        </p:nvSpPr>
-        <p:spPr>
-          <a:xfrm>
-            <a:off x="685800" y="1143000"/>
-            <a:ext cx="5486040" cy="3085920"/>
-          </a:xfrm>
-          <a:prstGeom prst="rect">
-            <a:avLst/>
-          </a:prstGeom>
-          <a:ln w="0">
-            <a:noFill/>
-          </a:ln>
-        </p:spPr>
-      </p:sp>
-      <p:sp>
-        <p:nvSpPr>
-          <p:cNvPr id="248" name="PlaceHolder 2"/>
-          <p:cNvSpPr>
-            <a:spLocks noGrp="1"/>
-          </p:cNvSpPr>
-          <p:nvPr>
-            <p:ph type="body"/>
-          </p:nvPr>
-        </p:nvSpPr>
-        <p:spPr>
-          <a:xfrm>
-            <a:off x="685800" y="4400640"/>
-            <a:ext cx="5486040" cy="3600000"/>
-          </a:xfrm>
-          <a:prstGeom prst="rect">
-            <a:avLst/>
-          </a:prstGeom>
-          <a:noFill/>
-          <a:ln w="0">
-            <a:noFill/>
-          </a:ln>
-        </p:spPr>
-        <p:txBody>
-          <a:bodyPr lIns="91440" tIns="45720" rIns="91440" bIns="45720" anchor="t">
-            <a:noAutofit/>
-          </a:bodyPr>
-          <a:p>
-            <a:pPr indent="0" algn="l">
-              <a:lnSpc>
-                <a:spcPct val="100000"/>
-              </a:lnSpc>
-              <a:buNone/>
-              <a:tabLst>
-                <a:tab pos="0" algn="l"/>
-              </a:tabLst>
-            </a:pPr>
-            <a:r>
-              <a:rPr lang="en-US" sz="1200" b="0" u="none" strike="noStrike">
-                <a:solidFill>
-                  <a:schemeClr val="dk1"/>
-                </a:solidFill>
-                <a:effectLst/>
-                <a:uFillTx/>
-                <a:latin typeface="Calibri"/>
-                <a:ea typeface="Calibri"/>
-              </a:rPr>
-              <a:t>Fechamento com chamado à ação — participação é essencial, não opcional.</a:t>
-            </a:r>
-            <a:endParaRPr lang="pt-BR" sz="1200" b="0" u="none" strike="noStrike">
-              <a:solidFill>
-                <a:srgbClr val="000000"/>
-              </a:solidFill>
-              <a:effectLst/>
-              <a:uFillTx/>
-              <a:latin typeface="Arial"/>
-            </a:endParaRPr>
-          </a:p>
-        </p:txBody>
-      </p:sp>
-      <p:sp>
-        <p:nvSpPr>
-          <p:cNvPr id="249" name="PlaceHolder 3"/>
-          <p:cNvSpPr>
-            <a:spLocks noGrp="1"/>
-          </p:cNvSpPr>
-          <p:nvPr>
-            <p:ph type="sldNum" idx="29"/>
-          </p:nvPr>
-        </p:nvSpPr>
-        <p:spPr>
-          <a:xfrm>
-            <a:off x="3884760" y="8685360"/>
-            <a:ext cx="2971440" cy="458280"/>
-          </a:xfrm>
-          <a:prstGeom prst="rect">
-            <a:avLst/>
-          </a:prstGeom>
-          <a:noFill/>
-          <a:ln w="0">
-            <a:noFill/>
-          </a:ln>
-        </p:spPr>
-        <p:txBody>
-          <a:bodyPr lIns="91440" tIns="45720" rIns="91440" bIns="45720" anchor="b">
-            <a:noAutofit/>
-          </a:bodyPr>
-          <a:lstStyle>
-            <a:lvl1pPr indent="0" algn="r">
-              <a:lnSpc>
-                <a:spcPct val="100000"/>
-              </a:lnSpc>
-              <a:buNone/>
-              <a:tabLst>
-                <a:tab pos="0" algn="l"/>
-              </a:tabLst>
-              <a:defRPr lang="en-US" sz="1400" b="0" u="none" strike="noStrike">
-                <a:solidFill>
-                  <a:srgbClr val="000000"/>
-                </a:solidFill>
-                <a:effectLst/>
-                <a:uFillTx/>
-                <a:latin typeface="Times New Roman"/>
-              </a:defRPr>
-            </a:lvl1pPr>
-          </a:lstStyle>
-          <a:p>
-            <a:pPr indent="0" algn="r">
-              <a:lnSpc>
-                <a:spcPct val="100000"/>
-              </a:lnSpc>
-              <a:buNone/>
-              <a:tabLst>
-                <a:tab pos="0" algn="l"/>
-              </a:tabLst>
-            </a:pPr>
-            <a:fld id="{7801883D-85B8-45FE-9235-CA893DDAA33B}" type="slidenum">
-              <a:rPr lang="en-US" sz="1400" b="0" u="none" strike="noStrike">
-                <a:solidFill>
-                  <a:srgbClr val="000000"/>
-                </a:solidFill>
-                <a:effectLst/>
-                <a:uFillTx/>
-                <a:latin typeface="Times New Roman"/>
-              </a:rPr>
-              <a:t>&lt;número&gt;</a:t>
-            </a:fld>
-            <a:endParaRPr lang="pt-BR" sz="1400" b="0" u="none" strike="noStrike">
               <a:solidFill>
                 <a:srgbClr val="000000"/>
               </a:solidFill>
@@ -4306,7 +4110,7 @@
       </p:grpSpPr>
       <p:sp>
         <p:nvSpPr>
-          <p:cNvPr id="178" name="PlaceHolder 1"/>
+          <p:cNvPr id="166" name="PlaceHolder 1"/>
           <p:cNvSpPr>
             <a:spLocks noGrp="1"/>
           </p:cNvSpPr>
@@ -4317,19 +4121,19 @@
         <p:spPr>
           <a:xfrm>
             <a:off x="685800" y="1143000"/>
-            <a:ext cx="5486040" cy="3085920"/>
-          </a:xfrm>
-          <a:prstGeom prst="rect">
-            <a:avLst/>
-          </a:prstGeom>
-          <a:ln w="0">
-            <a:noFill/>
-          </a:ln>
-        </p:spPr>
-      </p:sp>
-      <p:sp>
-        <p:nvSpPr>
-          <p:cNvPr id="179" name="PlaceHolder 2"/>
+            <a:ext cx="5484960" cy="3084840"/>
+          </a:xfrm>
+          <a:prstGeom prst="rect">
+            <a:avLst/>
+          </a:prstGeom>
+          <a:ln w="0">
+            <a:noFill/>
+          </a:ln>
+        </p:spPr>
+      </p:sp>
+      <p:sp>
+        <p:nvSpPr>
+          <p:cNvPr id="167" name="PlaceHolder 2"/>
           <p:cNvSpPr>
             <a:spLocks noGrp="1"/>
           </p:cNvSpPr>
@@ -4340,7 +4144,7 @@
         <p:spPr>
           <a:xfrm>
             <a:off x="685800" y="4400640"/>
-            <a:ext cx="5486040" cy="3600000"/>
+            <a:ext cx="5484960" cy="3598920"/>
           </a:xfrm>
           <a:prstGeom prst="rect">
             <a:avLst/>
@@ -4355,7 +4159,7 @@
             <a:noAutofit/>
           </a:bodyPr>
           <a:p>
-            <a:pPr indent="0" algn="l">
+            <a:pPr marL="216000" indent="0" algn="l">
               <a:lnSpc>
                 <a:spcPct val="100000"/>
               </a:lnSpc>
@@ -4389,7 +4193,7 @@
       </p:sp>
       <p:sp>
         <p:nvSpPr>
-          <p:cNvPr id="180" name="PlaceHolder 3"/>
+          <p:cNvPr id="168" name="PlaceHolder 3"/>
           <p:cNvSpPr>
             <a:spLocks noGrp="1"/>
           </p:cNvSpPr>
@@ -4400,7 +4204,7 @@
         <p:spPr>
           <a:xfrm>
             <a:off x="3884760" y="8685360"/>
-            <a:ext cx="2971440" cy="458280"/>
+            <a:ext cx="2970360" cy="457200"/>
           </a:xfrm>
           <a:prstGeom prst="rect">
             <a:avLst/>
@@ -4443,7 +4247,7 @@
                 <a:tab pos="0" algn="l"/>
               </a:tabLst>
             </a:pPr>
-            <a:fld id="{D2589ABE-3989-4532-9166-408D59F98DF0}" type="slidenum">
+            <a:fld id="{A433C4C3-BB3E-4ECB-B94A-499C896FDB69}" type="slidenum">
               <a:rPr lang="en-US" sz="1400" b="0" u="none" strike="noStrike">
                 <a:solidFill>
                   <a:srgbClr val="000000"/>
@@ -4489,7 +4293,7 @@
       </p:grpSpPr>
       <p:sp>
         <p:nvSpPr>
-          <p:cNvPr id="181" name="PlaceHolder 1"/>
+          <p:cNvPr id="169" name="PlaceHolder 1"/>
           <p:cNvSpPr>
             <a:spLocks noGrp="1"/>
           </p:cNvSpPr>
@@ -4500,19 +4304,19 @@
         <p:spPr>
           <a:xfrm>
             <a:off x="685800" y="1143000"/>
-            <a:ext cx="5486040" cy="3085920"/>
-          </a:xfrm>
-          <a:prstGeom prst="rect">
-            <a:avLst/>
-          </a:prstGeom>
-          <a:ln w="0">
-            <a:noFill/>
-          </a:ln>
-        </p:spPr>
-      </p:sp>
-      <p:sp>
-        <p:nvSpPr>
-          <p:cNvPr id="182" name="PlaceHolder 2"/>
+            <a:ext cx="5484960" cy="3084840"/>
+          </a:xfrm>
+          <a:prstGeom prst="rect">
+            <a:avLst/>
+          </a:prstGeom>
+          <a:ln w="0">
+            <a:noFill/>
+          </a:ln>
+        </p:spPr>
+      </p:sp>
+      <p:sp>
+        <p:nvSpPr>
+          <p:cNvPr id="170" name="PlaceHolder 2"/>
           <p:cNvSpPr>
             <a:spLocks noGrp="1"/>
           </p:cNvSpPr>
@@ -4523,7 +4327,7 @@
         <p:spPr>
           <a:xfrm>
             <a:off x="685800" y="4400640"/>
-            <a:ext cx="5486040" cy="3600000"/>
+            <a:ext cx="5484960" cy="3598920"/>
           </a:xfrm>
           <a:prstGeom prst="rect">
             <a:avLst/>
@@ -4538,7 +4342,7 @@
             <a:noAutofit/>
           </a:bodyPr>
           <a:p>
-            <a:pPr indent="0" algn="l">
+            <a:pPr marL="216000" indent="0" algn="l">
               <a:lnSpc>
                 <a:spcPct val="100000"/>
               </a:lnSpc>
@@ -4572,7 +4376,7 @@
       </p:sp>
       <p:sp>
         <p:nvSpPr>
-          <p:cNvPr id="183" name="PlaceHolder 3"/>
+          <p:cNvPr id="171" name="PlaceHolder 3"/>
           <p:cNvSpPr>
             <a:spLocks noGrp="1"/>
           </p:cNvSpPr>
@@ -4583,7 +4387,7 @@
         <p:spPr>
           <a:xfrm>
             <a:off x="3884760" y="8685360"/>
-            <a:ext cx="2971440" cy="458280"/>
+            <a:ext cx="2970360" cy="457200"/>
           </a:xfrm>
           <a:prstGeom prst="rect">
             <a:avLst/>
@@ -4626,7 +4430,7 @@
                 <a:tab pos="0" algn="l"/>
               </a:tabLst>
             </a:pPr>
-            <a:fld id="{85251ADA-B486-442C-9916-AFF78552B95E}" type="slidenum">
+            <a:fld id="{51F736E5-344E-4D6B-8D85-5B68F689C82B}" type="slidenum">
               <a:rPr lang="en-US" sz="1400" b="0" u="none" strike="noStrike">
                 <a:solidFill>
                   <a:srgbClr val="000000"/>
@@ -4672,7 +4476,7 @@
       </p:grpSpPr>
       <p:sp>
         <p:nvSpPr>
-          <p:cNvPr id="184" name="PlaceHolder 1"/>
+          <p:cNvPr id="172" name="PlaceHolder 1"/>
           <p:cNvSpPr>
             <a:spLocks noGrp="1"/>
           </p:cNvSpPr>
@@ -4683,19 +4487,19 @@
         <p:spPr>
           <a:xfrm>
             <a:off x="685800" y="1143000"/>
-            <a:ext cx="5486040" cy="3085920"/>
-          </a:xfrm>
-          <a:prstGeom prst="rect">
-            <a:avLst/>
-          </a:prstGeom>
-          <a:ln w="0">
-            <a:noFill/>
-          </a:ln>
-        </p:spPr>
-      </p:sp>
-      <p:sp>
-        <p:nvSpPr>
-          <p:cNvPr id="185" name="PlaceHolder 2"/>
+            <a:ext cx="5484960" cy="3084840"/>
+          </a:xfrm>
+          <a:prstGeom prst="rect">
+            <a:avLst/>
+          </a:prstGeom>
+          <a:ln w="0">
+            <a:noFill/>
+          </a:ln>
+        </p:spPr>
+      </p:sp>
+      <p:sp>
+        <p:nvSpPr>
+          <p:cNvPr id="173" name="PlaceHolder 2"/>
           <p:cNvSpPr>
             <a:spLocks noGrp="1"/>
           </p:cNvSpPr>
@@ -4706,7 +4510,7 @@
         <p:spPr>
           <a:xfrm>
             <a:off x="685800" y="4400640"/>
-            <a:ext cx="5486040" cy="3600000"/>
+            <a:ext cx="5484960" cy="3598920"/>
           </a:xfrm>
           <a:prstGeom prst="rect">
             <a:avLst/>
@@ -4721,7 +4525,7 @@
             <a:noAutofit/>
           </a:bodyPr>
           <a:p>
-            <a:pPr indent="0" algn="l">
+            <a:pPr marL="216000" indent="0" algn="l">
               <a:lnSpc>
                 <a:spcPct val="100000"/>
               </a:lnSpc>
@@ -4755,7 +4559,7 @@
       </p:sp>
       <p:sp>
         <p:nvSpPr>
-          <p:cNvPr id="186" name="PlaceHolder 3"/>
+          <p:cNvPr id="174" name="PlaceHolder 3"/>
           <p:cNvSpPr>
             <a:spLocks noGrp="1"/>
           </p:cNvSpPr>
@@ -4766,7 +4570,7 @@
         <p:spPr>
           <a:xfrm>
             <a:off x="3884760" y="8685360"/>
-            <a:ext cx="2971440" cy="458280"/>
+            <a:ext cx="2970360" cy="457200"/>
           </a:xfrm>
           <a:prstGeom prst="rect">
             <a:avLst/>
@@ -4809,7 +4613,7 @@
                 <a:tab pos="0" algn="l"/>
               </a:tabLst>
             </a:pPr>
-            <a:fld id="{45DFDBE3-9F82-4FFB-8396-9EFE42FBAFD2}" type="slidenum">
+            <a:fld id="{A50F6B2E-461C-4903-AC22-4713564C656E}" type="slidenum">
               <a:rPr lang="en-US" sz="1400" b="0" u="none" strike="noStrike">
                 <a:solidFill>
                   <a:srgbClr val="000000"/>
@@ -4855,7 +4659,7 @@
       </p:grpSpPr>
       <p:sp>
         <p:nvSpPr>
-          <p:cNvPr id="187" name="PlaceHolder 1"/>
+          <p:cNvPr id="175" name="PlaceHolder 1"/>
           <p:cNvSpPr>
             <a:spLocks noGrp="1"/>
           </p:cNvSpPr>
@@ -4866,19 +4670,19 @@
         <p:spPr>
           <a:xfrm>
             <a:off x="685800" y="1143000"/>
-            <a:ext cx="5486040" cy="3085920"/>
-          </a:xfrm>
-          <a:prstGeom prst="rect">
-            <a:avLst/>
-          </a:prstGeom>
-          <a:ln w="0">
-            <a:noFill/>
-          </a:ln>
-        </p:spPr>
-      </p:sp>
-      <p:sp>
-        <p:nvSpPr>
-          <p:cNvPr id="188" name="PlaceHolder 2"/>
+            <a:ext cx="5484960" cy="3084840"/>
+          </a:xfrm>
+          <a:prstGeom prst="rect">
+            <a:avLst/>
+          </a:prstGeom>
+          <a:ln w="0">
+            <a:noFill/>
+          </a:ln>
+        </p:spPr>
+      </p:sp>
+      <p:sp>
+        <p:nvSpPr>
+          <p:cNvPr id="176" name="PlaceHolder 2"/>
           <p:cNvSpPr>
             <a:spLocks noGrp="1"/>
           </p:cNvSpPr>
@@ -4889,7 +4693,7 @@
         <p:spPr>
           <a:xfrm>
             <a:off x="685800" y="4400640"/>
-            <a:ext cx="5486040" cy="3600000"/>
+            <a:ext cx="5484960" cy="3598920"/>
           </a:xfrm>
           <a:prstGeom prst="rect">
             <a:avLst/>
@@ -4904,7 +4708,7 @@
             <a:noAutofit/>
           </a:bodyPr>
           <a:p>
-            <a:pPr indent="0" algn="l">
+            <a:pPr marL="216000" indent="0" algn="l">
               <a:lnSpc>
                 <a:spcPct val="100000"/>
               </a:lnSpc>
@@ -4938,7 +4742,7 @@
       </p:sp>
       <p:sp>
         <p:nvSpPr>
-          <p:cNvPr id="189" name="PlaceHolder 3"/>
+          <p:cNvPr id="177" name="PlaceHolder 3"/>
           <p:cNvSpPr>
             <a:spLocks noGrp="1"/>
           </p:cNvSpPr>
@@ -4949,7 +4753,7 @@
         <p:spPr>
           <a:xfrm>
             <a:off x="3884760" y="8685360"/>
-            <a:ext cx="2971440" cy="458280"/>
+            <a:ext cx="2970360" cy="457200"/>
           </a:xfrm>
           <a:prstGeom prst="rect">
             <a:avLst/>
@@ -4992,7 +4796,7 @@
                 <a:tab pos="0" algn="l"/>
               </a:tabLst>
             </a:pPr>
-            <a:fld id="{3B6265A7-C102-4B80-9E6C-56B3B22ACF59}" type="slidenum">
+            <a:fld id="{750AFF8E-636E-41C0-8646-C9BDC6C0D53C}" type="slidenum">
               <a:rPr lang="en-US" sz="1400" b="0" u="none" strike="noStrike">
                 <a:solidFill>
                   <a:srgbClr val="000000"/>
@@ -5038,7 +4842,7 @@
       </p:grpSpPr>
       <p:sp>
         <p:nvSpPr>
-          <p:cNvPr id="190" name="PlaceHolder 1"/>
+          <p:cNvPr id="178" name="PlaceHolder 1"/>
           <p:cNvSpPr>
             <a:spLocks noGrp="1"/>
           </p:cNvSpPr>
@@ -5049,19 +4853,19 @@
         <p:spPr>
           <a:xfrm>
             <a:off x="685800" y="1143000"/>
-            <a:ext cx="5486040" cy="3085920"/>
-          </a:xfrm>
-          <a:prstGeom prst="rect">
-            <a:avLst/>
-          </a:prstGeom>
-          <a:ln w="0">
-            <a:noFill/>
-          </a:ln>
-        </p:spPr>
-      </p:sp>
-      <p:sp>
-        <p:nvSpPr>
-          <p:cNvPr id="191" name="PlaceHolder 2"/>
+            <a:ext cx="5484960" cy="3084840"/>
+          </a:xfrm>
+          <a:prstGeom prst="rect">
+            <a:avLst/>
+          </a:prstGeom>
+          <a:ln w="0">
+            <a:noFill/>
+          </a:ln>
+        </p:spPr>
+      </p:sp>
+      <p:sp>
+        <p:nvSpPr>
+          <p:cNvPr id="179" name="PlaceHolder 2"/>
           <p:cNvSpPr>
             <a:spLocks noGrp="1"/>
           </p:cNvSpPr>
@@ -5072,7 +4876,7 @@
         <p:spPr>
           <a:xfrm>
             <a:off x="685800" y="4400640"/>
-            <a:ext cx="5486040" cy="3600360"/>
+            <a:ext cx="5484960" cy="3599280"/>
           </a:xfrm>
           <a:prstGeom prst="rect">
             <a:avLst/>
@@ -5090,20 +4894,20 @@
             <a:pPr indent="0" algn="l">
               <a:buNone/>
             </a:pPr>
-            <a:endParaRPr lang="pt-BR" sz="1200" b="0" u="none" strike="noStrike">
-              <a:solidFill>
-                <a:schemeClr val="dk1"/>
-              </a:solidFill>
-              <a:effectLst/>
-              <a:uFillTx/>
-              <a:latin typeface="Calibri"/>
-            </a:endParaRPr>
-          </a:p>
-        </p:txBody>
-      </p:sp>
-      <p:sp>
-        <p:nvSpPr>
-          <p:cNvPr id="192" name="PlaceHolder 3"/>
+            <a:endParaRPr lang="pt-BR" sz="1800" b="0" u="none" strike="noStrike">
+              <a:solidFill>
+                <a:srgbClr val="000000"/>
+              </a:solidFill>
+              <a:effectLst/>
+              <a:uFillTx/>
+              <a:latin typeface="Arial"/>
+            </a:endParaRPr>
+          </a:p>
+        </p:txBody>
+      </p:sp>
+      <p:sp>
+        <p:nvSpPr>
+          <p:cNvPr id="180" name="PlaceHolder 3"/>
           <p:cNvSpPr>
             <a:spLocks noGrp="1"/>
           </p:cNvSpPr>
@@ -5114,7 +4918,7 @@
         <p:spPr>
           <a:xfrm>
             <a:off x="3884760" y="8685360"/>
-            <a:ext cx="2971440" cy="458280"/>
+            <a:ext cx="2970360" cy="457200"/>
           </a:xfrm>
           <a:prstGeom prst="rect">
             <a:avLst/>
@@ -5157,7 +4961,7 @@
                 <a:tab pos="0" algn="l"/>
               </a:tabLst>
             </a:pPr>
-            <a:fld id="{967BC998-2C8E-40AB-9D5B-C6C435E3942E}" type="slidenum">
+            <a:fld id="{37364A3A-9E64-4BC8-A47C-F87DBDA451C1}" type="slidenum">
               <a:rPr lang="en-US" sz="1400" b="0" u="none" strike="noStrike">
                 <a:solidFill>
                   <a:srgbClr val="000000"/>
@@ -5203,7 +5007,7 @@
       </p:grpSpPr>
       <p:sp>
         <p:nvSpPr>
-          <p:cNvPr id="193" name="PlaceHolder 1"/>
+          <p:cNvPr id="181" name="PlaceHolder 1"/>
           <p:cNvSpPr>
             <a:spLocks noGrp="1"/>
           </p:cNvSpPr>
@@ -5214,19 +5018,19 @@
         <p:spPr>
           <a:xfrm>
             <a:off x="685800" y="1143000"/>
-            <a:ext cx="5486040" cy="3085920"/>
-          </a:xfrm>
-          <a:prstGeom prst="rect">
-            <a:avLst/>
-          </a:prstGeom>
-          <a:ln w="0">
-            <a:noFill/>
-          </a:ln>
-        </p:spPr>
-      </p:sp>
-      <p:sp>
-        <p:nvSpPr>
-          <p:cNvPr id="194" name="PlaceHolder 2"/>
+            <a:ext cx="5484960" cy="3084840"/>
+          </a:xfrm>
+          <a:prstGeom prst="rect">
+            <a:avLst/>
+          </a:prstGeom>
+          <a:ln w="0">
+            <a:noFill/>
+          </a:ln>
+        </p:spPr>
+      </p:sp>
+      <p:sp>
+        <p:nvSpPr>
+          <p:cNvPr id="182" name="PlaceHolder 2"/>
           <p:cNvSpPr>
             <a:spLocks noGrp="1"/>
           </p:cNvSpPr>
@@ -5237,7 +5041,7 @@
         <p:spPr>
           <a:xfrm>
             <a:off x="685800" y="4400640"/>
-            <a:ext cx="5486040" cy="3600000"/>
+            <a:ext cx="5484960" cy="3598920"/>
           </a:xfrm>
           <a:prstGeom prst="rect">
             <a:avLst/>
@@ -5317,7 +5121,7 @@
       </p:sp>
       <p:sp>
         <p:nvSpPr>
-          <p:cNvPr id="195" name="PlaceHolder 3"/>
+          <p:cNvPr id="183" name="PlaceHolder 3"/>
           <p:cNvSpPr>
             <a:spLocks noGrp="1"/>
           </p:cNvSpPr>
@@ -5328,7 +5132,7 @@
         <p:spPr>
           <a:xfrm>
             <a:off x="3884760" y="8685360"/>
-            <a:ext cx="2971440" cy="458280"/>
+            <a:ext cx="2970360" cy="457200"/>
           </a:xfrm>
           <a:prstGeom prst="rect">
             <a:avLst/>
@@ -5371,7 +5175,7 @@
                 <a:tab pos="0" algn="l"/>
               </a:tabLst>
             </a:pPr>
-            <a:fld id="{1DA74891-0667-4DAD-86D0-6442E858D658}" type="slidenum">
+            <a:fld id="{B452FB48-F1EE-4591-87B0-790EFA919F1D}" type="slidenum">
               <a:rPr lang="en-US" sz="1400" b="0" u="none" strike="noStrike">
                 <a:solidFill>
                   <a:srgbClr val="000000"/>
@@ -5417,7 +5221,7 @@
       </p:grpSpPr>
       <p:sp>
         <p:nvSpPr>
-          <p:cNvPr id="196" name="PlaceHolder 1"/>
+          <p:cNvPr id="184" name="PlaceHolder 1"/>
           <p:cNvSpPr>
             <a:spLocks noGrp="1"/>
           </p:cNvSpPr>
@@ -5428,19 +5232,19 @@
         <p:spPr>
           <a:xfrm>
             <a:off x="685800" y="1143000"/>
-            <a:ext cx="5486040" cy="3085920"/>
-          </a:xfrm>
-          <a:prstGeom prst="rect">
-            <a:avLst/>
-          </a:prstGeom>
-          <a:ln w="0">
-            <a:noFill/>
-          </a:ln>
-        </p:spPr>
-      </p:sp>
-      <p:sp>
-        <p:nvSpPr>
-          <p:cNvPr id="197" name="PlaceHolder 2"/>
+            <a:ext cx="5484960" cy="3084840"/>
+          </a:xfrm>
+          <a:prstGeom prst="rect">
+            <a:avLst/>
+          </a:prstGeom>
+          <a:ln w="0">
+            <a:noFill/>
+          </a:ln>
+        </p:spPr>
+      </p:sp>
+      <p:sp>
+        <p:nvSpPr>
+          <p:cNvPr id="185" name="PlaceHolder 2"/>
           <p:cNvSpPr>
             <a:spLocks noGrp="1"/>
           </p:cNvSpPr>
@@ -5451,7 +5255,7 @@
         <p:spPr>
           <a:xfrm>
             <a:off x="685800" y="4400640"/>
-            <a:ext cx="5486040" cy="3600000"/>
+            <a:ext cx="5484960" cy="3598920"/>
           </a:xfrm>
           <a:prstGeom prst="rect">
             <a:avLst/>
@@ -5466,7 +5270,7 @@
             <a:noAutofit/>
           </a:bodyPr>
           <a:p>
-            <a:pPr indent="0" algn="l">
+            <a:pPr marL="216000" indent="0" algn="l">
               <a:lnSpc>
                 <a:spcPct val="100000"/>
               </a:lnSpc>
@@ -5500,7 +5304,7 @@
       </p:sp>
       <p:sp>
         <p:nvSpPr>
-          <p:cNvPr id="198" name="PlaceHolder 3"/>
+          <p:cNvPr id="186" name="PlaceHolder 3"/>
           <p:cNvSpPr>
             <a:spLocks noGrp="1"/>
           </p:cNvSpPr>
@@ -5511,7 +5315,7 @@
         <p:spPr>
           <a:xfrm>
             <a:off x="3884760" y="8685360"/>
-            <a:ext cx="2971440" cy="458280"/>
+            <a:ext cx="2970360" cy="457200"/>
           </a:xfrm>
           <a:prstGeom prst="rect">
             <a:avLst/>
@@ -5554,7 +5358,7 @@
                 <a:tab pos="0" algn="l"/>
               </a:tabLst>
             </a:pPr>
-            <a:fld id="{A5CB919C-C293-4CAC-A969-1FE539D8BA77}" type="slidenum">
+            <a:fld id="{A68D8B6D-3064-4D0E-B221-4B47B019BB8A}" type="slidenum">
               <a:rPr lang="en-US" sz="1400" b="0" u="none" strike="noStrike">
                 <a:solidFill>
                   <a:srgbClr val="000000"/>
@@ -5657,7 +5461,10 @@
           <a:lstStyle>
             <a:lvl1pPr indent="0" algn="l">
               <a:buNone/>
-              <a:defRPr lang="pt-BR" sz="1400" b="0" u="none" strike="noStrike">
+              <a:tabLst>
+                <a:tab pos="0" algn="l"/>
+              </a:tabLst>
+              <a:defRPr lang="pt-BR" sz="4400" b="0" u="none" strike="noStrike">
                 <a:solidFill>
                   <a:srgbClr val="000000"/>
                 </a:solidFill>
@@ -5670,9 +5477,12 @@
           <a:p>
             <a:pPr indent="0" algn="l">
               <a:buNone/>
-            </a:pPr>
-            <a:r>
-              <a:rPr lang="pt-BR" sz="1400" b="0" u="none" strike="noStrike">
+              <a:tabLst>
+                <a:tab pos="0" algn="l"/>
+              </a:tabLst>
+            </a:pPr>
+            <a:r>
+              <a:rPr lang="pt-BR" sz="4400" b="0" u="none" strike="noStrike">
                 <a:solidFill>
                   <a:srgbClr val="000000"/>
                 </a:solidFill>
@@ -5682,7 +5492,7 @@
               </a:rPr>
               <a:t>Clique para editar o formato do texto do título</a:t>
             </a:r>
-            <a:endParaRPr lang="pt-BR" sz="1400" b="0" u="none" strike="noStrike">
+            <a:endParaRPr lang="pt-BR" sz="4400" b="0" u="none" strike="noStrike">
               <a:solidFill>
                 <a:srgbClr val="000000"/>
               </a:solidFill>
@@ -5722,75 +5532,62 @@
           </a:bodyPr>
           <a:lstStyle>
             <a:lvl1pPr algn="l">
-              <a:spcBef>
-                <a:spcPts val="1417"/>
-              </a:spcBef>
+              <a:buClr>
+                <a:srgbClr val="000000"/>
+              </a:buClr>
+              <a:buFont typeface="Wingdings" charset="2"/>
+              <a:buChar char=""/>
+              <a:defRPr lang="pt-BR" sz="3200" b="0" u="none" strike="noStrike">
+                <a:solidFill>
+                  <a:srgbClr val="000000"/>
+                </a:solidFill>
+                <a:effectLst/>
+                <a:uFillTx/>
+                <a:latin typeface="Arial"/>
+              </a:defRPr>
+            </a:lvl1pPr>
+            <a:lvl2pPr lvl="1" algn="l">
+              <a:buClr>
+                <a:srgbClr val="000000"/>
+              </a:buClr>
+              <a:buSzPct val="75000"/>
+              <a:buFont typeface="Symbol" charset="2"/>
+              <a:buChar char=""/>
+              <a:defRPr lang="pt-BR" sz="2800" b="0" u="none" strike="noStrike">
+                <a:solidFill>
+                  <a:srgbClr val="000000"/>
+                </a:solidFill>
+                <a:effectLst/>
+                <a:uFillTx/>
+                <a:latin typeface="Arial"/>
+              </a:defRPr>
+            </a:lvl2pPr>
+            <a:lvl3pPr lvl="2" algn="l">
               <a:buClr>
                 <a:srgbClr val="000000"/>
               </a:buClr>
               <a:buSzPct val="45000"/>
               <a:buFont typeface="Wingdings" charset="2"/>
               <a:buChar char=""/>
-              <a:defRPr lang="pt-BR" sz="1400" b="0" u="none" strike="noStrike">
-                <a:solidFill>
-                  <a:srgbClr val="201F1D"/>
+              <a:defRPr lang="pt-BR" sz="2400" b="0" u="none" strike="noStrike">
+                <a:solidFill>
+                  <a:srgbClr val="000000"/>
                 </a:solidFill>
                 <a:effectLst/>
                 <a:uFillTx/>
                 <a:latin typeface="Arial"/>
               </a:defRPr>
-            </a:lvl1pPr>
-            <a:lvl2pPr lvl="1" algn="l">
-              <a:spcBef>
-                <a:spcPts val="1134"/>
-              </a:spcBef>
+            </a:lvl3pPr>
+            <a:lvl4pPr lvl="3" algn="l">
               <a:buClr>
                 <a:srgbClr val="000000"/>
               </a:buClr>
               <a:buSzPct val="75000"/>
               <a:buFont typeface="Symbol" charset="2"/>
               <a:buChar char=""/>
-              <a:defRPr lang="pt-BR" sz="1400" b="0" u="none" strike="noStrike">
-                <a:solidFill>
-                  <a:srgbClr val="201F1D"/>
-                </a:solidFill>
-                <a:effectLst/>
-                <a:uFillTx/>
-                <a:latin typeface="Arial"/>
-              </a:defRPr>
-            </a:lvl2pPr>
-            <a:lvl3pPr lvl="2" algn="l">
-              <a:spcBef>
-                <a:spcPts val="850"/>
-              </a:spcBef>
-              <a:buClr>
-                <a:srgbClr val="000000"/>
-              </a:buClr>
-              <a:buSzPct val="45000"/>
-              <a:buFont typeface="Wingdings" charset="2"/>
-              <a:buChar char=""/>
-              <a:defRPr lang="pt-BR" sz="1400" b="0" u="none" strike="noStrike">
-                <a:solidFill>
-                  <a:srgbClr val="201F1D"/>
-                </a:solidFill>
-                <a:effectLst/>
-                <a:uFillTx/>
-                <a:latin typeface="Arial"/>
-              </a:defRPr>
-            </a:lvl3pPr>
-            <a:lvl4pPr lvl="3" algn="l">
-              <a:spcBef>
-                <a:spcPts val="567"/>
-              </a:spcBef>
-              <a:buClr>
-                <a:srgbClr val="000000"/>
-              </a:buClr>
-              <a:buSzPct val="75000"/>
-              <a:buFont typeface="Symbol" charset="2"/>
-              <a:buChar char=""/>
-              <a:defRPr lang="pt-BR" sz="1400" b="0" u="none" strike="noStrike">
-                <a:solidFill>
-                  <a:srgbClr val="201F1D"/>
+              <a:defRPr lang="pt-BR" sz="2000" b="0" u="none" strike="noStrike">
+                <a:solidFill>
+                  <a:srgbClr val="000000"/>
                 </a:solidFill>
                 <a:effectLst/>
                 <a:uFillTx/>
@@ -5798,9 +5595,6 @@
               </a:defRPr>
             </a:lvl4pPr>
             <a:lvl5pPr lvl="4" algn="l">
-              <a:spcBef>
-                <a:spcPts val="283"/>
-              </a:spcBef>
               <a:buClr>
                 <a:srgbClr val="000000"/>
               </a:buClr>
@@ -5809,7 +5603,7 @@
               <a:buChar char=""/>
               <a:defRPr lang="pt-BR" sz="2000" b="0" u="none" strike="noStrike">
                 <a:solidFill>
-                  <a:srgbClr val="201F1D"/>
+                  <a:srgbClr val="000000"/>
                 </a:solidFill>
                 <a:effectLst/>
                 <a:uFillTx/>
@@ -5817,9 +5611,6 @@
               </a:defRPr>
             </a:lvl5pPr>
             <a:lvl6pPr lvl="5" algn="l">
-              <a:spcBef>
-                <a:spcPts val="283"/>
-              </a:spcBef>
               <a:buClr>
                 <a:srgbClr val="000000"/>
               </a:buClr>
@@ -5828,7 +5619,7 @@
               <a:buChar char=""/>
               <a:defRPr lang="pt-BR" sz="2000" b="0" u="none" strike="noStrike">
                 <a:solidFill>
-                  <a:srgbClr val="201F1D"/>
+                  <a:srgbClr val="000000"/>
                 </a:solidFill>
                 <a:effectLst/>
                 <a:uFillTx/>
@@ -5836,9 +5627,6 @@
               </a:defRPr>
             </a:lvl6pPr>
             <a:lvl7pPr lvl="6" algn="l">
-              <a:spcBef>
-                <a:spcPts val="283"/>
-              </a:spcBef>
               <a:buClr>
                 <a:srgbClr val="000000"/>
               </a:buClr>
@@ -5847,7 +5635,7 @@
               <a:buChar char=""/>
               <a:defRPr lang="pt-BR" sz="2000" b="0" u="none" strike="noStrike">
                 <a:solidFill>
-                  <a:srgbClr val="201F1D"/>
+                  <a:srgbClr val="000000"/>
                 </a:solidFill>
                 <a:effectLst/>
                 <a:uFillTx/>
@@ -5856,10 +5644,64 @@
             </a:lvl7pPr>
           </a:lstStyle>
           <a:p>
-            <a:pPr marL="432000" indent="-324000" algn="l">
-              <a:spcBef>
-                <a:spcPts val="1417"/>
-              </a:spcBef>
+            <a:pPr indent="-324000" algn="l">
+              <a:buClr>
+                <a:srgbClr val="000000"/>
+              </a:buClr>
+              <a:buFont typeface="Wingdings" charset="2"/>
+              <a:buChar char=""/>
+            </a:pPr>
+            <a:r>
+              <a:rPr lang="pt-BR" sz="3200" b="0" u="none" strike="noStrike">
+                <a:solidFill>
+                  <a:srgbClr val="000000"/>
+                </a:solidFill>
+                <a:effectLst/>
+                <a:uFillTx/>
+                <a:latin typeface="Arial"/>
+              </a:rPr>
+              <a:t>Clique para editar o formato de texto dos tópicos</a:t>
+            </a:r>
+            <a:endParaRPr lang="pt-BR" sz="3200" b="0" u="none" strike="noStrike">
+              <a:solidFill>
+                <a:srgbClr val="000000"/>
+              </a:solidFill>
+              <a:effectLst/>
+              <a:uFillTx/>
+              <a:latin typeface="Arial"/>
+            </a:endParaRPr>
+          </a:p>
+          <a:p>
+            <a:pPr marL="864000" lvl="1" indent="-324000" algn="l">
+              <a:buClr>
+                <a:srgbClr val="000000"/>
+              </a:buClr>
+              <a:buSzPct val="75000"/>
+              <a:buFont typeface="Symbol" charset="2"/>
+              <a:buChar char=""/>
+            </a:pPr>
+            <a:r>
+              <a:rPr lang="pt-BR" sz="2800" b="0" u="none" strike="noStrike">
+                <a:solidFill>
+                  <a:srgbClr val="000000"/>
+                </a:solidFill>
+                <a:effectLst/>
+                <a:uFillTx/>
+                <a:latin typeface="Arial"/>
+              </a:rPr>
+              <a:t>2.º nível de tópicos</a:t>
+            </a:r>
+            <a:endParaRPr lang="pt-BR" sz="2800" b="0" u="none" strike="noStrike">
+              <a:solidFill>
+                <a:srgbClr val="000000"/>
+              </a:solidFill>
+              <a:effectLst/>
+              <a:uFillTx/>
+              <a:latin typeface="Arial"/>
+            </a:endParaRPr>
+          </a:p>
+          <a:p>
+            <a:pPr marL="1296000" lvl="2" indent="-288000" algn="l">
               <a:buClr>
                 <a:srgbClr val="000000"/>
               </a:buClr>
@@ -5868,30 +5710,27 @@
               <a:buChar char=""/>
             </a:pPr>
             <a:r>
-              <a:rPr lang="pt-BR" sz="1400" b="0" u="none" strike="noStrike">
-                <a:solidFill>
-                  <a:srgbClr val="201F1D"/>
+              <a:rPr lang="pt-BR" sz="2400" b="0" u="none" strike="noStrike">
+                <a:solidFill>
+                  <a:srgbClr val="000000"/>
                 </a:solidFill>
                 <a:effectLst/>
                 <a:uFillTx/>
                 <a:latin typeface="Arial"/>
               </a:rPr>
-              <a:t>Clique para editar o formato de texto dos tópicos</a:t>
-            </a:r>
-            <a:endParaRPr lang="pt-BR" sz="1400" b="0" u="none" strike="noStrike">
-              <a:solidFill>
-                <a:srgbClr val="201F1D"/>
-              </a:solidFill>
-              <a:effectLst/>
-              <a:uFillTx/>
-              <a:latin typeface="Arial"/>
-            </a:endParaRPr>
-          </a:p>
-          <a:p>
-            <a:pPr marL="864000" lvl="1" indent="-324000" algn="l">
-              <a:spcBef>
-                <a:spcPts val="1134"/>
-              </a:spcBef>
+              <a:t>3.º nível de tópicos</a:t>
+            </a:r>
+            <a:endParaRPr lang="pt-BR" sz="2400" b="0" u="none" strike="noStrike">
+              <a:solidFill>
+                <a:srgbClr val="000000"/>
+              </a:solidFill>
+              <a:effectLst/>
+              <a:uFillTx/>
+              <a:latin typeface="Arial"/>
+            </a:endParaRPr>
+          </a:p>
+          <a:p>
+            <a:pPr marL="1728000" lvl="3" indent="-216000" algn="l">
               <a:buClr>
                 <a:srgbClr val="000000"/>
               </a:buClr>
@@ -5900,30 +5739,27 @@
               <a:buChar char=""/>
             </a:pPr>
             <a:r>
-              <a:rPr lang="pt-BR" sz="1400" b="0" u="none" strike="noStrike">
-                <a:solidFill>
-                  <a:srgbClr val="201F1D"/>
+              <a:rPr lang="pt-BR" sz="2000" b="0" u="none" strike="noStrike">
+                <a:solidFill>
+                  <a:srgbClr val="000000"/>
                 </a:solidFill>
                 <a:effectLst/>
                 <a:uFillTx/>
                 <a:latin typeface="Arial"/>
               </a:rPr>
-              <a:t>2.º nível de tópicos</a:t>
-            </a:r>
-            <a:endParaRPr lang="pt-BR" sz="1400" b="0" u="none" strike="noStrike">
-              <a:solidFill>
-                <a:srgbClr val="201F1D"/>
-              </a:solidFill>
-              <a:effectLst/>
-              <a:uFillTx/>
-              <a:latin typeface="Arial"/>
-            </a:endParaRPr>
-          </a:p>
-          <a:p>
-            <a:pPr marL="1296000" lvl="2" indent="-288000" algn="l">
-              <a:spcBef>
-                <a:spcPts val="850"/>
-              </a:spcBef>
+              <a:t>4.º nível de tópicos</a:t>
+            </a:r>
+            <a:endParaRPr lang="pt-BR" sz="2000" b="0" u="none" strike="noStrike">
+              <a:solidFill>
+                <a:srgbClr val="000000"/>
+              </a:solidFill>
+              <a:effectLst/>
+              <a:uFillTx/>
+              <a:latin typeface="Arial"/>
+            </a:endParaRPr>
+          </a:p>
+          <a:p>
+            <a:pPr marL="2160000" lvl="4" indent="-216000" algn="l">
               <a:buClr>
                 <a:srgbClr val="000000"/>
               </a:buClr>
@@ -5932,62 +5768,27 @@
               <a:buChar char=""/>
             </a:pPr>
             <a:r>
-              <a:rPr lang="pt-BR" sz="1400" b="0" u="none" strike="noStrike">
-                <a:solidFill>
-                  <a:srgbClr val="201F1D"/>
+              <a:rPr lang="pt-BR" sz="2000" b="0" u="none" strike="noStrike">
+                <a:solidFill>
+                  <a:srgbClr val="000000"/>
                 </a:solidFill>
                 <a:effectLst/>
                 <a:uFillTx/>
                 <a:latin typeface="Arial"/>
               </a:rPr>
-              <a:t>3.º nível de tópicos</a:t>
-            </a:r>
-            <a:endParaRPr lang="pt-BR" sz="1400" b="0" u="none" strike="noStrike">
-              <a:solidFill>
-                <a:srgbClr val="201F1D"/>
-              </a:solidFill>
-              <a:effectLst/>
-              <a:uFillTx/>
-              <a:latin typeface="Arial"/>
-            </a:endParaRPr>
-          </a:p>
-          <a:p>
-            <a:pPr marL="1728000" lvl="3" indent="-216000" algn="l">
-              <a:spcBef>
-                <a:spcPts val="567"/>
-              </a:spcBef>
-              <a:buClr>
-                <a:srgbClr val="000000"/>
-              </a:buClr>
-              <a:buSzPct val="75000"/>
-              <a:buFont typeface="Symbol" charset="2"/>
-              <a:buChar char=""/>
-            </a:pPr>
-            <a:r>
-              <a:rPr lang="pt-BR" sz="1400" b="0" u="none" strike="noStrike">
-                <a:solidFill>
-                  <a:srgbClr val="201F1D"/>
-                </a:solidFill>
-                <a:effectLst/>
-                <a:uFillTx/>
-                <a:latin typeface="Arial"/>
-              </a:rPr>
-              <a:t>4.º nível de tópicos</a:t>
-            </a:r>
-            <a:endParaRPr lang="pt-BR" sz="1400" b="0" u="none" strike="noStrike">
-              <a:solidFill>
-                <a:srgbClr val="201F1D"/>
-              </a:solidFill>
-              <a:effectLst/>
-              <a:uFillTx/>
-              <a:latin typeface="Arial"/>
-            </a:endParaRPr>
-          </a:p>
-          <a:p>
-            <a:pPr marL="2160000" lvl="4" indent="-216000" algn="l">
-              <a:spcBef>
-                <a:spcPts val="283"/>
-              </a:spcBef>
+              <a:t>5.º nível de tópicos</a:t>
+            </a:r>
+            <a:endParaRPr lang="pt-BR" sz="2000" b="0" u="none" strike="noStrike">
+              <a:solidFill>
+                <a:srgbClr val="000000"/>
+              </a:solidFill>
+              <a:effectLst/>
+              <a:uFillTx/>
+              <a:latin typeface="Arial"/>
+            </a:endParaRPr>
+          </a:p>
+          <a:p>
+            <a:pPr marL="2592000" lvl="5" indent="-216000" algn="l">
               <a:buClr>
                 <a:srgbClr val="000000"/>
               </a:buClr>
@@ -5998,28 +5799,25 @@
             <a:r>
               <a:rPr lang="pt-BR" sz="2000" b="0" u="none" strike="noStrike">
                 <a:solidFill>
-                  <a:srgbClr val="201F1D"/>
+                  <a:srgbClr val="000000"/>
                 </a:solidFill>
                 <a:effectLst/>
                 <a:uFillTx/>
                 <a:latin typeface="Arial"/>
               </a:rPr>
-              <a:t>5.º nível de tópicos</a:t>
+              <a:t>6.º nível de tópicos</a:t>
             </a:r>
             <a:endParaRPr lang="pt-BR" sz="2000" b="0" u="none" strike="noStrike">
               <a:solidFill>
-                <a:srgbClr val="201F1D"/>
-              </a:solidFill>
-              <a:effectLst/>
-              <a:uFillTx/>
-              <a:latin typeface="Arial"/>
-            </a:endParaRPr>
-          </a:p>
-          <a:p>
-            <a:pPr marL="2592000" lvl="5" indent="-216000" algn="l">
-              <a:spcBef>
-                <a:spcPts val="283"/>
-              </a:spcBef>
+                <a:srgbClr val="000000"/>
+              </a:solidFill>
+              <a:effectLst/>
+              <a:uFillTx/>
+              <a:latin typeface="Arial"/>
+            </a:endParaRPr>
+          </a:p>
+          <a:p>
+            <a:pPr marL="3024000" lvl="6" indent="-216000" algn="l">
               <a:buClr>
                 <a:srgbClr val="000000"/>
               </a:buClr>
@@ -6030,49 +5828,17 @@
             <a:r>
               <a:rPr lang="pt-BR" sz="2000" b="0" u="none" strike="noStrike">
                 <a:solidFill>
-                  <a:srgbClr val="201F1D"/>
+                  <a:srgbClr val="000000"/>
                 </a:solidFill>
                 <a:effectLst/>
                 <a:uFillTx/>
                 <a:latin typeface="Arial"/>
               </a:rPr>
-              <a:t>6.º nível de tópicos</a:t>
+              <a:t>7.º nível de tópicos</a:t>
             </a:r>
             <a:endParaRPr lang="pt-BR" sz="2000" b="0" u="none" strike="noStrike">
               <a:solidFill>
-                <a:srgbClr val="201F1D"/>
-              </a:solidFill>
-              <a:effectLst/>
-              <a:uFillTx/>
-              <a:latin typeface="Arial"/>
-            </a:endParaRPr>
-          </a:p>
-          <a:p>
-            <a:pPr marL="3024000" lvl="6" indent="-216000" algn="l">
-              <a:spcBef>
-                <a:spcPts val="283"/>
-              </a:spcBef>
-              <a:buClr>
-                <a:srgbClr val="000000"/>
-              </a:buClr>
-              <a:buSzPct val="45000"/>
-              <a:buFont typeface="Wingdings" charset="2"/>
-              <a:buChar char=""/>
-            </a:pPr>
-            <a:r>
-              <a:rPr lang="pt-BR" sz="2000" b="0" u="none" strike="noStrike">
-                <a:solidFill>
-                  <a:srgbClr val="201F1D"/>
-                </a:solidFill>
-                <a:effectLst/>
-                <a:uFillTx/>
-                <a:latin typeface="Arial"/>
-              </a:rPr>
-              <a:t>7.º nível de tópicos</a:t>
-            </a:r>
-            <a:endParaRPr lang="pt-BR" sz="2000" b="0" u="none" strike="noStrike">
-              <a:solidFill>
-                <a:srgbClr val="201F1D"/>
+                <a:srgbClr val="000000"/>
               </a:solidFill>
               <a:effectLst/>
               <a:uFillTx/>
@@ -6083,7 +5849,7 @@
       </p:sp>
     </p:spTree>
   </p:cSld>
-  <p:clrMap bg1="lt1" tx1="dk1" bg2="dk2" tx2="lt2" accent1="accent1" accent2="accent2" accent3="accent3" accent4="accent4" accent5="accent5" accent6="accent6" hlink="hlink" folHlink="folHlink"/>
+  <p:clrMap bg1="lt1" tx1="dk1" bg2="lt2" tx2="dk2" accent1="accent1" accent2="accent2" accent3="accent3" accent4="accent4" accent5="accent5" accent6="accent6" hlink="hlink" folHlink="folHlink"/>
   <p:sldLayoutIdLst>
     <p:sldLayoutId id="2147483649" r:id="rId2"/>
   </p:sldLayoutIdLst>
@@ -6123,7 +5889,7 @@
         <p:spPr>
           <a:xfrm>
             <a:off x="1320480" y="3452760"/>
-            <a:ext cx="17155080" cy="1127520"/>
+            <a:ext cx="17154000" cy="1126440"/>
           </a:xfrm>
           <a:prstGeom prst="rect">
             <a:avLst/>
@@ -6184,7 +5950,7 @@
         <p:spPr>
           <a:xfrm>
             <a:off x="1371600" y="4942440"/>
-            <a:ext cx="10722240" cy="2043720"/>
+            <a:ext cx="10721160" cy="2042640"/>
           </a:xfrm>
           <a:prstGeom prst="rect">
             <a:avLst/>
@@ -6245,7 +6011,7 @@
         <p:spPr>
           <a:xfrm>
             <a:off x="1371600" y="9250560"/>
-            <a:ext cx="1814040" cy="197640"/>
+            <a:ext cx="1812960" cy="196560"/>
           </a:xfrm>
           <a:prstGeom prst="rect">
             <a:avLst/>
@@ -6306,7 +6072,7 @@
         <p:spPr>
           <a:xfrm>
             <a:off x="3192480" y="9250560"/>
-            <a:ext cx="132840" cy="197640"/>
+            <a:ext cx="131760" cy="196560"/>
           </a:xfrm>
           <a:prstGeom prst="rect">
             <a:avLst/>
@@ -6367,7 +6133,7 @@
         <p:spPr>
           <a:xfrm>
             <a:off x="3421080" y="9250560"/>
-            <a:ext cx="670320" cy="197640"/>
+            <a:ext cx="669240" cy="196560"/>
           </a:xfrm>
           <a:prstGeom prst="rect">
             <a:avLst/>
@@ -6465,7 +6231,7 @@
         <p:spPr>
           <a:xfrm>
             <a:off x="739080" y="1552680"/>
-            <a:ext cx="17130600" cy="466560"/>
+            <a:ext cx="17129520" cy="465480"/>
           </a:xfrm>
           <a:prstGeom prst="rect">
             <a:avLst/>
@@ -6526,7 +6292,7 @@
         <p:spPr>
           <a:xfrm>
             <a:off x="1131480" y="3722400"/>
-            <a:ext cx="15297480" cy="4240080"/>
+            <a:ext cx="15296400" cy="4239000"/>
           </a:xfrm>
           <a:prstGeom prst="rect">
             <a:avLst/>
@@ -6687,7 +6453,7 @@
         <p:spPr>
           <a:xfrm>
             <a:off x="1371600" y="9745920"/>
-            <a:ext cx="2989440" cy="159840"/>
+            <a:ext cx="2988360" cy="158760"/>
           </a:xfrm>
           <a:prstGeom prst="rect">
             <a:avLst/>
@@ -6741,7 +6507,7 @@
         <p:spPr>
           <a:xfrm>
             <a:off x="1427040" y="0"/>
-            <a:ext cx="15433920" cy="10286640"/>
+            <a:ext cx="15432840" cy="10285560"/>
           </a:xfrm>
           <a:prstGeom prst="rect">
             <a:avLst/>
@@ -6798,7 +6564,7 @@
         <p:spPr>
           <a:xfrm>
             <a:off x="1342800" y="1552680"/>
-            <a:ext cx="17130600" cy="466200"/>
+            <a:ext cx="17129520" cy="465120"/>
           </a:xfrm>
           <a:prstGeom prst="rect">
             <a:avLst/>
@@ -6859,7 +6625,7 @@
         <p:spPr>
           <a:xfrm>
             <a:off x="1371600" y="3722400"/>
-            <a:ext cx="12753720" cy="1523520"/>
+            <a:ext cx="12752640" cy="1522440"/>
           </a:xfrm>
           <a:prstGeom prst="rect">
             <a:avLst/>
@@ -6920,7 +6686,7 @@
         <p:spPr>
           <a:xfrm>
             <a:off x="1371600" y="8507160"/>
-            <a:ext cx="15715800" cy="211320"/>
+            <a:ext cx="15714720" cy="210240"/>
           </a:xfrm>
           <a:prstGeom prst="rect">
             <a:avLst/>
@@ -6985,7 +6751,7 @@
         <p:spPr>
           <a:xfrm>
             <a:off x="444600" y="6043680"/>
-            <a:ext cx="17231400" cy="1665720"/>
+            <a:ext cx="17230320" cy="1664640"/>
           </a:xfrm>
           <a:prstGeom prst="rect">
             <a:avLst/>
@@ -7039,7 +6805,7 @@
         <p:spPr>
           <a:xfrm>
             <a:off x="1022400" y="0"/>
-            <a:ext cx="16243200" cy="10286640"/>
+            <a:ext cx="16242120" cy="10285560"/>
           </a:xfrm>
           <a:prstGeom prst="rect">
             <a:avLst/>
@@ -7096,7 +6862,7 @@
         <p:spPr>
           <a:xfrm>
             <a:off x="1342800" y="1552680"/>
-            <a:ext cx="17130600" cy="466200"/>
+            <a:ext cx="17129520" cy="465120"/>
           </a:xfrm>
           <a:prstGeom prst="rect">
             <a:avLst/>
@@ -7157,7 +6923,7 @@
         <p:spPr>
           <a:xfrm>
             <a:off x="1371600" y="7789680"/>
-            <a:ext cx="14715720" cy="706320"/>
+            <a:ext cx="14714640" cy="705240"/>
           </a:xfrm>
           <a:prstGeom prst="rect">
             <a:avLst/>
@@ -7222,7 +6988,7 @@
         <p:spPr>
           <a:xfrm>
             <a:off x="152280" y="2892600"/>
-            <a:ext cx="17982720" cy="4126680"/>
+            <a:ext cx="17981640" cy="4125600"/>
           </a:xfrm>
           <a:prstGeom prst="rect">
             <a:avLst/>
@@ -7276,7 +7042,7 @@
         <p:spPr>
           <a:xfrm>
             <a:off x="1662480" y="0"/>
-            <a:ext cx="14962680" cy="10286640"/>
+            <a:ext cx="14961600" cy="10285560"/>
           </a:xfrm>
           <a:prstGeom prst="rect">
             <a:avLst/>
@@ -7333,7 +7099,7 @@
         <p:spPr>
           <a:xfrm>
             <a:off x="1342800" y="4986360"/>
-            <a:ext cx="7148880" cy="466200"/>
+            <a:ext cx="7147800" cy="465120"/>
           </a:xfrm>
           <a:prstGeom prst="rect">
             <a:avLst/>
@@ -7431,7 +7197,7 @@
         <p:spPr>
           <a:xfrm>
             <a:off x="1342800" y="1552680"/>
-            <a:ext cx="17130600" cy="466200"/>
+            <a:ext cx="17129520" cy="465120"/>
           </a:xfrm>
           <a:prstGeom prst="rect">
             <a:avLst/>
@@ -7492,7 +7258,7 @@
         <p:spPr>
           <a:xfrm>
             <a:off x="1783080" y="9144000"/>
-            <a:ext cx="14712480" cy="776880"/>
+            <a:ext cx="14711400" cy="775800"/>
           </a:xfrm>
           <a:prstGeom prst="rect">
             <a:avLst/>
@@ -7553,7 +7319,7 @@
         <p:spPr>
           <a:xfrm>
             <a:off x="914400" y="5760720"/>
-            <a:ext cx="16458840" cy="14760"/>
+            <a:ext cx="16457760" cy="13680"/>
           </a:xfrm>
           <a:prstGeom prst="rect">
             <a:avLst/>
@@ -7608,8 +7374,8 @@
         </p:nvSpPr>
         <p:spPr>
           <a:xfrm>
-            <a:off x="3388715" y="5685840"/>
-            <a:ext cx="164160" cy="164160"/>
+            <a:off x="3388680" y="5685840"/>
+            <a:ext cx="163080" cy="163080"/>
           </a:xfrm>
           <a:prstGeom prst="ellipse">
             <a:avLst/>
@@ -7644,7 +7410,7 @@
           <a:fontRef idx="minor"/>
         </p:style>
         <p:txBody>
-          <a:bodyPr lIns="90000" tIns="45000" rIns="90000" bIns="45000" anchor="ctr">
+          <a:bodyPr lIns="81720" tIns="45000" rIns="81720" bIns="45000" anchor="ctr">
             <a:noAutofit/>
           </a:bodyPr>
           <a:p>
@@ -7667,8 +7433,8 @@
         </p:nvSpPr>
         <p:spPr>
           <a:xfrm>
-            <a:off x="2660795" y="5230440"/>
-            <a:ext cx="1620000" cy="292320"/>
+            <a:off x="2660760" y="5230440"/>
+            <a:ext cx="1618920" cy="205200"/>
           </a:xfrm>
           <a:prstGeom prst="rect">
             <a:avLst/>
@@ -7737,8 +7503,8 @@
         </p:nvSpPr>
         <p:spPr>
           <a:xfrm>
-            <a:off x="2660795" y="3017520"/>
-            <a:ext cx="1620000" cy="2121120"/>
+            <a:off x="2660760" y="4218840"/>
+            <a:ext cx="1618920" cy="918720"/>
           </a:xfrm>
           <a:prstGeom prst="rect">
             <a:avLst/>
@@ -7774,7 +7540,22 @@
                 <a:latin typeface="Arial"/>
                 <a:ea typeface="Arial"/>
               </a:rPr>
-              <a:t>A proposta inicial</a:t>
+              <a:t>A chegada do</a:t>
+            </a:r>
+            <a:br>
+              <a:rPr sz="1600"/>
+            </a:br>
+            <a:r>
+              <a:rPr lang="pt-BR" sz="1600" b="1" u="none" strike="noStrike">
+                <a:solidFill>
+                  <a:srgbClr val="2E6B4F"/>
+                </a:solidFill>
+                <a:effectLst/>
+                <a:uFillTx/>
+                <a:latin typeface="Arial"/>
+                <a:ea typeface="Arial"/>
+              </a:rPr>
+              <a:t>USEFLORA</a:t>
             </a:r>
             <a:endParaRPr lang="pt-BR" sz="1600" b="0" u="none" strike="noStrike">
               <a:solidFill>
@@ -7804,7 +7585,22 @@
                 <a:latin typeface="Arial"/>
                 <a:ea typeface="Arial"/>
               </a:rPr>
-              <a:t>três etapas: adquirir, curar e apresentar os dados</a:t>
+              <a:t>Início da parceria e </a:t>
+            </a:r>
+            <a:br>
+              <a:rPr sz="1250"/>
+            </a:br>
+            <a:r>
+              <a:rPr lang="pt-BR" sz="1250" b="0" u="none" strike="noStrike">
+                <a:solidFill>
+                  <a:srgbClr val="5C554C"/>
+                </a:solidFill>
+                <a:effectLst/>
+                <a:uFillTx/>
+                <a:latin typeface="Arial"/>
+                <a:ea typeface="Arial"/>
+              </a:rPr>
+              <a:t>acesso aos dados</a:t>
             </a:r>
             <a:endParaRPr lang="pt-BR" sz="1250" b="0" u="none" strike="noStrike">
               <a:solidFill>
@@ -7825,8 +7621,8 @@
         </p:nvSpPr>
         <p:spPr>
           <a:xfrm>
-            <a:off x="5033030" y="5685840"/>
-            <a:ext cx="164160" cy="164160"/>
+            <a:off x="5033160" y="5685840"/>
+            <a:ext cx="163080" cy="163080"/>
           </a:xfrm>
           <a:prstGeom prst="ellipse">
             <a:avLst/>
@@ -7861,7 +7657,7 @@
           <a:fontRef idx="minor"/>
         </p:style>
         <p:txBody>
-          <a:bodyPr lIns="90000" tIns="45000" rIns="90000" bIns="45000" anchor="ctr">
+          <a:bodyPr lIns="81720" tIns="45000" rIns="81720" bIns="45000" anchor="ctr">
             <a:noAutofit/>
           </a:bodyPr>
           <a:p>
@@ -7884,8 +7680,8 @@
         </p:nvSpPr>
         <p:spPr>
           <a:xfrm>
-            <a:off x="4305110" y="5989320"/>
-            <a:ext cx="1620000" cy="292320"/>
+            <a:off x="4305240" y="5989320"/>
+            <a:ext cx="1618920" cy="205200"/>
           </a:xfrm>
           <a:prstGeom prst="rect">
             <a:avLst/>
@@ -7954,8 +7750,8 @@
         </p:nvSpPr>
         <p:spPr>
           <a:xfrm>
-            <a:off x="4305110" y="6355080"/>
-            <a:ext cx="1620000" cy="2121120"/>
+            <a:off x="4305240" y="6355080"/>
+            <a:ext cx="1618920" cy="1109160"/>
           </a:xfrm>
           <a:prstGeom prst="rect">
             <a:avLst/>
@@ -8042,8 +7838,8 @@
         </p:nvSpPr>
         <p:spPr>
           <a:xfrm>
-            <a:off x="6677345" y="5685840"/>
-            <a:ext cx="164160" cy="164160"/>
+            <a:off x="6677280" y="5685840"/>
+            <a:ext cx="163080" cy="163080"/>
           </a:xfrm>
           <a:prstGeom prst="ellipse">
             <a:avLst/>
@@ -8078,7 +7874,7 @@
           <a:fontRef idx="minor"/>
         </p:style>
         <p:txBody>
-          <a:bodyPr lIns="90000" tIns="45000" rIns="90000" bIns="45000" anchor="ctr">
+          <a:bodyPr lIns="81720" tIns="45000" rIns="81720" bIns="45000" anchor="ctr">
             <a:noAutofit/>
           </a:bodyPr>
           <a:p>
@@ -8101,8 +7897,8 @@
         </p:nvSpPr>
         <p:spPr>
           <a:xfrm>
-            <a:off x="5949425" y="5230440"/>
-            <a:ext cx="1620000" cy="292320"/>
+            <a:off x="5949360" y="5230440"/>
+            <a:ext cx="1618920" cy="205200"/>
           </a:xfrm>
           <a:prstGeom prst="rect">
             <a:avLst/>
@@ -8171,8 +7967,8 @@
         </p:nvSpPr>
         <p:spPr>
           <a:xfrm>
-            <a:off x="5949425" y="3017520"/>
-            <a:ext cx="1620000" cy="2121120"/>
+            <a:off x="5949360" y="3837960"/>
+            <a:ext cx="1618920" cy="1299600"/>
           </a:xfrm>
           <a:prstGeom prst="rect">
             <a:avLst/>
@@ -8259,8 +8055,8 @@
         </p:nvSpPr>
         <p:spPr>
           <a:xfrm>
-            <a:off x="8321660" y="5685840"/>
-            <a:ext cx="164160" cy="164160"/>
+            <a:off x="8321760" y="5685840"/>
+            <a:ext cx="163080" cy="163080"/>
           </a:xfrm>
           <a:prstGeom prst="ellipse">
             <a:avLst/>
@@ -8295,7 +8091,7 @@
           <a:fontRef idx="minor"/>
         </p:style>
         <p:txBody>
-          <a:bodyPr lIns="90000" tIns="45000" rIns="90000" bIns="45000" anchor="ctr">
+          <a:bodyPr lIns="81720" tIns="45000" rIns="81720" bIns="45000" anchor="ctr">
             <a:noAutofit/>
           </a:bodyPr>
           <a:p>
@@ -8318,8 +8114,8 @@
         </p:nvSpPr>
         <p:spPr>
           <a:xfrm>
-            <a:off x="7593740" y="5989320"/>
-            <a:ext cx="1620000" cy="292320"/>
+            <a:off x="7593840" y="5989320"/>
+            <a:ext cx="1618920" cy="205200"/>
           </a:xfrm>
           <a:prstGeom prst="rect">
             <a:avLst/>
@@ -8388,8 +8184,8 @@
         </p:nvSpPr>
         <p:spPr>
           <a:xfrm>
-            <a:off x="7593740" y="6355080"/>
-            <a:ext cx="1620000" cy="2121120"/>
+            <a:off x="7593840" y="6355080"/>
+            <a:ext cx="1618920" cy="1109160"/>
           </a:xfrm>
           <a:prstGeom prst="rect">
             <a:avLst/>
@@ -8455,7 +8251,7 @@
                 <a:latin typeface="Arial"/>
                 <a:ea typeface="Arial"/>
               </a:rPr>
-              <a:t>cada participante soberano; nasce o Pluriverso</a:t>
+              <a:t>Cada participante soberano; nasce o Pluriverso</a:t>
             </a:r>
             <a:endParaRPr lang="pt-BR" sz="1250" b="0" u="none" strike="noStrike">
               <a:solidFill>
@@ -8476,8 +8272,8 @@
         </p:nvSpPr>
         <p:spPr>
           <a:xfrm>
-            <a:off x="9965975" y="5685840"/>
-            <a:ext cx="164160" cy="164160"/>
+            <a:off x="9965880" y="5685840"/>
+            <a:ext cx="163080" cy="163080"/>
           </a:xfrm>
           <a:prstGeom prst="ellipse">
             <a:avLst/>
@@ -8512,7 +8308,7 @@
           <a:fontRef idx="minor"/>
         </p:style>
         <p:txBody>
-          <a:bodyPr lIns="90000" tIns="45000" rIns="90000" bIns="45000" anchor="ctr">
+          <a:bodyPr lIns="81720" tIns="45000" rIns="81720" bIns="45000" anchor="ctr">
             <a:noAutofit/>
           </a:bodyPr>
           <a:p>
@@ -8535,8 +8331,8 @@
         </p:nvSpPr>
         <p:spPr>
           <a:xfrm>
-            <a:off x="9238055" y="5230440"/>
-            <a:ext cx="1620000" cy="292320"/>
+            <a:off x="9237960" y="5230440"/>
+            <a:ext cx="1618920" cy="205200"/>
           </a:xfrm>
           <a:prstGeom prst="rect">
             <a:avLst/>
@@ -8605,8 +8401,8 @@
         </p:nvSpPr>
         <p:spPr>
           <a:xfrm>
-            <a:off x="9238055" y="3017520"/>
-            <a:ext cx="1620000" cy="2121120"/>
+            <a:off x="9237960" y="4028400"/>
+            <a:ext cx="1618920" cy="1109160"/>
           </a:xfrm>
           <a:prstGeom prst="rect">
             <a:avLst/>
@@ -8672,7 +8468,7 @@
                 <a:latin typeface="Arial"/>
                 <a:ea typeface="Arial"/>
               </a:rPr>
-              <a:t>um arquivo próprio por unidade, sem banco central</a:t>
+              <a:t>Um arquivo próprio por unidade, sem banco central</a:t>
             </a:r>
             <a:endParaRPr lang="pt-BR" sz="1250" b="0" u="none" strike="noStrike">
               <a:solidFill>
@@ -8693,8 +8489,8 @@
         </p:nvSpPr>
         <p:spPr>
           <a:xfrm>
-            <a:off x="11610290" y="5685840"/>
-            <a:ext cx="164160" cy="164160"/>
+            <a:off x="11610360" y="5685840"/>
+            <a:ext cx="163080" cy="163080"/>
           </a:xfrm>
           <a:prstGeom prst="ellipse">
             <a:avLst/>
@@ -8729,7 +8525,7 @@
           <a:fontRef idx="minor"/>
         </p:style>
         <p:txBody>
-          <a:bodyPr lIns="90000" tIns="45000" rIns="90000" bIns="45000" anchor="ctr">
+          <a:bodyPr lIns="81720" tIns="45000" rIns="81720" bIns="45000" anchor="ctr">
             <a:noAutofit/>
           </a:bodyPr>
           <a:p>
@@ -8752,8 +8548,8 @@
         </p:nvSpPr>
         <p:spPr>
           <a:xfrm>
-            <a:off x="10882370" y="5989320"/>
-            <a:ext cx="1620000" cy="292320"/>
+            <a:off x="10882440" y="5989320"/>
+            <a:ext cx="1618920" cy="205200"/>
           </a:xfrm>
           <a:prstGeom prst="rect">
             <a:avLst/>
@@ -8822,8 +8618,8 @@
         </p:nvSpPr>
         <p:spPr>
           <a:xfrm>
-            <a:off x="10882370" y="6355080"/>
-            <a:ext cx="1620000" cy="2121120"/>
+            <a:off x="10882440" y="6355080"/>
+            <a:ext cx="1618920" cy="1055880"/>
           </a:xfrm>
           <a:prstGeom prst="rect">
             <a:avLst/>
@@ -8889,7 +8685,7 @@
                 <a:latin typeface="Arial"/>
                 <a:ea typeface="Arial"/>
               </a:rPr>
-              <a:t>entram acervos, museus e naturalistas; Pluriverso em várias instâncias</a:t>
+              <a:t>Entram acervos, museus e naturalistas; Pluriverso em várias instâncias</a:t>
             </a:r>
             <a:endParaRPr lang="pt-BR" sz="1250" b="0" u="none" strike="noStrike">
               <a:solidFill>
@@ -8910,8 +8706,8 @@
         </p:nvSpPr>
         <p:spPr>
           <a:xfrm>
-            <a:off x="13254605" y="5685840"/>
-            <a:ext cx="164160" cy="164160"/>
+            <a:off x="13254480" y="5685840"/>
+            <a:ext cx="163080" cy="163080"/>
           </a:xfrm>
           <a:prstGeom prst="ellipse">
             <a:avLst/>
@@ -8946,7 +8742,7 @@
           <a:fontRef idx="minor"/>
         </p:style>
         <p:txBody>
-          <a:bodyPr lIns="90000" tIns="45000" rIns="90000" bIns="45000" anchor="ctr">
+          <a:bodyPr lIns="81720" tIns="45000" rIns="81720" bIns="45000" anchor="ctr">
             <a:noAutofit/>
           </a:bodyPr>
           <a:p>
@@ -8969,8 +8765,8 @@
         </p:nvSpPr>
         <p:spPr>
           <a:xfrm>
-            <a:off x="12526685" y="5230440"/>
-            <a:ext cx="1620000" cy="292320"/>
+            <a:off x="12526560" y="5230440"/>
+            <a:ext cx="1618920" cy="205200"/>
           </a:xfrm>
           <a:prstGeom prst="rect">
             <a:avLst/>
@@ -9039,8 +8835,8 @@
         </p:nvSpPr>
         <p:spPr>
           <a:xfrm>
-            <a:off x="12526685" y="3017520"/>
-            <a:ext cx="1620000" cy="2121120"/>
+            <a:off x="12526560" y="4272120"/>
+            <a:ext cx="1618920" cy="865440"/>
           </a:xfrm>
           <a:prstGeom prst="rect">
             <a:avLst/>
@@ -9106,7 +8902,7 @@
                 <a:latin typeface="Arial"/>
                 <a:ea typeface="Arial"/>
               </a:rPr>
-              <a:t>governança em três camadas: quem decide o quê</a:t>
+              <a:t>Governança em três camadas: quem decide o quê</a:t>
             </a:r>
             <a:endParaRPr lang="pt-BR" sz="1250" b="0" u="none" strike="noStrike">
               <a:solidFill>
@@ -9127,8 +8923,8 @@
         </p:nvSpPr>
         <p:spPr>
           <a:xfrm>
-            <a:off x="14898920" y="5685840"/>
-            <a:ext cx="164160" cy="164160"/>
+            <a:off x="14898960" y="5685840"/>
+            <a:ext cx="163080" cy="163080"/>
           </a:xfrm>
           <a:prstGeom prst="ellipse">
             <a:avLst/>
@@ -9163,7 +8959,7 @@
           <a:fontRef idx="minor"/>
         </p:style>
         <p:txBody>
-          <a:bodyPr lIns="90000" tIns="45000" rIns="90000" bIns="45000" anchor="ctr">
+          <a:bodyPr lIns="81720" tIns="45000" rIns="81720" bIns="45000" anchor="ctr">
             <a:noAutofit/>
           </a:bodyPr>
           <a:p>
@@ -9186,8 +8982,8 @@
         </p:nvSpPr>
         <p:spPr>
           <a:xfrm>
-            <a:off x="14171000" y="5989320"/>
-            <a:ext cx="1620000" cy="292320"/>
+            <a:off x="14171040" y="5989320"/>
+            <a:ext cx="1618920" cy="205200"/>
           </a:xfrm>
           <a:prstGeom prst="rect">
             <a:avLst/>
@@ -9256,8 +9052,8 @@
         </p:nvSpPr>
         <p:spPr>
           <a:xfrm>
-            <a:off x="14171000" y="6355080"/>
-            <a:ext cx="1620000" cy="2121120"/>
+            <a:off x="14171040" y="6355080"/>
+            <a:ext cx="1618920" cy="1055880"/>
           </a:xfrm>
           <a:prstGeom prst="rect">
             <a:avLst/>
@@ -9323,7 +9119,7 @@
                 <a:latin typeface="Arial"/>
                 <a:ea typeface="Arial"/>
               </a:rPr>
-              <a:t>extração por IA dentro do BioCultDB; nome científico deixa de ser o centro</a:t>
+              <a:t>Extração por IA dentro do BioCultDB; BioCultTermos integrado</a:t>
             </a:r>
             <a:endParaRPr lang="pt-BR" sz="1250" b="0" u="none" strike="noStrike">
               <a:solidFill>
@@ -9344,8 +9140,8 @@
         </p:nvSpPr>
         <p:spPr>
           <a:xfrm>
-            <a:off x="16543235" y="5685840"/>
-            <a:ext cx="164160" cy="164160"/>
+            <a:off x="16543080" y="5685840"/>
+            <a:ext cx="163080" cy="163080"/>
           </a:xfrm>
           <a:prstGeom prst="ellipse">
             <a:avLst/>
@@ -9380,7 +9176,7 @@
           <a:fontRef idx="minor"/>
         </p:style>
         <p:txBody>
-          <a:bodyPr lIns="90000" tIns="45000" rIns="90000" bIns="45000" anchor="ctr">
+          <a:bodyPr lIns="81720" tIns="45000" rIns="81720" bIns="45000" anchor="ctr">
             <a:noAutofit/>
           </a:bodyPr>
           <a:p>
@@ -9403,8 +9199,8 @@
         </p:nvSpPr>
         <p:spPr>
           <a:xfrm>
-            <a:off x="15815315" y="5230440"/>
-            <a:ext cx="1620000" cy="292320"/>
+            <a:off x="15815160" y="5230440"/>
+            <a:ext cx="1618920" cy="205200"/>
           </a:xfrm>
           <a:prstGeom prst="rect">
             <a:avLst/>
@@ -9473,8 +9269,8 @@
         </p:nvSpPr>
         <p:spPr>
           <a:xfrm>
-            <a:off x="15815315" y="3017520"/>
-            <a:ext cx="1620000" cy="2121120"/>
+            <a:off x="15815160" y="3647520"/>
+            <a:ext cx="1618920" cy="1490040"/>
           </a:xfrm>
           <a:prstGeom prst="rect">
             <a:avLst/>
@@ -9540,7 +9336,7 @@
                 <a:latin typeface="Arial"/>
                 <a:ea typeface="Arial"/>
               </a:rPr>
-              <a:t>o Relato, o consentimento como processo, as gravações e as oficinas</a:t>
+              <a:t>O Relato, o consentimento como processo, as gravações e as oficinas</a:t>
             </a:r>
             <a:endParaRPr lang="pt-BR" sz="1250" b="0" u="none" strike="noStrike">
               <a:solidFill>
@@ -9555,14 +9351,14 @@
       </p:sp>
       <p:sp>
         <p:nvSpPr>
-          <p:cNvPr id="200" name="Oval 200"/>
+          <p:cNvPr id="100" name="Oval 200"/>
           <p:cNvSpPr/>
           <p:nvPr/>
         </p:nvSpPr>
         <p:spPr>
           <a:xfrm>
-            <a:off x="1744400" y="5685840"/>
-            <a:ext cx="164160" cy="164160"/>
+            <a:off x="1744560" y="5685840"/>
+            <a:ext cx="163080" cy="163080"/>
           </a:xfrm>
           <a:prstGeom prst="ellipse">
             <a:avLst/>
@@ -9597,7 +9393,7 @@
           <a:fontRef idx="minor"/>
         </p:style>
         <p:txBody>
-          <a:bodyPr lIns="90000" tIns="45000" rIns="90000" bIns="45000" anchor="ctr">
+          <a:bodyPr lIns="81720" tIns="45000" rIns="81720" bIns="45000" anchor="ctr">
             <a:noAutofit/>
           </a:bodyPr>
           <a:p>
@@ -9614,14 +9410,14 @@
       </p:sp>
       <p:sp>
         <p:nvSpPr>
-          <p:cNvPr id="201" name="TextBox 201"/>
+          <p:cNvPr id="101" name="TextBox 201"/>
           <p:cNvSpPr/>
           <p:nvPr/>
         </p:nvSpPr>
         <p:spPr>
           <a:xfrm>
-            <a:off x="1016480" y="5989320"/>
-            <a:ext cx="1620000" cy="292320"/>
+            <a:off x="1016640" y="5989320"/>
+            <a:ext cx="1618920" cy="205200"/>
           </a:xfrm>
           <a:prstGeom prst="rect">
             <a:avLst/>
@@ -9672,14 +9468,14 @@
       </p:sp>
       <p:sp>
         <p:nvSpPr>
-          <p:cNvPr id="202" name="TextBox 202"/>
+          <p:cNvPr id="102" name="TextBox 202"/>
           <p:cNvSpPr/>
           <p:nvPr/>
         </p:nvSpPr>
         <p:spPr>
           <a:xfrm>
-            <a:off x="1016480" y="6355080"/>
-            <a:ext cx="1620000" cy="2121120"/>
+            <a:off x="1016640" y="6355080"/>
+            <a:ext cx="1618920" cy="1352880"/>
           </a:xfrm>
           <a:prstGeom prst="rect">
             <a:avLst/>
@@ -9797,14 +9593,14 @@
       </p:grpSpPr>
       <p:sp>
         <p:nvSpPr>
-          <p:cNvPr id="100" name="Google Shape;174;p21"/>
+          <p:cNvPr id="103" name="Google Shape;174;p21"/>
           <p:cNvSpPr/>
           <p:nvPr/>
         </p:nvSpPr>
         <p:spPr>
           <a:xfrm>
             <a:off x="1342800" y="4986360"/>
-            <a:ext cx="7570440" cy="466200"/>
+            <a:ext cx="7569360" cy="465120"/>
           </a:xfrm>
           <a:prstGeom prst="rect">
             <a:avLst/>
@@ -9895,14 +9691,14 @@
       </p:grpSpPr>
       <p:sp>
         <p:nvSpPr>
-          <p:cNvPr id="101" name="Google Shape;180;p22"/>
+          <p:cNvPr id="104" name="Google Shape;180;p22"/>
           <p:cNvSpPr/>
           <p:nvPr/>
         </p:nvSpPr>
         <p:spPr>
           <a:xfrm>
             <a:off x="1342800" y="1552680"/>
-            <a:ext cx="17130600" cy="466200"/>
+            <a:ext cx="17129520" cy="465120"/>
           </a:xfrm>
           <a:prstGeom prst="rect">
             <a:avLst/>
@@ -9956,14 +9752,14 @@
       </p:sp>
       <p:sp>
         <p:nvSpPr>
-          <p:cNvPr id="102" name="Google Shape;181;p22"/>
+          <p:cNvPr id="105" name="Google Shape;181;p22"/>
           <p:cNvSpPr/>
           <p:nvPr/>
         </p:nvSpPr>
         <p:spPr>
           <a:xfrm>
             <a:off x="1371600" y="3676680"/>
-            <a:ext cx="8046360" cy="323640"/>
+            <a:ext cx="8045280" cy="322560"/>
           </a:xfrm>
           <a:prstGeom prst="rect">
             <a:avLst/>
@@ -10017,14 +9813,14 @@
       </p:sp>
       <p:sp>
         <p:nvSpPr>
-          <p:cNvPr id="103" name="Google Shape;182;p22"/>
+          <p:cNvPr id="106" name="Google Shape;182;p22"/>
           <p:cNvSpPr/>
           <p:nvPr/>
         </p:nvSpPr>
         <p:spPr>
           <a:xfrm>
             <a:off x="1371600" y="4257720"/>
-            <a:ext cx="7534440" cy="732960"/>
+            <a:ext cx="7533360" cy="731880"/>
           </a:xfrm>
           <a:prstGeom prst="rect">
             <a:avLst/>
@@ -10078,14 +9874,14 @@
       </p:sp>
       <p:sp>
         <p:nvSpPr>
-          <p:cNvPr id="104" name="Google Shape;183;p22"/>
+          <p:cNvPr id="107" name="Google Shape;183;p22"/>
           <p:cNvSpPr/>
           <p:nvPr/>
         </p:nvSpPr>
         <p:spPr>
           <a:xfrm>
             <a:off x="9601200" y="3676680"/>
-            <a:ext cx="8046360" cy="323640"/>
+            <a:ext cx="8045280" cy="322560"/>
           </a:xfrm>
           <a:prstGeom prst="rect">
             <a:avLst/>
@@ -10139,14 +9935,14 @@
       </p:sp>
       <p:sp>
         <p:nvSpPr>
-          <p:cNvPr id="105" name="Google Shape;184;p22"/>
+          <p:cNvPr id="108" name="Google Shape;184;p22"/>
           <p:cNvSpPr/>
           <p:nvPr/>
         </p:nvSpPr>
         <p:spPr>
           <a:xfrm>
             <a:off x="9601200" y="4257720"/>
-            <a:ext cx="7534440" cy="1228320"/>
+            <a:ext cx="7533360" cy="1227240"/>
           </a:xfrm>
           <a:prstGeom prst="rect">
             <a:avLst/>
@@ -10200,14 +9996,14 @@
       </p:sp>
       <p:sp>
         <p:nvSpPr>
-          <p:cNvPr id="106" name="Google Shape;185;p22"/>
+          <p:cNvPr id="109" name="Google Shape;185;p22"/>
           <p:cNvSpPr/>
           <p:nvPr/>
         </p:nvSpPr>
         <p:spPr>
           <a:xfrm>
             <a:off x="1371600" y="6648480"/>
-            <a:ext cx="8046360" cy="323640"/>
+            <a:ext cx="8045280" cy="322560"/>
           </a:xfrm>
           <a:prstGeom prst="rect">
             <a:avLst/>
@@ -10261,14 +10057,14 @@
       </p:sp>
       <p:sp>
         <p:nvSpPr>
-          <p:cNvPr id="107" name="Google Shape;186;p22"/>
+          <p:cNvPr id="110" name="Google Shape;186;p22"/>
           <p:cNvSpPr/>
           <p:nvPr/>
         </p:nvSpPr>
         <p:spPr>
           <a:xfrm>
             <a:off x="1371600" y="7229520"/>
-            <a:ext cx="7534440" cy="732960"/>
+            <a:ext cx="7533360" cy="731880"/>
           </a:xfrm>
           <a:prstGeom prst="rect">
             <a:avLst/>
@@ -10307,91 +10103,7 @@
                 <a:latin typeface="Arial"/>
                 <a:ea typeface="Arial"/>
               </a:rPr>
-              <a:t>Quem lida </a:t>
-            </a:r>
-            <a:r>
-              <a:rPr lang="en-US" sz="2250" b="0" u="none" strike="noStrike">
-                <a:solidFill>
-                  <a:srgbClr val="201F1D"/>
-                </a:solidFill>
-                <a:effectLst/>
-                <a:uFillTx/>
-                <a:latin typeface="Arial"/>
-                <a:ea typeface="Arial"/>
-              </a:rPr>
-              <a:t>com esses </a:t>
-            </a:r>
-            <a:r>
-              <a:rPr lang="en-US" sz="2250" b="0" u="none" strike="noStrike">
-                <a:solidFill>
-                  <a:srgbClr val="201F1D"/>
-                </a:solidFill>
-                <a:effectLst/>
-                <a:uFillTx/>
-                <a:latin typeface="Arial"/>
-                <a:ea typeface="Arial"/>
-              </a:rPr>
-              <a:t>dados </a:t>
-            </a:r>
-            <a:r>
-              <a:rPr lang="en-US" sz="2250" b="0" u="none" strike="noStrike">
-                <a:solidFill>
-                  <a:srgbClr val="201F1D"/>
-                </a:solidFill>
-                <a:effectLst/>
-                <a:uFillTx/>
-                <a:latin typeface="Arial"/>
-                <a:ea typeface="Arial"/>
-              </a:rPr>
-              <a:t>responde por </a:t>
-            </a:r>
-            <a:r>
-              <a:rPr lang="en-US" sz="2250" b="0" u="none" strike="noStrike">
-                <a:solidFill>
-                  <a:srgbClr val="201F1D"/>
-                </a:solidFill>
-                <a:effectLst/>
-                <a:uFillTx/>
-                <a:latin typeface="Arial"/>
-                <a:ea typeface="Arial"/>
-              </a:rPr>
-              <a:t>como os </a:t>
-            </a:r>
-            <a:r>
-              <a:rPr lang="en-US" sz="2250" b="0" u="none" strike="noStrike">
-                <a:solidFill>
-                  <a:srgbClr val="201F1D"/>
-                </a:solidFill>
-                <a:effectLst/>
-                <a:uFillTx/>
-                <a:latin typeface="Arial"/>
-                <a:ea typeface="Arial"/>
-              </a:rPr>
-              <a:t>trata, protege </a:t>
-            </a:r>
-            <a:r>
-              <a:rPr lang="en-US" sz="2250" b="0" u="none" strike="noStrike">
-                <a:solidFill>
-                  <a:srgbClr val="201F1D"/>
-                </a:solidFill>
-                <a:effectLst/>
-                <a:uFillTx/>
-                <a:latin typeface="Arial"/>
-                <a:ea typeface="Arial"/>
-              </a:rPr>
-              <a:t>e </a:t>
-            </a:r>
-            <a:r>
-              <a:rPr lang="en-US" sz="2250" b="0" u="none" strike="noStrike">
-                <a:solidFill>
-                  <a:srgbClr val="201F1D"/>
-                </a:solidFill>
-                <a:effectLst/>
-                <a:uFillTx/>
-                <a:latin typeface="Arial"/>
-                <a:ea typeface="Arial"/>
-              </a:rPr>
-              <a:t>compartilha.</a:t>
+              <a:t>Quem lida com esses dados responde por como os trata, protege e compartilha.</a:t>
             </a:r>
             <a:endParaRPr lang="pt-BR" sz="2250" b="0" u="none" strike="noStrike">
               <a:solidFill>
@@ -10406,14 +10118,14 @@
       </p:sp>
       <p:sp>
         <p:nvSpPr>
-          <p:cNvPr id="108" name="Google Shape;187;p22"/>
+          <p:cNvPr id="111" name="Google Shape;187;p22"/>
           <p:cNvSpPr/>
           <p:nvPr/>
         </p:nvSpPr>
         <p:spPr>
           <a:xfrm>
             <a:off x="9601200" y="6648480"/>
-            <a:ext cx="8046360" cy="323640"/>
+            <a:ext cx="8045280" cy="322560"/>
           </a:xfrm>
           <a:prstGeom prst="rect">
             <a:avLst/>
@@ -10467,14 +10179,14 @@
       </p:sp>
       <p:sp>
         <p:nvSpPr>
-          <p:cNvPr id="109" name="Google Shape;188;p22"/>
+          <p:cNvPr id="112" name="Google Shape;188;p22"/>
           <p:cNvSpPr/>
           <p:nvPr/>
         </p:nvSpPr>
         <p:spPr>
           <a:xfrm>
             <a:off x="9601200" y="7229520"/>
-            <a:ext cx="7534440" cy="732960"/>
+            <a:ext cx="7533360" cy="731880"/>
           </a:xfrm>
           <a:prstGeom prst="rect">
             <a:avLst/>
@@ -10572,7 +10284,7 @@
         <p:spPr>
           <a:xfrm>
             <a:off x="1342800" y="1552680"/>
-            <a:ext cx="17130600" cy="466200"/>
+            <a:ext cx="17129520" cy="465120"/>
           </a:xfrm>
           <a:prstGeom prst="rect">
             <a:avLst/>
@@ -10633,7 +10345,7 @@
         <p:spPr>
           <a:xfrm>
             <a:off x="1371600" y="3457440"/>
-            <a:ext cx="15544440" cy="9000"/>
+            <a:ext cx="15543360" cy="7920"/>
           </a:xfrm>
           <a:prstGeom prst="rect">
             <a:avLst/>
@@ -10654,7 +10366,7 @@
           <a:fontRef idx="minor"/>
         </p:style>
         <p:txBody>
-          <a:bodyPr tIns="4680" bIns="4680" anchor="ctr">
+          <a:bodyPr lIns="90000" tIns="3960" rIns="90000" bIns="3960" anchor="ctr">
             <a:noAutofit/>
           </a:bodyPr>
           <a:p>
@@ -10678,7 +10390,7 @@
         <p:spPr>
           <a:xfrm>
             <a:off x="1371600" y="2692800"/>
-            <a:ext cx="372960" cy="197640"/>
+            <a:ext cx="371880" cy="196560"/>
           </a:xfrm>
           <a:prstGeom prst="rect">
             <a:avLst/>
@@ -10739,7 +10451,7 @@
         <p:spPr>
           <a:xfrm>
             <a:off x="2183040" y="2585880"/>
-            <a:ext cx="6301800" cy="304560"/>
+            <a:ext cx="6300720" cy="303480"/>
           </a:xfrm>
           <a:prstGeom prst="rect">
             <a:avLst/>
@@ -10800,7 +10512,7 @@
         <p:spPr>
           <a:xfrm>
             <a:off x="1371600" y="4941720"/>
-            <a:ext cx="15544440" cy="9000"/>
+            <a:ext cx="15543360" cy="7920"/>
           </a:xfrm>
           <a:prstGeom prst="rect">
             <a:avLst/>
@@ -10821,7 +10533,7 @@
           <a:fontRef idx="minor"/>
         </p:style>
         <p:txBody>
-          <a:bodyPr tIns="4680" bIns="4680" anchor="ctr">
+          <a:bodyPr lIns="90000" tIns="3960" rIns="90000" bIns="3960" anchor="ctr">
             <a:noAutofit/>
           </a:bodyPr>
           <a:p>
@@ -10845,7 +10557,7 @@
         <p:spPr>
           <a:xfrm>
             <a:off x="1371600" y="4176720"/>
-            <a:ext cx="372960" cy="197640"/>
+            <a:ext cx="371880" cy="196560"/>
           </a:xfrm>
           <a:prstGeom prst="rect">
             <a:avLst/>
@@ -10906,7 +10618,7 @@
         <p:spPr>
           <a:xfrm>
             <a:off x="2183040" y="4070160"/>
-            <a:ext cx="7471080" cy="304560"/>
+            <a:ext cx="7470000" cy="303480"/>
           </a:xfrm>
           <a:prstGeom prst="rect">
             <a:avLst/>
@@ -10967,7 +10679,7 @@
         <p:spPr>
           <a:xfrm>
             <a:off x="1371600" y="6425640"/>
-            <a:ext cx="15544440" cy="9000"/>
+            <a:ext cx="15543360" cy="7920"/>
           </a:xfrm>
           <a:prstGeom prst="rect">
             <a:avLst/>
@@ -10988,7 +10700,7 @@
           <a:fontRef idx="minor"/>
         </p:style>
         <p:txBody>
-          <a:bodyPr tIns="4680" bIns="4680" anchor="ctr">
+          <a:bodyPr lIns="90000" tIns="3960" rIns="90000" bIns="3960" anchor="ctr">
             <a:noAutofit/>
           </a:bodyPr>
           <a:p>
@@ -11012,7 +10724,7 @@
         <p:spPr>
           <a:xfrm>
             <a:off x="1371600" y="5660640"/>
-            <a:ext cx="372960" cy="197640"/>
+            <a:ext cx="371880" cy="196560"/>
           </a:xfrm>
           <a:prstGeom prst="rect">
             <a:avLst/>
@@ -11073,7 +10785,7 @@
         <p:spPr>
           <a:xfrm>
             <a:off x="2183040" y="5554080"/>
-            <a:ext cx="8199000" cy="304560"/>
+            <a:ext cx="8197920" cy="303480"/>
           </a:xfrm>
           <a:prstGeom prst="rect">
             <a:avLst/>
@@ -11134,7 +10846,7 @@
         <p:spPr>
           <a:xfrm>
             <a:off x="1371600" y="7909560"/>
-            <a:ext cx="15544440" cy="9000"/>
+            <a:ext cx="15543360" cy="7920"/>
           </a:xfrm>
           <a:prstGeom prst="rect">
             <a:avLst/>
@@ -11155,7 +10867,7 @@
           <a:fontRef idx="minor"/>
         </p:style>
         <p:txBody>
-          <a:bodyPr tIns="4680" bIns="4680" anchor="ctr">
+          <a:bodyPr lIns="90000" tIns="3960" rIns="90000" bIns="3960" anchor="ctr">
             <a:noAutofit/>
           </a:bodyPr>
           <a:p>
@@ -11179,7 +10891,7 @@
         <p:spPr>
           <a:xfrm>
             <a:off x="1371600" y="7144560"/>
-            <a:ext cx="372960" cy="197640"/>
+            <a:ext cx="371880" cy="196560"/>
           </a:xfrm>
           <a:prstGeom prst="rect">
             <a:avLst/>
@@ -11240,7 +10952,7 @@
         <p:spPr>
           <a:xfrm>
             <a:off x="2183040" y="7038000"/>
-            <a:ext cx="4876920" cy="304560"/>
+            <a:ext cx="4875840" cy="303480"/>
           </a:xfrm>
           <a:prstGeom prst="rect">
             <a:avLst/>
@@ -11301,7 +11013,7 @@
         <p:spPr>
           <a:xfrm>
             <a:off x="1371600" y="9393480"/>
-            <a:ext cx="15544440" cy="9000"/>
+            <a:ext cx="15543360" cy="7920"/>
           </a:xfrm>
           <a:prstGeom prst="rect">
             <a:avLst/>
@@ -11322,7 +11034,7 @@
           <a:fontRef idx="minor"/>
         </p:style>
         <p:txBody>
-          <a:bodyPr tIns="4680" bIns="4680" anchor="ctr">
+          <a:bodyPr lIns="90000" tIns="3960" rIns="90000" bIns="3960" anchor="ctr">
             <a:noAutofit/>
           </a:bodyPr>
           <a:p>
@@ -11346,7 +11058,7 @@
         <p:spPr>
           <a:xfrm>
             <a:off x="1371600" y="8628840"/>
-            <a:ext cx="372960" cy="197640"/>
+            <a:ext cx="371880" cy="196560"/>
           </a:xfrm>
           <a:prstGeom prst="rect">
             <a:avLst/>
@@ -11407,7 +11119,7 @@
         <p:spPr>
           <a:xfrm>
             <a:off x="2183040" y="8521920"/>
-            <a:ext cx="9600840" cy="304560"/>
+            <a:ext cx="9599760" cy="303480"/>
           </a:xfrm>
           <a:prstGeom prst="rect">
             <a:avLst/>
@@ -11468,7 +11180,7 @@
         <p:spPr>
           <a:xfrm>
             <a:off x="1371600" y="10887120"/>
-            <a:ext cx="10477080" cy="9000"/>
+            <a:ext cx="10476000" cy="7920"/>
           </a:xfrm>
           <a:prstGeom prst="rect">
             <a:avLst/>
@@ -11489,7 +11201,7 @@
           <a:fontRef idx="minor"/>
         </p:style>
         <p:txBody>
-          <a:bodyPr tIns="4680" bIns="4680" anchor="ctr">
+          <a:bodyPr lIns="90000" tIns="3960" rIns="90000" bIns="3960" anchor="ctr">
             <a:noAutofit/>
           </a:bodyPr>
           <a:p>
@@ -11517,7 +11229,7 @@
         <p:spPr>
           <a:xfrm>
             <a:off x="1371600" y="9745920"/>
-            <a:ext cx="2841120" cy="159840"/>
+            <a:ext cx="2840040" cy="158760"/>
           </a:xfrm>
           <a:prstGeom prst="rect">
             <a:avLst/>
@@ -11567,14 +11279,14 @@
       </p:grpSpPr>
       <p:sp>
         <p:nvSpPr>
-          <p:cNvPr id="110" name="Google Shape;194;p23"/>
+          <p:cNvPr id="113" name="Google Shape;194;p23"/>
           <p:cNvSpPr/>
           <p:nvPr/>
         </p:nvSpPr>
         <p:spPr>
           <a:xfrm>
             <a:off x="1342800" y="1552680"/>
-            <a:ext cx="17130600" cy="466200"/>
+            <a:ext cx="17129520" cy="465120"/>
           </a:xfrm>
           <a:prstGeom prst="rect">
             <a:avLst/>
@@ -11628,14 +11340,14 @@
       </p:sp>
       <p:sp>
         <p:nvSpPr>
-          <p:cNvPr id="111" name="Google Shape;195;p23"/>
+          <p:cNvPr id="114" name="Google Shape;195;p23"/>
           <p:cNvSpPr/>
           <p:nvPr/>
         </p:nvSpPr>
         <p:spPr>
           <a:xfrm>
             <a:off x="1371600" y="4444200"/>
-            <a:ext cx="2006640" cy="9000"/>
+            <a:ext cx="2005560" cy="7920"/>
           </a:xfrm>
           <a:prstGeom prst="rect">
             <a:avLst/>
@@ -11656,7 +11368,7 @@
           <a:fontRef idx="minor"/>
         </p:style>
         <p:txBody>
-          <a:bodyPr tIns="4680" bIns="4680" anchor="ctr">
+          <a:bodyPr lIns="90000" tIns="3960" rIns="90000" bIns="3960" anchor="ctr">
             <a:noAutofit/>
           </a:bodyPr>
           <a:p>
@@ -11673,14 +11385,14 @@
       </p:sp>
       <p:sp>
         <p:nvSpPr>
-          <p:cNvPr id="112" name="Google Shape;196;p23"/>
+          <p:cNvPr id="115" name="Google Shape;196;p23"/>
           <p:cNvSpPr/>
           <p:nvPr/>
         </p:nvSpPr>
         <p:spPr>
           <a:xfrm>
             <a:off x="1371600" y="3875760"/>
-            <a:ext cx="1816200" cy="197640"/>
+            <a:ext cx="1815120" cy="196560"/>
           </a:xfrm>
           <a:prstGeom prst="rect">
             <a:avLst/>
@@ -11734,14 +11446,14 @@
       </p:sp>
       <p:sp>
         <p:nvSpPr>
-          <p:cNvPr id="113" name="Google Shape;197;p23"/>
+          <p:cNvPr id="116" name="Google Shape;197;p23"/>
           <p:cNvSpPr/>
           <p:nvPr/>
         </p:nvSpPr>
         <p:spPr>
           <a:xfrm>
             <a:off x="3378600" y="4444200"/>
-            <a:ext cx="5970600" cy="9000"/>
+            <a:ext cx="5969520" cy="7920"/>
           </a:xfrm>
           <a:prstGeom prst="rect">
             <a:avLst/>
@@ -11762,7 +11474,7 @@
           <a:fontRef idx="minor"/>
         </p:style>
         <p:txBody>
-          <a:bodyPr tIns="4680" bIns="4680" anchor="ctr">
+          <a:bodyPr lIns="90000" tIns="3960" rIns="90000" bIns="3960" anchor="ctr">
             <a:noAutofit/>
           </a:bodyPr>
           <a:p>
@@ -11779,14 +11491,14 @@
       </p:sp>
       <p:sp>
         <p:nvSpPr>
-          <p:cNvPr id="114" name="Google Shape;198;p23"/>
+          <p:cNvPr id="117" name="Google Shape;198;p23"/>
           <p:cNvSpPr/>
           <p:nvPr/>
         </p:nvSpPr>
         <p:spPr>
           <a:xfrm>
             <a:off x="3645360" y="3875760"/>
-            <a:ext cx="5616360" cy="197640"/>
+            <a:ext cx="5615280" cy="196560"/>
           </a:xfrm>
           <a:prstGeom prst="rect">
             <a:avLst/>
@@ -11840,14 +11552,14 @@
       </p:sp>
       <p:sp>
         <p:nvSpPr>
-          <p:cNvPr id="115" name="Google Shape;199;p23"/>
+          <p:cNvPr id="118" name="Google Shape;199;p23"/>
           <p:cNvSpPr/>
           <p:nvPr/>
         </p:nvSpPr>
         <p:spPr>
           <a:xfrm>
             <a:off x="9349920" y="4444200"/>
-            <a:ext cx="7566480" cy="9000"/>
+            <a:ext cx="7565400" cy="7920"/>
           </a:xfrm>
           <a:prstGeom prst="rect">
             <a:avLst/>
@@ -11868,7 +11580,7 @@
           <a:fontRef idx="minor"/>
         </p:style>
         <p:txBody>
-          <a:bodyPr tIns="4680" bIns="4680" anchor="ctr">
+          <a:bodyPr lIns="90000" tIns="3960" rIns="90000" bIns="3960" anchor="ctr">
             <a:noAutofit/>
           </a:bodyPr>
           <a:p>
@@ -11885,14 +11597,14 @@
       </p:sp>
       <p:sp>
         <p:nvSpPr>
-          <p:cNvPr id="116" name="Google Shape;200;p23"/>
+          <p:cNvPr id="119" name="Google Shape;200;p23"/>
           <p:cNvSpPr/>
           <p:nvPr/>
         </p:nvSpPr>
         <p:spPr>
           <a:xfrm>
             <a:off x="9616320" y="3875760"/>
-            <a:ext cx="7259760" cy="197640"/>
+            <a:ext cx="7258680" cy="196560"/>
           </a:xfrm>
           <a:prstGeom prst="rect">
             <a:avLst/>
@@ -11946,14 +11658,14 @@
       </p:sp>
       <p:sp>
         <p:nvSpPr>
-          <p:cNvPr id="117" name="Google Shape;201;p23"/>
+          <p:cNvPr id="120" name="Google Shape;201;p23"/>
           <p:cNvSpPr/>
           <p:nvPr/>
         </p:nvSpPr>
         <p:spPr>
           <a:xfrm>
             <a:off x="1371600" y="5433120"/>
-            <a:ext cx="2006640" cy="9000"/>
+            <a:ext cx="2005560" cy="7920"/>
           </a:xfrm>
           <a:prstGeom prst="rect">
             <a:avLst/>
@@ -11974,7 +11686,7 @@
           <a:fontRef idx="minor"/>
         </p:style>
         <p:txBody>
-          <a:bodyPr tIns="4680" bIns="4680" anchor="ctr">
+          <a:bodyPr lIns="90000" tIns="3960" rIns="90000" bIns="3960" anchor="ctr">
             <a:noAutofit/>
           </a:bodyPr>
           <a:p>
@@ -11991,14 +11703,14 @@
       </p:sp>
       <p:sp>
         <p:nvSpPr>
-          <p:cNvPr id="118" name="Google Shape;202;p23"/>
+          <p:cNvPr id="121" name="Google Shape;202;p23"/>
           <p:cNvSpPr/>
           <p:nvPr/>
         </p:nvSpPr>
         <p:spPr>
           <a:xfrm>
             <a:off x="1371600" y="4842360"/>
-            <a:ext cx="1816200" cy="237600"/>
+            <a:ext cx="1815120" cy="236520"/>
           </a:xfrm>
           <a:prstGeom prst="rect">
             <a:avLst/>
@@ -12052,14 +11764,14 @@
       </p:sp>
       <p:sp>
         <p:nvSpPr>
-          <p:cNvPr id="119" name="Google Shape;203;p23"/>
+          <p:cNvPr id="122" name="Google Shape;203;p23"/>
           <p:cNvSpPr/>
           <p:nvPr/>
         </p:nvSpPr>
         <p:spPr>
           <a:xfrm>
             <a:off x="3378600" y="5433120"/>
-            <a:ext cx="5970600" cy="9000"/>
+            <a:ext cx="5969520" cy="7920"/>
           </a:xfrm>
           <a:prstGeom prst="rect">
             <a:avLst/>
@@ -12080,7 +11792,7 @@
           <a:fontRef idx="minor"/>
         </p:style>
         <p:txBody>
-          <a:bodyPr tIns="4680" bIns="4680" anchor="ctr">
+          <a:bodyPr lIns="90000" tIns="3960" rIns="90000" bIns="3960" anchor="ctr">
             <a:noAutofit/>
           </a:bodyPr>
           <a:p>
@@ -12097,14 +11809,14 @@
       </p:sp>
       <p:sp>
         <p:nvSpPr>
-          <p:cNvPr id="120" name="Google Shape;204;p23"/>
+          <p:cNvPr id="123" name="Google Shape;204;p23"/>
           <p:cNvSpPr/>
           <p:nvPr/>
         </p:nvSpPr>
         <p:spPr>
           <a:xfrm>
             <a:off x="3645360" y="4842360"/>
-            <a:ext cx="5616360" cy="237600"/>
+            <a:ext cx="5615280" cy="236520"/>
           </a:xfrm>
           <a:prstGeom prst="rect">
             <a:avLst/>
@@ -12158,14 +11870,14 @@
       </p:sp>
       <p:sp>
         <p:nvSpPr>
-          <p:cNvPr id="121" name="Google Shape;205;p23"/>
+          <p:cNvPr id="124" name="Google Shape;205;p23"/>
           <p:cNvSpPr/>
           <p:nvPr/>
         </p:nvSpPr>
         <p:spPr>
           <a:xfrm>
             <a:off x="9349920" y="5433120"/>
-            <a:ext cx="7566480" cy="9000"/>
+            <a:ext cx="7565400" cy="7920"/>
           </a:xfrm>
           <a:prstGeom prst="rect">
             <a:avLst/>
@@ -12186,7 +11898,7 @@
           <a:fontRef idx="minor"/>
         </p:style>
         <p:txBody>
-          <a:bodyPr tIns="4680" bIns="4680" anchor="ctr">
+          <a:bodyPr lIns="90000" tIns="3960" rIns="90000" bIns="3960" anchor="ctr">
             <a:noAutofit/>
           </a:bodyPr>
           <a:p>
@@ -12203,14 +11915,14 @@
       </p:sp>
       <p:sp>
         <p:nvSpPr>
-          <p:cNvPr id="122" name="Google Shape;206;p23"/>
+          <p:cNvPr id="125" name="Google Shape;206;p23"/>
           <p:cNvSpPr/>
           <p:nvPr/>
         </p:nvSpPr>
         <p:spPr>
           <a:xfrm>
             <a:off x="9616320" y="4842360"/>
-            <a:ext cx="7259760" cy="237600"/>
+            <a:ext cx="7258680" cy="236520"/>
           </a:xfrm>
           <a:prstGeom prst="rect">
             <a:avLst/>
@@ -12264,14 +11976,14 @@
       </p:sp>
       <p:sp>
         <p:nvSpPr>
-          <p:cNvPr id="123" name="Google Shape;207;p23"/>
+          <p:cNvPr id="126" name="Google Shape;207;p23"/>
           <p:cNvSpPr/>
           <p:nvPr/>
         </p:nvSpPr>
         <p:spPr>
           <a:xfrm>
             <a:off x="1371600" y="6421680"/>
-            <a:ext cx="2006640" cy="9000"/>
+            <a:ext cx="2005560" cy="7920"/>
           </a:xfrm>
           <a:prstGeom prst="rect">
             <a:avLst/>
@@ -12292,7 +12004,7 @@
           <a:fontRef idx="minor"/>
         </p:style>
         <p:txBody>
-          <a:bodyPr tIns="4680" bIns="4680" anchor="ctr">
+          <a:bodyPr lIns="90000" tIns="3960" rIns="90000" bIns="3960" anchor="ctr">
             <a:noAutofit/>
           </a:bodyPr>
           <a:p>
@@ -12309,14 +12021,14 @@
       </p:sp>
       <p:sp>
         <p:nvSpPr>
-          <p:cNvPr id="124" name="Google Shape;208;p23"/>
+          <p:cNvPr id="127" name="Google Shape;208;p23"/>
           <p:cNvSpPr/>
           <p:nvPr/>
         </p:nvSpPr>
         <p:spPr>
           <a:xfrm>
             <a:off x="1371600" y="5830920"/>
-            <a:ext cx="1816200" cy="237600"/>
+            <a:ext cx="1815120" cy="236520"/>
           </a:xfrm>
           <a:prstGeom prst="rect">
             <a:avLst/>
@@ -12370,14 +12082,14 @@
       </p:sp>
       <p:sp>
         <p:nvSpPr>
-          <p:cNvPr id="125" name="Google Shape;209;p23"/>
+          <p:cNvPr id="128" name="Google Shape;209;p23"/>
           <p:cNvSpPr/>
           <p:nvPr/>
         </p:nvSpPr>
         <p:spPr>
           <a:xfrm>
             <a:off x="3378600" y="6421680"/>
-            <a:ext cx="5970600" cy="9000"/>
+            <a:ext cx="5969520" cy="7920"/>
           </a:xfrm>
           <a:prstGeom prst="rect">
             <a:avLst/>
@@ -12398,7 +12110,7 @@
           <a:fontRef idx="minor"/>
         </p:style>
         <p:txBody>
-          <a:bodyPr tIns="4680" bIns="4680" anchor="ctr">
+          <a:bodyPr lIns="90000" tIns="3960" rIns="90000" bIns="3960" anchor="ctr">
             <a:noAutofit/>
           </a:bodyPr>
           <a:p>
@@ -12415,14 +12127,14 @@
       </p:sp>
       <p:sp>
         <p:nvSpPr>
-          <p:cNvPr id="126" name="Google Shape;210;p23"/>
+          <p:cNvPr id="129" name="Google Shape;210;p23"/>
           <p:cNvSpPr/>
           <p:nvPr/>
         </p:nvSpPr>
         <p:spPr>
           <a:xfrm>
             <a:off x="3645360" y="5830920"/>
-            <a:ext cx="5616360" cy="237600"/>
+            <a:ext cx="5615280" cy="236520"/>
           </a:xfrm>
           <a:prstGeom prst="rect">
             <a:avLst/>
@@ -12476,14 +12188,14 @@
       </p:sp>
       <p:sp>
         <p:nvSpPr>
-          <p:cNvPr id="127" name="Google Shape;211;p23"/>
+          <p:cNvPr id="130" name="Google Shape;211;p23"/>
           <p:cNvSpPr/>
           <p:nvPr/>
         </p:nvSpPr>
         <p:spPr>
           <a:xfrm>
             <a:off x="9349920" y="6421680"/>
-            <a:ext cx="7566480" cy="9000"/>
+            <a:ext cx="7565400" cy="7920"/>
           </a:xfrm>
           <a:prstGeom prst="rect">
             <a:avLst/>
@@ -12504,7 +12216,7 @@
           <a:fontRef idx="minor"/>
         </p:style>
         <p:txBody>
-          <a:bodyPr tIns="4680" bIns="4680" anchor="ctr">
+          <a:bodyPr lIns="90000" tIns="3960" rIns="90000" bIns="3960" anchor="ctr">
             <a:noAutofit/>
           </a:bodyPr>
           <a:p>
@@ -12521,14 +12233,14 @@
       </p:sp>
       <p:sp>
         <p:nvSpPr>
-          <p:cNvPr id="128" name="Google Shape;212;p23"/>
+          <p:cNvPr id="131" name="Google Shape;212;p23"/>
           <p:cNvSpPr/>
           <p:nvPr/>
         </p:nvSpPr>
         <p:spPr>
           <a:xfrm>
             <a:off x="9616320" y="5830920"/>
-            <a:ext cx="7259760" cy="237600"/>
+            <a:ext cx="7258680" cy="236520"/>
           </a:xfrm>
           <a:prstGeom prst="rect">
             <a:avLst/>
@@ -12582,14 +12294,14 @@
       </p:sp>
       <p:sp>
         <p:nvSpPr>
-          <p:cNvPr id="129" name="Google Shape;213;p23"/>
+          <p:cNvPr id="132" name="Google Shape;213;p23"/>
           <p:cNvSpPr/>
           <p:nvPr/>
         </p:nvSpPr>
         <p:spPr>
           <a:xfrm>
             <a:off x="1371600" y="7410240"/>
-            <a:ext cx="2006640" cy="9000"/>
+            <a:ext cx="2005560" cy="7920"/>
           </a:xfrm>
           <a:prstGeom prst="rect">
             <a:avLst/>
@@ -12610,7 +12322,7 @@
           <a:fontRef idx="minor"/>
         </p:style>
         <p:txBody>
-          <a:bodyPr tIns="4680" bIns="4680" anchor="ctr">
+          <a:bodyPr lIns="90000" tIns="3960" rIns="90000" bIns="3960" anchor="ctr">
             <a:noAutofit/>
           </a:bodyPr>
           <a:p>
@@ -12627,14 +12339,14 @@
       </p:sp>
       <p:sp>
         <p:nvSpPr>
-          <p:cNvPr id="130" name="Google Shape;214;p23"/>
+          <p:cNvPr id="133" name="Google Shape;214;p23"/>
           <p:cNvSpPr/>
           <p:nvPr/>
         </p:nvSpPr>
         <p:spPr>
           <a:xfrm>
             <a:off x="1371600" y="6819840"/>
-            <a:ext cx="1816200" cy="237600"/>
+            <a:ext cx="1815120" cy="236520"/>
           </a:xfrm>
           <a:prstGeom prst="rect">
             <a:avLst/>
@@ -12688,14 +12400,14 @@
       </p:sp>
       <p:sp>
         <p:nvSpPr>
-          <p:cNvPr id="131" name="Google Shape;215;p23"/>
+          <p:cNvPr id="134" name="Google Shape;215;p23"/>
           <p:cNvSpPr/>
           <p:nvPr/>
         </p:nvSpPr>
         <p:spPr>
           <a:xfrm>
             <a:off x="3378600" y="7410240"/>
-            <a:ext cx="5970600" cy="9000"/>
+            <a:ext cx="5969520" cy="7920"/>
           </a:xfrm>
           <a:prstGeom prst="rect">
             <a:avLst/>
@@ -12716,7 +12428,7 @@
           <a:fontRef idx="minor"/>
         </p:style>
         <p:txBody>
-          <a:bodyPr tIns="4680" bIns="4680" anchor="ctr">
+          <a:bodyPr lIns="90000" tIns="3960" rIns="90000" bIns="3960" anchor="ctr">
             <a:noAutofit/>
           </a:bodyPr>
           <a:p>
@@ -12733,14 +12445,14 @@
       </p:sp>
       <p:sp>
         <p:nvSpPr>
-          <p:cNvPr id="132" name="Google Shape;216;p23"/>
+          <p:cNvPr id="135" name="Google Shape;216;p23"/>
           <p:cNvSpPr/>
           <p:nvPr/>
         </p:nvSpPr>
         <p:spPr>
           <a:xfrm>
             <a:off x="3645360" y="6819840"/>
-            <a:ext cx="5616360" cy="237600"/>
+            <a:ext cx="5615280" cy="236520"/>
           </a:xfrm>
           <a:prstGeom prst="rect">
             <a:avLst/>
@@ -12794,14 +12506,14 @@
       </p:sp>
       <p:sp>
         <p:nvSpPr>
-          <p:cNvPr id="133" name="Google Shape;217;p23"/>
+          <p:cNvPr id="136" name="Google Shape;217;p23"/>
           <p:cNvSpPr/>
           <p:nvPr/>
         </p:nvSpPr>
         <p:spPr>
           <a:xfrm>
             <a:off x="9349920" y="7410240"/>
-            <a:ext cx="7566480" cy="9000"/>
+            <a:ext cx="7565400" cy="7920"/>
           </a:xfrm>
           <a:prstGeom prst="rect">
             <a:avLst/>
@@ -12822,7 +12534,7 @@
           <a:fontRef idx="minor"/>
         </p:style>
         <p:txBody>
-          <a:bodyPr tIns="4680" bIns="4680" anchor="ctr">
+          <a:bodyPr lIns="90000" tIns="3960" rIns="90000" bIns="3960" anchor="ctr">
             <a:noAutofit/>
           </a:bodyPr>
           <a:p>
@@ -12839,14 +12551,14 @@
       </p:sp>
       <p:sp>
         <p:nvSpPr>
-          <p:cNvPr id="134" name="Google Shape;218;p23"/>
+          <p:cNvPr id="137" name="Google Shape;218;p23"/>
           <p:cNvSpPr/>
           <p:nvPr/>
         </p:nvSpPr>
         <p:spPr>
           <a:xfrm>
             <a:off x="9616320" y="6819840"/>
-            <a:ext cx="7259760" cy="237600"/>
+            <a:ext cx="7258680" cy="236520"/>
           </a:xfrm>
           <a:prstGeom prst="rect">
             <a:avLst/>
@@ -12900,14 +12612,14 @@
       </p:sp>
       <p:sp>
         <p:nvSpPr>
-          <p:cNvPr id="135" name="Google Shape;219;p23"/>
+          <p:cNvPr id="138" name="Google Shape;219;p23"/>
           <p:cNvSpPr/>
           <p:nvPr/>
         </p:nvSpPr>
         <p:spPr>
           <a:xfrm>
             <a:off x="1371600" y="8238960"/>
-            <a:ext cx="14715720" cy="706320"/>
+            <a:ext cx="14714640" cy="705240"/>
           </a:xfrm>
           <a:prstGeom prst="rect">
             <a:avLst/>
@@ -12991,7 +12703,7 @@
       </p:grpSpPr>
       <p:pic>
         <p:nvPicPr>
-          <p:cNvPr id="136" name="Google Shape;225;p24"/>
+          <p:cNvPr id="139" name="Google Shape;225;p24"/>
           <p:cNvPicPr/>
           <p:nvPr/>
         </p:nvPicPr>
@@ -13002,7 +12714,7 @@
         <p:spPr>
           <a:xfrm>
             <a:off x="572760" y="0"/>
-            <a:ext cx="17141760" cy="10286640"/>
+            <a:ext cx="17140680" cy="10285560"/>
           </a:xfrm>
           <a:prstGeom prst="rect">
             <a:avLst/>
@@ -13045,7 +12757,7 @@
       </p:grpSpPr>
       <p:pic>
         <p:nvPicPr>
-          <p:cNvPr id="137" name="Google Shape;231;p25"/>
+          <p:cNvPr id="140" name="Google Shape;231;p25"/>
           <p:cNvPicPr/>
           <p:nvPr/>
         </p:nvPicPr>
@@ -13056,7 +12768,7 @@
         <p:spPr>
           <a:xfrm>
             <a:off x="1798200" y="0"/>
-            <a:ext cx="14691240" cy="10286640"/>
+            <a:ext cx="14690160" cy="10285560"/>
           </a:xfrm>
           <a:prstGeom prst="rect">
             <a:avLst/>
@@ -13099,14 +12811,14 @@
       </p:grpSpPr>
       <p:sp>
         <p:nvSpPr>
-          <p:cNvPr id="138" name="Google Shape;63;p7"/>
+          <p:cNvPr id="141" name="Google Shape;63;p7"/>
           <p:cNvSpPr/>
           <p:nvPr/>
         </p:nvSpPr>
         <p:spPr>
           <a:xfrm>
             <a:off x="1342800" y="1552680"/>
-            <a:ext cx="17130600" cy="466200"/>
+            <a:ext cx="17129520" cy="465120"/>
           </a:xfrm>
           <a:prstGeom prst="rect">
             <a:avLst/>
@@ -13160,14 +12872,14 @@
       </p:sp>
       <p:sp>
         <p:nvSpPr>
-          <p:cNvPr id="139" name="Google Shape;64;p7"/>
+          <p:cNvPr id="142" name="Google Shape;64;p7"/>
           <p:cNvSpPr/>
           <p:nvPr/>
         </p:nvSpPr>
         <p:spPr>
           <a:xfrm>
             <a:off x="1371600" y="3676680"/>
-            <a:ext cx="8004600" cy="323640"/>
+            <a:ext cx="8003520" cy="322560"/>
           </a:xfrm>
           <a:prstGeom prst="rect">
             <a:avLst/>
@@ -13221,14 +12933,14 @@
       </p:sp>
       <p:sp>
         <p:nvSpPr>
-          <p:cNvPr id="140" name="Google Shape;65;p7"/>
+          <p:cNvPr id="143" name="Google Shape;65;p7"/>
           <p:cNvSpPr/>
           <p:nvPr/>
         </p:nvSpPr>
         <p:spPr>
           <a:xfrm>
             <a:off x="1371600" y="4257720"/>
-            <a:ext cx="7495200" cy="1723680"/>
+            <a:ext cx="7494120" cy="1722600"/>
           </a:xfrm>
           <a:prstGeom prst="rect">
             <a:avLst/>
@@ -13282,14 +12994,14 @@
       </p:sp>
       <p:sp>
         <p:nvSpPr>
-          <p:cNvPr id="141" name="Google Shape;66;p7"/>
+          <p:cNvPr id="144" name="Google Shape;66;p7"/>
           <p:cNvSpPr/>
           <p:nvPr/>
         </p:nvSpPr>
         <p:spPr>
           <a:xfrm>
             <a:off x="9639360" y="3676680"/>
-            <a:ext cx="8004600" cy="323640"/>
+            <a:ext cx="8003520" cy="322560"/>
           </a:xfrm>
           <a:prstGeom prst="rect">
             <a:avLst/>
@@ -13343,14 +13055,14 @@
       </p:sp>
       <p:sp>
         <p:nvSpPr>
-          <p:cNvPr id="142" name="Google Shape;67;p7"/>
+          <p:cNvPr id="145" name="Google Shape;67;p7"/>
           <p:cNvSpPr/>
           <p:nvPr/>
         </p:nvSpPr>
         <p:spPr>
           <a:xfrm>
             <a:off x="9639360" y="4257720"/>
-            <a:ext cx="7495200" cy="2219040"/>
+            <a:ext cx="7494120" cy="2217960"/>
           </a:xfrm>
           <a:prstGeom prst="rect">
             <a:avLst/>
@@ -13404,7 +13116,7 @@
       </p:sp>
       <p:pic>
         <p:nvPicPr>
-          <p:cNvPr id="143" name="Picture 67" descr="image.png"/>
+          <p:cNvPr id="146" name="Picture 67" descr="image.png"/>
           <p:cNvPicPr/>
           <p:nvPr/>
         </p:nvPicPr>
@@ -13415,7 +13127,7 @@
         <p:spPr>
           <a:xfrm>
             <a:off x="1371600" y="9745920"/>
-            <a:ext cx="2841120" cy="159840"/>
+            <a:ext cx="2840040" cy="158760"/>
           </a:xfrm>
           <a:prstGeom prst="rect">
             <a:avLst/>
@@ -13428,14 +13140,14 @@
       </p:pic>
       <p:sp>
         <p:nvSpPr>
-          <p:cNvPr id="144" name="Google Shape;65;p7"/>
+          <p:cNvPr id="147" name="Google Shape;65;p7"/>
           <p:cNvSpPr/>
           <p:nvPr/>
         </p:nvSpPr>
         <p:spPr>
           <a:xfrm>
             <a:off x="1371600" y="7863840"/>
-            <a:ext cx="16275960" cy="1096920"/>
+            <a:ext cx="16274880" cy="1095840"/>
           </a:xfrm>
           <a:prstGeom prst="rect">
             <a:avLst/>
@@ -13519,14 +13231,14 @@
       </p:grpSpPr>
       <p:sp>
         <p:nvSpPr>
-          <p:cNvPr id="145" name="Google Shape;180;p22"/>
+          <p:cNvPr id="148" name="Google Shape;180;p22"/>
           <p:cNvSpPr/>
           <p:nvPr/>
         </p:nvSpPr>
         <p:spPr>
           <a:xfrm>
             <a:off x="1342800" y="1552680"/>
-            <a:ext cx="17130600" cy="466200"/>
+            <a:ext cx="17129520" cy="465120"/>
           </a:xfrm>
           <a:prstGeom prst="rect">
             <a:avLst/>
@@ -13580,14 +13292,14 @@
       </p:sp>
       <p:sp>
         <p:nvSpPr>
-          <p:cNvPr id="146" name="Google Shape;181;p22"/>
+          <p:cNvPr id="149" name="Google Shape;181;p22"/>
           <p:cNvSpPr/>
           <p:nvPr/>
         </p:nvSpPr>
         <p:spPr>
           <a:xfrm>
             <a:off x="1371600" y="3566160"/>
-            <a:ext cx="8046360" cy="411120"/>
+            <a:ext cx="8045280" cy="410040"/>
           </a:xfrm>
           <a:prstGeom prst="rect">
             <a:avLst/>
@@ -13641,14 +13353,14 @@
       </p:sp>
       <p:sp>
         <p:nvSpPr>
-          <p:cNvPr id="147" name="Google Shape;182;p22"/>
+          <p:cNvPr id="150" name="Google Shape;182;p22"/>
           <p:cNvSpPr/>
           <p:nvPr/>
         </p:nvSpPr>
         <p:spPr>
           <a:xfrm>
             <a:off x="1371600" y="4114800"/>
-            <a:ext cx="7534440" cy="1462680"/>
+            <a:ext cx="7533360" cy="1461600"/>
           </a:xfrm>
           <a:prstGeom prst="rect">
             <a:avLst/>
@@ -13687,19 +13399,7 @@
                 <a:latin typeface="Arial"/>
                 <a:ea typeface="Arial"/>
               </a:rPr>
-              <a:t>Não existe um banco central. Cada comunidade e cada instituição mantém os próprios registros, e quem sai leva tudo embora do </a:t>
-            </a:r>
-            <a:r>
-              <a:rPr lang="en-US" sz="2250" b="0" u="none" strike="noStrike">
-                <a:solidFill>
-                  <a:srgbClr val="201F1D"/>
-                </a:solidFill>
-                <a:effectLst/>
-                <a:uFillTx/>
-                <a:latin typeface="Arial"/>
-                <a:ea typeface="Arial"/>
-              </a:rPr>
-              <a:t>índice comum na hora.</a:t>
+              <a:t>Não existe um banco central. Cada comunidade e cada instituição mantém os próprios registros, e quem sai leva tudo embora do índice comum na hora.</a:t>
             </a:r>
             <a:endParaRPr lang="pt-BR" sz="2250" b="0" u="none" strike="noStrike">
               <a:solidFill>
@@ -13714,14 +13414,14 @@
       </p:sp>
       <p:sp>
         <p:nvSpPr>
-          <p:cNvPr id="148" name="Google Shape;183;p22"/>
+          <p:cNvPr id="151" name="Google Shape;183;p22"/>
           <p:cNvSpPr/>
           <p:nvPr/>
         </p:nvSpPr>
         <p:spPr>
           <a:xfrm>
             <a:off x="9601200" y="3566160"/>
-            <a:ext cx="8412120" cy="411120"/>
+            <a:ext cx="8411040" cy="410040"/>
           </a:xfrm>
           <a:prstGeom prst="rect">
             <a:avLst/>
@@ -13775,14 +13475,14 @@
       </p:sp>
       <p:sp>
         <p:nvSpPr>
-          <p:cNvPr id="149" name="Google Shape;184;p22"/>
+          <p:cNvPr id="152" name="Google Shape;184;p22"/>
           <p:cNvSpPr/>
           <p:nvPr/>
         </p:nvSpPr>
         <p:spPr>
           <a:xfrm>
             <a:off x="9601200" y="4114800"/>
-            <a:ext cx="7534440" cy="1462680"/>
+            <a:ext cx="7533360" cy="1461600"/>
           </a:xfrm>
           <a:prstGeom prst="rect">
             <a:avLst/>
@@ -13836,14 +13536,14 @@
       </p:sp>
       <p:sp>
         <p:nvSpPr>
-          <p:cNvPr id="150" name="Google Shape;185;p22"/>
+          <p:cNvPr id="153" name="Google Shape;185;p22"/>
           <p:cNvSpPr/>
           <p:nvPr/>
         </p:nvSpPr>
         <p:spPr>
           <a:xfrm>
             <a:off x="1371600" y="5989320"/>
-            <a:ext cx="8046360" cy="411120"/>
+            <a:ext cx="8045280" cy="410040"/>
           </a:xfrm>
           <a:prstGeom prst="rect">
             <a:avLst/>
@@ -13897,14 +13597,14 @@
       </p:sp>
       <p:sp>
         <p:nvSpPr>
-          <p:cNvPr id="151" name="Google Shape;186;p22"/>
+          <p:cNvPr id="154" name="Google Shape;186;p22"/>
           <p:cNvSpPr/>
           <p:nvPr/>
         </p:nvSpPr>
         <p:spPr>
           <a:xfrm>
             <a:off x="1371600" y="6537960"/>
-            <a:ext cx="7534440" cy="1462680"/>
+            <a:ext cx="7533360" cy="1461600"/>
           </a:xfrm>
           <a:prstGeom prst="rect">
             <a:avLst/>
@@ -13958,14 +13658,14 @@
       </p:sp>
       <p:sp>
         <p:nvSpPr>
-          <p:cNvPr id="152" name="Google Shape;187;p22"/>
+          <p:cNvPr id="155" name="Google Shape;187;p22"/>
           <p:cNvSpPr/>
           <p:nvPr/>
         </p:nvSpPr>
         <p:spPr>
           <a:xfrm>
             <a:off x="9601200" y="5989320"/>
-            <a:ext cx="8046360" cy="411120"/>
+            <a:ext cx="8045280" cy="410040"/>
           </a:xfrm>
           <a:prstGeom prst="rect">
             <a:avLst/>
@@ -14019,14 +13719,14 @@
       </p:sp>
       <p:sp>
         <p:nvSpPr>
-          <p:cNvPr id="153" name="Google Shape;188;p22"/>
+          <p:cNvPr id="156" name="Google Shape;188;p22"/>
           <p:cNvSpPr/>
           <p:nvPr/>
         </p:nvSpPr>
         <p:spPr>
           <a:xfrm>
             <a:off x="9601200" y="6537960"/>
-            <a:ext cx="7534440" cy="1462680"/>
+            <a:ext cx="7533360" cy="1461600"/>
           </a:xfrm>
           <a:prstGeom prst="rect">
             <a:avLst/>
@@ -14080,14 +13780,14 @@
       </p:sp>
       <p:sp>
         <p:nvSpPr>
-          <p:cNvPr id="154" name="Google Shape;186;p22"/>
+          <p:cNvPr id="157" name="Google Shape;186;p22"/>
           <p:cNvSpPr/>
           <p:nvPr/>
         </p:nvSpPr>
         <p:spPr>
           <a:xfrm>
             <a:off x="1371600" y="8366760"/>
-            <a:ext cx="14712480" cy="822600"/>
+            <a:ext cx="14711400" cy="821520"/>
           </a:xfrm>
           <a:prstGeom prst="rect">
             <a:avLst/>
@@ -14171,14 +13871,14 @@
       </p:grpSpPr>
       <p:sp>
         <p:nvSpPr>
-          <p:cNvPr id="155" name="Google Shape;180;p22"/>
+          <p:cNvPr id="158" name="Google Shape;180;p22"/>
           <p:cNvSpPr/>
           <p:nvPr/>
         </p:nvSpPr>
         <p:spPr>
           <a:xfrm>
             <a:off x="1342800" y="1552680"/>
-            <a:ext cx="17130600" cy="466200"/>
+            <a:ext cx="17129520" cy="465120"/>
           </a:xfrm>
           <a:prstGeom prst="rect">
             <a:avLst/>
@@ -14232,14 +13932,14 @@
       </p:sp>
       <p:sp>
         <p:nvSpPr>
-          <p:cNvPr id="156" name="Google Shape;181;p22"/>
+          <p:cNvPr id="159" name="Google Shape;181;p22"/>
           <p:cNvSpPr/>
           <p:nvPr/>
         </p:nvSpPr>
         <p:spPr>
           <a:xfrm>
-            <a:off x="1371600" y="2750040"/>
-            <a:ext cx="8046360" cy="411120"/>
+            <a:off x="1371600" y="3110040"/>
+            <a:ext cx="12848040" cy="4449600"/>
           </a:xfrm>
           <a:prstGeom prst="rect">
             <a:avLst/>
@@ -14278,7 +13978,7 @@
                 <a:latin typeface="Arial"/>
                 <a:ea typeface="Arial"/>
               </a:rPr>
-              <a:t>Como quem sabe quer ser nomeado</a:t>
+              <a:t>Para a proposta de arquitetura avançar, questões precisam ser respondidas nas três camadas de governança.</a:t>
             </a:r>
             <a:endParaRPr lang="pt-BR" sz="3600" b="0" u="none" strike="noStrike">
               <a:solidFill>
@@ -14289,48 +13989,35 @@
               <a:latin typeface="Arial"/>
             </a:endParaRPr>
           </a:p>
-        </p:txBody>
-      </p:sp>
-      <p:sp>
-        <p:nvSpPr>
-          <p:cNvPr id="157" name="Google Shape;182;p22"/>
-          <p:cNvSpPr/>
-          <p:nvPr/>
-        </p:nvSpPr>
-        <p:spPr>
-          <a:xfrm>
-            <a:off x="1371600" y="3298680"/>
-            <a:ext cx="7534440" cy="1462680"/>
-          </a:xfrm>
-          <a:prstGeom prst="rect">
-            <a:avLst/>
-          </a:prstGeom>
-          <a:noFill/>
-          <a:ln w="0">
-            <a:noFill/>
-          </a:ln>
-        </p:spPr>
-        <p:style>
-          <a:lnRef idx="0"/>
-          <a:fillRef idx="0"/>
-          <a:effectRef idx="0"/>
-          <a:fontRef idx="minor"/>
-        </p:style>
-        <p:txBody>
-          <a:bodyPr lIns="25560" tIns="25560" rIns="25560" bIns="25560" anchor="t">
-            <a:noAutofit/>
-          </a:bodyPr>
           <a:p>
             <a:pPr>
               <a:lnSpc>
-                <a:spcPct val="151000"/>
-              </a:lnSpc>
-              <a:tabLst>
-                <a:tab pos="0" algn="l"/>
-              </a:tabLst>
-            </a:pPr>
-            <a:r>
-              <a:rPr lang="en-US" sz="2250" b="0" u="none" strike="noStrike">
+                <a:spcPct val="94000"/>
+              </a:lnSpc>
+              <a:tabLst>
+                <a:tab pos="0" algn="l"/>
+              </a:tabLst>
+            </a:pPr>
+            <a:endParaRPr lang="pt-BR" sz="3600" b="0" u="none" strike="noStrike">
+              <a:solidFill>
+                <a:srgbClr val="000000"/>
+              </a:solidFill>
+              <a:effectLst/>
+              <a:uFillTx/>
+              <a:latin typeface="Arial"/>
+            </a:endParaRPr>
+          </a:p>
+          <a:p>
+            <a:pPr>
+              <a:lnSpc>
+                <a:spcPct val="94000"/>
+              </a:lnSpc>
+              <a:tabLst>
+                <a:tab pos="0" algn="l"/>
+              </a:tabLst>
+            </a:pPr>
+            <a:r>
+              <a:rPr lang="en-US" sz="3600" b="0" u="none" strike="noStrike">
                 <a:solidFill>
                   <a:srgbClr val="201F1D"/>
                 </a:solidFill>
@@ -14339,900 +14026,9 @@
                 <a:latin typeface="Arial"/>
                 <a:ea typeface="Arial"/>
               </a:rPr>
-              <a:t>Quando alguém conta um saber, que nome deve aparecer: o nome de verdade, um nome escolhido pela pessoa, ou só “a comunidade”?</a:t>
-            </a:r>
-            <a:endParaRPr lang="pt-BR" sz="2250" b="0" u="none" strike="noStrike">
-              <a:solidFill>
-                <a:srgbClr val="000000"/>
-              </a:solidFill>
-              <a:effectLst/>
-              <a:uFillTx/>
-              <a:latin typeface="Arial"/>
-            </a:endParaRPr>
-          </a:p>
-        </p:txBody>
-      </p:sp>
-      <p:sp>
-        <p:nvSpPr>
-          <p:cNvPr id="158" name="Google Shape;183;p22"/>
-          <p:cNvSpPr/>
-          <p:nvPr/>
-        </p:nvSpPr>
-        <p:spPr>
-          <a:xfrm>
-            <a:off x="9601200" y="2750040"/>
-            <a:ext cx="8046360" cy="411120"/>
-          </a:xfrm>
-          <a:prstGeom prst="rect">
-            <a:avLst/>
-          </a:prstGeom>
-          <a:noFill/>
-          <a:ln w="0">
-            <a:noFill/>
-          </a:ln>
-        </p:spPr>
-        <p:style>
-          <a:lnRef idx="0"/>
-          <a:fillRef idx="0"/>
-          <a:effectRef idx="0"/>
-          <a:fontRef idx="minor"/>
-        </p:style>
-        <p:txBody>
-          <a:bodyPr lIns="25560" tIns="25560" rIns="25560" bIns="25560" anchor="t">
-            <a:noAutofit/>
-          </a:bodyPr>
-          <a:p>
-            <a:pPr>
-              <a:lnSpc>
-                <a:spcPct val="94000"/>
-              </a:lnSpc>
-              <a:tabLst>
-                <a:tab pos="0" algn="l"/>
-              </a:tabLst>
-            </a:pPr>
-            <a:r>
-              <a:rPr lang="en-US" sz="3600" b="0" u="none" strike="noStrike">
-                <a:solidFill>
-                  <a:srgbClr val="201F1D"/>
-                </a:solidFill>
-                <a:effectLst/>
-                <a:uFillTx/>
-                <a:latin typeface="Arial"/>
-                <a:ea typeface="Arial"/>
-              </a:rPr>
-              <a:t>O que não deve ser registrado</a:t>
+              <a:t>Seria muito bom ter um “ponto focal” do USEFLORA para estabelecer esta ponte entre as diferentes governanças e fazer a proposta de arquitetura avançar.</a:t>
             </a:r>
             <a:endParaRPr lang="pt-BR" sz="3600" b="0" u="none" strike="noStrike">
-              <a:solidFill>
-                <a:srgbClr val="000000"/>
-              </a:solidFill>
-              <a:effectLst/>
-              <a:uFillTx/>
-              <a:latin typeface="Arial"/>
-            </a:endParaRPr>
-          </a:p>
-        </p:txBody>
-      </p:sp>
-      <p:sp>
-        <p:nvSpPr>
-          <p:cNvPr id="159" name="Google Shape;184;p22"/>
-          <p:cNvSpPr/>
-          <p:nvPr/>
-        </p:nvSpPr>
-        <p:spPr>
-          <a:xfrm>
-            <a:off x="9601200" y="3298680"/>
-            <a:ext cx="7534440" cy="1462680"/>
-          </a:xfrm>
-          <a:prstGeom prst="rect">
-            <a:avLst/>
-          </a:prstGeom>
-          <a:noFill/>
-          <a:ln w="0">
-            <a:noFill/>
-          </a:ln>
-        </p:spPr>
-        <p:style>
-          <a:lnRef idx="0"/>
-          <a:fillRef idx="0"/>
-          <a:effectRef idx="0"/>
-          <a:fontRef idx="minor"/>
-        </p:style>
-        <p:txBody>
-          <a:bodyPr lIns="25560" tIns="25560" rIns="25560" bIns="25560" anchor="t">
-            <a:noAutofit/>
-          </a:bodyPr>
-          <a:p>
-            <a:pPr>
-              <a:lnSpc>
-                <a:spcPct val="151000"/>
-              </a:lnSpc>
-              <a:tabLst>
-                <a:tab pos="0" algn="l"/>
-              </a:tabLst>
-            </a:pPr>
-            <a:r>
-              <a:rPr lang="en-US" sz="2250" b="0" u="none" strike="noStrike">
-                <a:solidFill>
-                  <a:srgbClr val="201F1D"/>
-                </a:solidFill>
-                <a:effectLst/>
-                <a:uFillTx/>
-                <a:latin typeface="Arial"/>
-                <a:ea typeface="Arial"/>
-              </a:rPr>
-              <a:t>Há saberes que talvez não devam entrar em sistema nenhum. Precisamos saber onde fica essa linha antes de escrever qualquer coisa.</a:t>
-            </a:r>
-            <a:endParaRPr lang="pt-BR" sz="2250" b="0" u="none" strike="noStrike">
-              <a:solidFill>
-                <a:srgbClr val="000000"/>
-              </a:solidFill>
-              <a:effectLst/>
-              <a:uFillTx/>
-              <a:latin typeface="Arial"/>
-            </a:endParaRPr>
-          </a:p>
-        </p:txBody>
-      </p:sp>
-      <p:sp>
-        <p:nvSpPr>
-          <p:cNvPr id="160" name="Google Shape;185;p22"/>
-          <p:cNvSpPr/>
-          <p:nvPr/>
-        </p:nvSpPr>
-        <p:spPr>
-          <a:xfrm>
-            <a:off x="1371600" y="5000040"/>
-            <a:ext cx="8046360" cy="411120"/>
-          </a:xfrm>
-          <a:prstGeom prst="rect">
-            <a:avLst/>
-          </a:prstGeom>
-          <a:noFill/>
-          <a:ln w="0">
-            <a:noFill/>
-          </a:ln>
-        </p:spPr>
-        <p:style>
-          <a:lnRef idx="0"/>
-          <a:fillRef idx="0"/>
-          <a:effectRef idx="0"/>
-          <a:fontRef idx="minor"/>
-        </p:style>
-        <p:txBody>
-          <a:bodyPr lIns="25560" tIns="25560" rIns="25560" bIns="25560" anchor="t">
-            <a:noAutofit/>
-          </a:bodyPr>
-          <a:p>
-            <a:pPr>
-              <a:lnSpc>
-                <a:spcPct val="94000"/>
-              </a:lnSpc>
-              <a:tabLst>
-                <a:tab pos="0" algn="l"/>
-              </a:tabLst>
-            </a:pPr>
-            <a:r>
-              <a:rPr lang="en-US" sz="3600" b="0" u="none" strike="noStrike">
-                <a:solidFill>
-                  <a:srgbClr val="201F1D"/>
-                </a:solidFill>
-                <a:effectLst/>
-                <a:uFillTx/>
-                <a:latin typeface="Arial"/>
-                <a:ea typeface="Arial"/>
-              </a:rPr>
-              <a:t>Que marcas de uso valem aqui</a:t>
-            </a:r>
-            <a:endParaRPr lang="pt-BR" sz="3600" b="0" u="none" strike="noStrike">
-              <a:solidFill>
-                <a:srgbClr val="000000"/>
-              </a:solidFill>
-              <a:effectLst/>
-              <a:uFillTx/>
-              <a:latin typeface="Arial"/>
-            </a:endParaRPr>
-          </a:p>
-        </p:txBody>
-      </p:sp>
-      <p:sp>
-        <p:nvSpPr>
-          <p:cNvPr id="161" name="Google Shape;186;p22"/>
-          <p:cNvSpPr/>
-          <p:nvPr/>
-        </p:nvSpPr>
-        <p:spPr>
-          <a:xfrm>
-            <a:off x="1371600" y="5548680"/>
-            <a:ext cx="7534440" cy="1462680"/>
-          </a:xfrm>
-          <a:prstGeom prst="rect">
-            <a:avLst/>
-          </a:prstGeom>
-          <a:noFill/>
-          <a:ln w="0">
-            <a:noFill/>
-          </a:ln>
-        </p:spPr>
-        <p:style>
-          <a:lnRef idx="0"/>
-          <a:fillRef idx="0"/>
-          <a:effectRef idx="0"/>
-          <a:fontRef idx="minor"/>
-        </p:style>
-        <p:txBody>
-          <a:bodyPr lIns="25560" tIns="25560" rIns="25560" bIns="25560" anchor="t">
-            <a:noAutofit/>
-          </a:bodyPr>
-          <a:p>
-            <a:pPr>
-              <a:lnSpc>
-                <a:spcPct val="151000"/>
-              </a:lnSpc>
-              <a:tabLst>
-                <a:tab pos="0" algn="l"/>
-              </a:tabLst>
-            </a:pPr>
-            <a:r>
-              <a:rPr lang="en-US" sz="2250" b="0" u="none" strike="noStrike">
-                <a:solidFill>
-                  <a:srgbClr val="201F1D"/>
-                </a:solidFill>
-                <a:effectLst/>
-                <a:uFillTx/>
-                <a:latin typeface="Arial"/>
-                <a:ea typeface="Arial"/>
-              </a:rPr>
-              <a:t>Existem selos que dizem como um saber pode ser usado: só em certa época, só por certas pessoas, nunca para fins comerciais. Quais valem — e quem diz isso por todos?</a:t>
-            </a:r>
-            <a:endParaRPr lang="pt-BR" sz="2250" b="0" u="none" strike="noStrike">
-              <a:solidFill>
-                <a:srgbClr val="000000"/>
-              </a:solidFill>
-              <a:effectLst/>
-              <a:uFillTx/>
-              <a:latin typeface="Arial"/>
-            </a:endParaRPr>
-          </a:p>
-        </p:txBody>
-      </p:sp>
-      <p:sp>
-        <p:nvSpPr>
-          <p:cNvPr id="162" name="Google Shape;187;p22"/>
-          <p:cNvSpPr/>
-          <p:nvPr/>
-        </p:nvSpPr>
-        <p:spPr>
-          <a:xfrm>
-            <a:off x="9601200" y="5000040"/>
-            <a:ext cx="8046360" cy="411120"/>
-          </a:xfrm>
-          <a:prstGeom prst="rect">
-            <a:avLst/>
-          </a:prstGeom>
-          <a:noFill/>
-          <a:ln w="0">
-            <a:noFill/>
-          </a:ln>
-        </p:spPr>
-        <p:style>
-          <a:lnRef idx="0"/>
-          <a:fillRef idx="0"/>
-          <a:effectRef idx="0"/>
-          <a:fontRef idx="minor"/>
-        </p:style>
-        <p:txBody>
-          <a:bodyPr lIns="25560" tIns="25560" rIns="25560" bIns="25560" anchor="t">
-            <a:noAutofit/>
-          </a:bodyPr>
-          <a:p>
-            <a:pPr>
-              <a:lnSpc>
-                <a:spcPct val="94000"/>
-              </a:lnSpc>
-              <a:tabLst>
-                <a:tab pos="0" algn="l"/>
-              </a:tabLst>
-            </a:pPr>
-            <a:r>
-              <a:rPr lang="en-US" sz="3600" b="0" u="none" strike="noStrike">
-                <a:solidFill>
-                  <a:srgbClr val="201F1D"/>
-                </a:solidFill>
-                <a:effectLst/>
-                <a:uFillTx/>
-                <a:latin typeface="Arial"/>
-                <a:ea typeface="Arial"/>
-              </a:rPr>
-              <a:t>As gravações e as oficinas</a:t>
-            </a:r>
-            <a:endParaRPr lang="pt-BR" sz="3600" b="0" u="none" strike="noStrike">
-              <a:solidFill>
-                <a:srgbClr val="000000"/>
-              </a:solidFill>
-              <a:effectLst/>
-              <a:uFillTx/>
-              <a:latin typeface="Arial"/>
-            </a:endParaRPr>
-          </a:p>
-        </p:txBody>
-      </p:sp>
-      <p:sp>
-        <p:nvSpPr>
-          <p:cNvPr id="163" name="Google Shape;188;p22"/>
-          <p:cNvSpPr/>
-          <p:nvPr/>
-        </p:nvSpPr>
-        <p:spPr>
-          <a:xfrm>
-            <a:off x="9601200" y="5548680"/>
-            <a:ext cx="7534440" cy="1462680"/>
-          </a:xfrm>
-          <a:prstGeom prst="rect">
-            <a:avLst/>
-          </a:prstGeom>
-          <a:noFill/>
-          <a:ln w="0">
-            <a:noFill/>
-          </a:ln>
-        </p:spPr>
-        <p:style>
-          <a:lnRef idx="0"/>
-          <a:fillRef idx="0"/>
-          <a:effectRef idx="0"/>
-          <a:fontRef idx="minor"/>
-        </p:style>
-        <p:txBody>
-          <a:bodyPr lIns="25560" tIns="25560" rIns="25560" bIns="25560" anchor="t">
-            <a:noAutofit/>
-          </a:bodyPr>
-          <a:p>
-            <a:pPr>
-              <a:lnSpc>
-                <a:spcPct val="151000"/>
-              </a:lnSpc>
-              <a:tabLst>
-                <a:tab pos="0" algn="l"/>
-              </a:tabLst>
-            </a:pPr>
-            <a:r>
-              <a:rPr lang="en-US" sz="2250" b="0" u="none" strike="noStrike">
-                <a:solidFill>
-                  <a:srgbClr val="201F1D"/>
-                </a:solidFill>
-                <a:effectLst/>
-                <a:uFillTx/>
-                <a:latin typeface="Arial"/>
-                <a:ea typeface="Arial"/>
-              </a:rPr>
-              <a:t>Filmar alguém fazendo um chá ou trançando uma cesta é registrar um saber. Numa oficina, são muitas pessoas de uma vez. Quem autoriza — cada um, ou o grupo?</a:t>
-            </a:r>
-            <a:endParaRPr lang="pt-BR" sz="2250" b="0" u="none" strike="noStrike">
-              <a:solidFill>
-                <a:srgbClr val="000000"/>
-              </a:solidFill>
-              <a:effectLst/>
-              <a:uFillTx/>
-              <a:latin typeface="Arial"/>
-            </a:endParaRPr>
-          </a:p>
-        </p:txBody>
-      </p:sp>
-      <p:sp>
-        <p:nvSpPr>
-          <p:cNvPr id="164" name="Google Shape;186;p22"/>
-          <p:cNvSpPr/>
-          <p:nvPr/>
-        </p:nvSpPr>
-        <p:spPr>
-          <a:xfrm>
-            <a:off x="1371600" y="9050040"/>
-            <a:ext cx="14712480" cy="822600"/>
-          </a:xfrm>
-          <a:prstGeom prst="rect">
-            <a:avLst/>
-          </a:prstGeom>
-          <a:noFill/>
-          <a:ln w="0">
-            <a:noFill/>
-          </a:ln>
-        </p:spPr>
-        <p:style>
-          <a:lnRef idx="0"/>
-          <a:fillRef idx="0"/>
-          <a:effectRef idx="0"/>
-          <a:fontRef idx="minor"/>
-        </p:style>
-        <p:txBody>
-          <a:bodyPr lIns="25560" tIns="25560" rIns="25560" bIns="25560" anchor="t">
-            <a:noAutofit/>
-          </a:bodyPr>
-          <a:p>
-            <a:pPr>
-              <a:lnSpc>
-                <a:spcPct val="151000"/>
-              </a:lnSpc>
-              <a:tabLst>
-                <a:tab pos="0" algn="l"/>
-              </a:tabLst>
-            </a:pPr>
-            <a:r>
-              <a:rPr lang="en-US" sz="2250" b="0" u="none" strike="noStrike">
-                <a:solidFill>
-                  <a:srgbClr val="201F1D"/>
-                </a:solidFill>
-                <a:effectLst/>
-                <a:uFillTx/>
-                <a:latin typeface="Arial"/>
-                <a:ea typeface="Arial"/>
-              </a:rPr>
-              <a:t>Nenhuma dessas perguntas tem resposta técnica, e nenhuma delas vamos responder sozinhos. Enquanto vocês não responderem, elas ficam registradas como pendências abertas — e nada é publicado.</a:t>
-            </a:r>
-            <a:endParaRPr lang="pt-BR" sz="2250" b="0" u="none" strike="noStrike">
-              <a:solidFill>
-                <a:srgbClr val="000000"/>
-              </a:solidFill>
-              <a:effectLst/>
-              <a:uFillTx/>
-              <a:latin typeface="Arial"/>
-            </a:endParaRPr>
-          </a:p>
-        </p:txBody>
-      </p:sp>
-      <p:sp>
-        <p:nvSpPr>
-          <p:cNvPr id="165" name="Google Shape;190;p22"/>
-          <p:cNvSpPr/>
-          <p:nvPr/>
-        </p:nvSpPr>
-        <p:spPr>
-          <a:xfrm>
-            <a:off x="1371600" y="7250040"/>
-            <a:ext cx="14712480" cy="411120"/>
-          </a:xfrm>
-          <a:prstGeom prst="rect">
-            <a:avLst/>
-          </a:prstGeom>
-          <a:noFill/>
-          <a:ln w="0">
-            <a:noFill/>
-          </a:ln>
-        </p:spPr>
-        <p:style>
-          <a:lnRef idx="0"/>
-          <a:fillRef idx="0"/>
-          <a:effectRef idx="0"/>
-          <a:fontRef idx="minor"/>
-        </p:style>
-        <p:txBody>
-          <a:bodyPr lIns="25560" tIns="25560" rIns="25560" bIns="25560" anchor="t">
-            <a:noAutofit/>
-          </a:bodyPr>
-          <a:p>
-            <a:pPr>
-              <a:lnSpc>
-                <a:spcPct val="94000"/>
-              </a:lnSpc>
-              <a:tabLst>
-                <a:tab pos="0" algn="l"/>
-              </a:tabLst>
-            </a:pPr>
-            <a:r>
-              <a:rPr lang="en-US" sz="3600" b="0" u="none" strike="noStrike">
-                <a:solidFill>
-                  <a:srgbClr val="201F1D"/>
-                </a:solidFill>
-                <a:effectLst/>
-                <a:uFillTx/>
-                <a:latin typeface="Arial"/>
-                <a:ea typeface="Arial"/>
-              </a:rPr>
-              <a:t>O que é sagrado — e o que acontece com ele</a:t>
-            </a:r>
-            <a:endParaRPr lang="pt-BR" sz="3600" b="0" u="none" strike="noStrike">
-              <a:solidFill>
-                <a:srgbClr val="000000"/>
-              </a:solidFill>
-              <a:effectLst/>
-              <a:uFillTx/>
-              <a:latin typeface="Arial"/>
-            </a:endParaRPr>
-          </a:p>
-        </p:txBody>
-      </p:sp>
-      <p:sp>
-        <p:nvSpPr>
-          <p:cNvPr id="166" name="Google Shape;191;p22"/>
-          <p:cNvSpPr/>
-          <p:nvPr/>
-        </p:nvSpPr>
-        <p:spPr>
-          <a:xfrm>
-            <a:off x="1371600" y="7800120"/>
-            <a:ext cx="14712480" cy="1096920"/>
-          </a:xfrm>
-          <a:prstGeom prst="rect">
-            <a:avLst/>
-          </a:prstGeom>
-          <a:noFill/>
-          <a:ln w="0">
-            <a:noFill/>
-          </a:ln>
-        </p:spPr>
-        <p:style>
-          <a:lnRef idx="0"/>
-          <a:fillRef idx="0"/>
-          <a:effectRef idx="0"/>
-          <a:fontRef idx="minor"/>
-        </p:style>
-        <p:txBody>
-          <a:bodyPr lIns="25560" tIns="25560" rIns="25560" bIns="25560" anchor="t">
-            <a:noAutofit/>
-          </a:bodyPr>
-          <a:p>
-            <a:pPr>
-              <a:lnSpc>
-                <a:spcPct val="151000"/>
-              </a:lnSpc>
-              <a:tabLst>
-                <a:tab pos="0" algn="l"/>
-              </a:tabLst>
-            </a:pPr>
-            <a:r>
-              <a:rPr lang="en-US" sz="2250" b="0" u="none" strike="noStrike">
-                <a:solidFill>
-                  <a:srgbClr val="201F1D"/>
-                </a:solidFill>
-                <a:effectLst/>
-                <a:uFillTx/>
-                <a:latin typeface="Arial"/>
-                <a:ea typeface="Arial"/>
-              </a:rPr>
-              <a:t>Quando um saber é sagrado, o registro dele deve sumir por inteiro, ou pode ficar visível que ele existe, sem mostrar o conteúdo? E quem diz que um saber é sagrado?</a:t>
-            </a:r>
-            <a:endParaRPr lang="pt-BR" sz="2250" b="0" u="none" strike="noStrike">
-              <a:solidFill>
-                <a:srgbClr val="000000"/>
-              </a:solidFill>
-              <a:effectLst/>
-              <a:uFillTx/>
-              <a:latin typeface="Arial"/>
-            </a:endParaRPr>
-          </a:p>
-        </p:txBody>
-      </p:sp>
-    </p:spTree>
-  </p:cSld>
-  <mc:AlternateContent>
-    <mc:Choice Requires="p14">
-      <p:transition spd="slow" p14:dur="2000"/>
-    </mc:Choice>
-    <mc:Fallback>
-      <p:transition spd="slow"/>
-    </mc:Fallback>
-  </mc:AlternateContent>
-</p:sld>
-</file>
-
-<file path=ppt/slides/slide26.xml><?xml version="1.0" encoding="utf-8"?>
-<p:sld xmlns:a="http://schemas.openxmlformats.org/drawingml/2006/main" xmlns:p="http://schemas.openxmlformats.org/presentationml/2006/main" xmlns:r="http://schemas.openxmlformats.org/officeDocument/2006/relationships" xmlns:p14="http://schemas.microsoft.com/office/powerpoint/2010/main" xmlns:p15="http://schemas.microsoft.com/office/powerpoint/2012/main" xmlns:mc="http://schemas.openxmlformats.org/markup-compatibility/2006">
-  <p:cSld>
-    <p:bg>
-      <p:bgPr>
-        <a:solidFill>
-          <a:srgbClr val="FAF6EF"/>
-        </a:solidFill>
-      </p:bgPr>
-    </p:bg>
-    <p:spTree>
-      <p:nvGrpSpPr>
-        <p:cNvPr id="1" name=""/>
-        <p:cNvGrpSpPr/>
-        <p:nvPr/>
-      </p:nvGrpSpPr>
-      <p:grpSpPr>
-        <a:xfrm>
-          <a:off x="0" y="0"/>
-          <a:ext cx="0" cy="0"/>
-          <a:chOff x="0" y="0"/>
-          <a:chExt cx="0" cy="0"/>
-        </a:xfrm>
-      </p:grpSpPr>
-      <p:sp>
-        <p:nvSpPr>
-          <p:cNvPr id="167" name="Google Shape;237;p26"/>
-          <p:cNvSpPr/>
-          <p:nvPr/>
-        </p:nvSpPr>
-        <p:spPr>
-          <a:xfrm>
-            <a:off x="1320480" y="3118320"/>
-            <a:ext cx="17155080" cy="1127520"/>
-          </a:xfrm>
-          <a:prstGeom prst="rect">
-            <a:avLst/>
-          </a:prstGeom>
-          <a:noFill/>
-          <a:ln w="0">
-            <a:noFill/>
-          </a:ln>
-        </p:spPr>
-        <p:style>
-          <a:lnRef idx="0"/>
-          <a:fillRef idx="0"/>
-          <a:effectRef idx="0"/>
-          <a:fontRef idx="minor"/>
-        </p:style>
-        <p:txBody>
-          <a:bodyPr lIns="25560" tIns="25560" rIns="25560" bIns="25560" anchor="t">
-            <a:noAutofit/>
-          </a:bodyPr>
-          <a:p>
-            <a:pPr>
-              <a:lnSpc>
-                <a:spcPct val="77000"/>
-              </a:lnSpc>
-              <a:tabLst>
-                <a:tab pos="0" algn="l"/>
-              </a:tabLst>
-            </a:pPr>
-            <a:r>
-              <a:rPr lang="en-US" sz="9600" b="0" u="none" strike="noStrike">
-                <a:solidFill>
-                  <a:srgbClr val="201F1D"/>
-                </a:solidFill>
-                <a:effectLst/>
-                <a:uFillTx/>
-                <a:latin typeface="Arial"/>
-                <a:ea typeface="Arial"/>
-              </a:rPr>
-              <a:t>Um convite</a:t>
-            </a:r>
-            <a:endParaRPr lang="pt-BR" sz="9600" b="0" u="none" strike="noStrike">
-              <a:solidFill>
-                <a:srgbClr val="000000"/>
-              </a:solidFill>
-              <a:effectLst/>
-              <a:uFillTx/>
-              <a:latin typeface="Arial"/>
-            </a:endParaRPr>
-          </a:p>
-        </p:txBody>
-      </p:sp>
-      <p:sp>
-        <p:nvSpPr>
-          <p:cNvPr id="168" name="Google Shape;238;p26"/>
-          <p:cNvSpPr/>
-          <p:nvPr/>
-        </p:nvSpPr>
-        <p:spPr>
-          <a:xfrm>
-            <a:off x="1371600" y="4608360"/>
-            <a:ext cx="10722240" cy="2712240"/>
-          </a:xfrm>
-          <a:prstGeom prst="rect">
-            <a:avLst/>
-          </a:prstGeom>
-          <a:noFill/>
-          <a:ln w="0">
-            <a:noFill/>
-          </a:ln>
-        </p:spPr>
-        <p:style>
-          <a:lnRef idx="0"/>
-          <a:fillRef idx="0"/>
-          <a:effectRef idx="0"/>
-          <a:fontRef idx="minor"/>
-        </p:style>
-        <p:txBody>
-          <a:bodyPr lIns="25560" tIns="25560" rIns="25560" bIns="25560" anchor="t">
-            <a:noAutofit/>
-          </a:bodyPr>
-          <a:p>
-            <a:pPr>
-              <a:lnSpc>
-                <a:spcPct val="151000"/>
-              </a:lnSpc>
-              <a:tabLst>
-                <a:tab pos="0" algn="l"/>
-              </a:tabLst>
-            </a:pPr>
-            <a:r>
-              <a:rPr lang="en-US" sz="3000" b="0" u="none" strike="noStrike">
-                <a:solidFill>
-                  <a:srgbClr val="201F1D"/>
-                </a:solidFill>
-                <a:effectLst/>
-                <a:uFillTx/>
-                <a:latin typeface="Arial"/>
-                <a:ea typeface="Arial"/>
-              </a:rPr>
-              <a:t>Essa arquitetura só existe se comunidades, pesquisadores e instituições ajudarem a construí-la, testá-la e corrigi-la. Participe, contribua, avalie.</a:t>
-            </a:r>
-            <a:endParaRPr lang="pt-BR" sz="3000" b="0" u="none" strike="noStrike">
-              <a:solidFill>
-                <a:srgbClr val="000000"/>
-              </a:solidFill>
-              <a:effectLst/>
-              <a:uFillTx/>
-              <a:latin typeface="Arial"/>
-            </a:endParaRPr>
-          </a:p>
-        </p:txBody>
-      </p:sp>
-      <p:sp>
-        <p:nvSpPr>
-          <p:cNvPr id="169" name="Google Shape;239;p26"/>
-          <p:cNvSpPr/>
-          <p:nvPr/>
-        </p:nvSpPr>
-        <p:spPr>
-          <a:xfrm>
-            <a:off x="1371600" y="9250560"/>
-            <a:ext cx="1838520" cy="197640"/>
-          </a:xfrm>
-          <a:prstGeom prst="rect">
-            <a:avLst/>
-          </a:prstGeom>
-          <a:noFill/>
-          <a:ln w="0">
-            <a:noFill/>
-          </a:ln>
-        </p:spPr>
-        <p:style>
-          <a:lnRef idx="0"/>
-          <a:fillRef idx="0"/>
-          <a:effectRef idx="0"/>
-          <a:fontRef idx="minor"/>
-        </p:style>
-        <p:txBody>
-          <a:bodyPr lIns="25560" tIns="25560" rIns="25560" bIns="25560" anchor="t">
-            <a:noAutofit/>
-          </a:bodyPr>
-          <a:p>
-            <a:pPr>
-              <a:lnSpc>
-                <a:spcPct val="136000"/>
-              </a:lnSpc>
-              <a:tabLst>
-                <a:tab pos="0" algn="l"/>
-              </a:tabLst>
-            </a:pPr>
-            <a:r>
-              <a:rPr lang="en-US" sz="1800" b="0" u="none" strike="noStrike">
-                <a:solidFill>
-                  <a:srgbClr val="211F1D"/>
-                </a:solidFill>
-                <a:effectLst/>
-                <a:uFillTx/>
-                <a:latin typeface="Arial"/>
-                <a:ea typeface="Arial"/>
-              </a:rPr>
-              <a:t>eduardo.dalc.in</a:t>
-            </a:r>
-            <a:endParaRPr lang="pt-BR" sz="1800" b="0" u="none" strike="noStrike">
-              <a:solidFill>
-                <a:srgbClr val="000000"/>
-              </a:solidFill>
-              <a:effectLst/>
-              <a:uFillTx/>
-              <a:latin typeface="Arial"/>
-            </a:endParaRPr>
-          </a:p>
-        </p:txBody>
-      </p:sp>
-      <p:sp>
-        <p:nvSpPr>
-          <p:cNvPr id="170" name="Google Shape;240;p26"/>
-          <p:cNvSpPr/>
-          <p:nvPr/>
-        </p:nvSpPr>
-        <p:spPr>
-          <a:xfrm>
-            <a:off x="3214800" y="9250560"/>
-            <a:ext cx="132840" cy="197640"/>
-          </a:xfrm>
-          <a:prstGeom prst="rect">
-            <a:avLst/>
-          </a:prstGeom>
-          <a:noFill/>
-          <a:ln w="0">
-            <a:noFill/>
-          </a:ln>
-        </p:spPr>
-        <p:style>
-          <a:lnRef idx="0"/>
-          <a:fillRef idx="0"/>
-          <a:effectRef idx="0"/>
-          <a:fontRef idx="minor"/>
-        </p:style>
-        <p:txBody>
-          <a:bodyPr lIns="25560" tIns="25560" rIns="25560" bIns="25560" anchor="t">
-            <a:noAutofit/>
-          </a:bodyPr>
-          <a:p>
-            <a:pPr>
-              <a:lnSpc>
-                <a:spcPct val="136000"/>
-              </a:lnSpc>
-              <a:tabLst>
-                <a:tab pos="0" algn="l"/>
-              </a:tabLst>
-            </a:pPr>
-            <a:r>
-              <a:rPr lang="en-US" sz="1800" b="0" u="none" strike="noStrike">
-                <a:solidFill>
-                  <a:srgbClr val="211F1D"/>
-                </a:solidFill>
-                <a:effectLst/>
-                <a:uFillTx/>
-                <a:latin typeface="Arial"/>
-                <a:ea typeface="Arial"/>
-              </a:rPr>
-              <a:t>·</a:t>
-            </a:r>
-            <a:endParaRPr lang="pt-BR" sz="1800" b="0" u="none" strike="noStrike">
-              <a:solidFill>
-                <a:srgbClr val="000000"/>
-              </a:solidFill>
-              <a:effectLst/>
-              <a:uFillTx/>
-              <a:latin typeface="Arial"/>
-            </a:endParaRPr>
-          </a:p>
-        </p:txBody>
-      </p:sp>
-      <p:sp>
-        <p:nvSpPr>
-          <p:cNvPr id="171" name="Google Shape;241;p26"/>
-          <p:cNvSpPr/>
-          <p:nvPr/>
-        </p:nvSpPr>
-        <p:spPr>
-          <a:xfrm>
-            <a:off x="3443400" y="9250560"/>
-            <a:ext cx="5292000" cy="197640"/>
-          </a:xfrm>
-          <a:prstGeom prst="rect">
-            <a:avLst/>
-          </a:prstGeom>
-          <a:noFill/>
-          <a:ln w="0">
-            <a:noFill/>
-          </a:ln>
-        </p:spPr>
-        <p:style>
-          <a:lnRef idx="0"/>
-          <a:fillRef idx="0"/>
-          <a:effectRef idx="0"/>
-          <a:fontRef idx="minor"/>
-        </p:style>
-        <p:txBody>
-          <a:bodyPr lIns="25560" tIns="25560" rIns="25560" bIns="25560" anchor="t">
-            <a:noAutofit/>
-          </a:bodyPr>
-          <a:p>
-            <a:pPr>
-              <a:lnSpc>
-                <a:spcPct val="136000"/>
-              </a:lnSpc>
-              <a:tabLst>
-                <a:tab pos="0" algn="l"/>
-              </a:tabLst>
-            </a:pPr>
-            <a:r>
-              <a:rPr lang="en-US" sz="1800" b="0" u="none" strike="noStrike">
-                <a:solidFill>
-                  <a:srgbClr val="211F1D"/>
-                </a:solidFill>
-                <a:effectLst/>
-                <a:uFillTx/>
-                <a:latin typeface="Arial"/>
-                <a:ea typeface="Arial"/>
-              </a:rPr>
-              <a:t>github.com/edalcin/Arquitetura-BioCultural</a:t>
-            </a:r>
-            <a:endParaRPr lang="pt-BR" sz="1800" b="0" u="none" strike="noStrike">
               <a:solidFill>
                 <a:srgbClr val="000000"/>
               </a:solidFill>
@@ -15289,7 +14085,7 @@
         <p:spPr>
           <a:xfrm>
             <a:off x="1342800" y="4986360"/>
-            <a:ext cx="9164880" cy="466200"/>
+            <a:ext cx="9163800" cy="465120"/>
           </a:xfrm>
           <a:prstGeom prst="rect">
             <a:avLst/>
@@ -15387,7 +14183,7 @@
         <p:spPr>
           <a:xfrm>
             <a:off x="1342800" y="1552680"/>
-            <a:ext cx="17130600" cy="466200"/>
+            <a:ext cx="17129520" cy="465120"/>
           </a:xfrm>
           <a:prstGeom prst="rect">
             <a:avLst/>
@@ -15448,7 +14244,7 @@
         <p:spPr>
           <a:xfrm>
             <a:off x="1342800" y="3118320"/>
-            <a:ext cx="14537520" cy="5230800"/>
+            <a:ext cx="14536440" cy="5229720"/>
           </a:xfrm>
           <a:prstGeom prst="rect">
             <a:avLst/>
@@ -15611,7 +14407,7 @@
         <p:spPr>
           <a:xfrm>
             <a:off x="1371600" y="9745920"/>
-            <a:ext cx="2841120" cy="159840"/>
+            <a:ext cx="2840040" cy="158760"/>
           </a:xfrm>
           <a:prstGeom prst="rect">
             <a:avLst/>
@@ -15668,7 +14464,7 @@
         <p:spPr>
           <a:xfrm>
             <a:off x="1342800" y="4986360"/>
-            <a:ext cx="8976240" cy="466200"/>
+            <a:ext cx="8975160" cy="465120"/>
           </a:xfrm>
           <a:prstGeom prst="rect">
             <a:avLst/>
@@ -15766,7 +14562,7 @@
         <p:spPr>
           <a:xfrm>
             <a:off x="1342800" y="1552680"/>
-            <a:ext cx="17130600" cy="466200"/>
+            <a:ext cx="17129520" cy="465120"/>
           </a:xfrm>
           <a:prstGeom prst="rect">
             <a:avLst/>
@@ -15827,7 +14623,7 @@
         <p:spPr>
           <a:xfrm>
             <a:off x="1371600" y="3676680"/>
-            <a:ext cx="8046360" cy="323640"/>
+            <a:ext cx="8045280" cy="322560"/>
           </a:xfrm>
           <a:prstGeom prst="rect">
             <a:avLst/>
@@ -15888,7 +14684,7 @@
         <p:spPr>
           <a:xfrm>
             <a:off x="1371600" y="4257720"/>
-            <a:ext cx="7534440" cy="732960"/>
+            <a:ext cx="7533360" cy="731880"/>
           </a:xfrm>
           <a:prstGeom prst="rect">
             <a:avLst/>
@@ -15949,7 +14745,7 @@
         <p:spPr>
           <a:xfrm>
             <a:off x="9601200" y="3676680"/>
-            <a:ext cx="8046360" cy="323640"/>
+            <a:ext cx="8045280" cy="322560"/>
           </a:xfrm>
           <a:prstGeom prst="rect">
             <a:avLst/>
@@ -16010,7 +14806,7 @@
         <p:spPr>
           <a:xfrm>
             <a:off x="9601200" y="4257720"/>
-            <a:ext cx="7534440" cy="1228320"/>
+            <a:ext cx="7533360" cy="1227240"/>
           </a:xfrm>
           <a:prstGeom prst="rect">
             <a:avLst/>
@@ -16071,7 +14867,7 @@
         <p:spPr>
           <a:xfrm>
             <a:off x="1371600" y="5596200"/>
-            <a:ext cx="8046360" cy="323640"/>
+            <a:ext cx="8045280" cy="322560"/>
           </a:xfrm>
           <a:prstGeom prst="rect">
             <a:avLst/>
@@ -16132,7 +14928,7 @@
         <p:spPr>
           <a:xfrm>
             <a:off x="1371600" y="6235920"/>
-            <a:ext cx="7534440" cy="733320"/>
+            <a:ext cx="7533360" cy="732240"/>
           </a:xfrm>
           <a:prstGeom prst="rect">
             <a:avLst/>
@@ -16193,7 +14989,7 @@
         <p:spPr>
           <a:xfrm>
             <a:off x="9601200" y="5596200"/>
-            <a:ext cx="8046360" cy="323640"/>
+            <a:ext cx="8045280" cy="322560"/>
           </a:xfrm>
           <a:prstGeom prst="rect">
             <a:avLst/>
@@ -16254,7 +15050,7 @@
         <p:spPr>
           <a:xfrm>
             <a:off x="9601200" y="6235920"/>
-            <a:ext cx="7534440" cy="1228320"/>
+            <a:ext cx="7533360" cy="1227240"/>
           </a:xfrm>
           <a:prstGeom prst="rect">
             <a:avLst/>
@@ -16315,7 +15111,7 @@
         <p:spPr>
           <a:xfrm>
             <a:off x="1508040" y="8165880"/>
-            <a:ext cx="15447240" cy="865080"/>
+            <a:ext cx="15446160" cy="864000"/>
           </a:xfrm>
           <a:prstGeom prst="rect">
             <a:avLst/>
@@ -16410,7 +15206,7 @@
         <p:spPr>
           <a:xfrm>
             <a:off x="1796040" y="0"/>
-            <a:ext cx="14695200" cy="10286640"/>
+            <a:ext cx="14694120" cy="10285560"/>
           </a:xfrm>
           <a:prstGeom prst="rect">
             <a:avLst/>
@@ -16467,7 +15263,7 @@
         <p:spPr>
           <a:xfrm>
             <a:off x="1342800" y="1552680"/>
-            <a:ext cx="17130600" cy="466200"/>
+            <a:ext cx="17129520" cy="465120"/>
           </a:xfrm>
           <a:prstGeom prst="rect">
             <a:avLst/>
@@ -16528,7 +15324,7 @@
         <p:spPr>
           <a:xfrm>
             <a:off x="1371600" y="3722400"/>
-            <a:ext cx="15057720" cy="2514240"/>
+            <a:ext cx="15056640" cy="2513160"/>
           </a:xfrm>
           <a:prstGeom prst="rect">
             <a:avLst/>
@@ -16589,7 +15385,7 @@
         <p:spPr>
           <a:xfrm>
             <a:off x="1131480" y="6198840"/>
-            <a:ext cx="16250760" cy="1100880"/>
+            <a:ext cx="16249680" cy="1099800"/>
           </a:xfrm>
           <a:prstGeom prst="rect">
             <a:avLst/>
@@ -16652,7 +15448,7 @@
         <p:spPr>
           <a:xfrm>
             <a:off x="1131480" y="7261920"/>
-            <a:ext cx="16250760" cy="1100880"/>
+            <a:ext cx="16249680" cy="1099800"/>
           </a:xfrm>
           <a:prstGeom prst="rect">
             <a:avLst/>
@@ -16719,7 +15515,7 @@
         <p:spPr>
           <a:xfrm>
             <a:off x="1371600" y="9745920"/>
-            <a:ext cx="2841120" cy="159840"/>
+            <a:ext cx="2840040" cy="158760"/>
           </a:xfrm>
           <a:prstGeom prst="rect">
             <a:avLst/>
@@ -16739,7 +15535,7 @@
         <p:spPr>
           <a:xfrm>
             <a:off x="1134000" y="8458200"/>
-            <a:ext cx="16248600" cy="1096920"/>
+            <a:ext cx="16247520" cy="1095840"/>
           </a:xfrm>
           <a:prstGeom prst="rect">
             <a:avLst/>
@@ -16839,7 +15635,7 @@
         <p:spPr>
           <a:xfrm>
             <a:off x="1342800" y="4986360"/>
-            <a:ext cx="11939760" cy="466200"/>
+            <a:ext cx="11938680" cy="465120"/>
           </a:xfrm>
           <a:prstGeom prst="rect">
             <a:avLst/>

--- a/docs/apresentacoes/Arquitetura BioCultural v2.pptx
+++ b/docs/apresentacoes/Arquitetura BioCultural v2.pptx
@@ -3962,7 +3962,7 @@
                 <a:latin typeface="Calibri"/>
                 <a:ea typeface="Calibri"/>
               </a:rPr>
-              <a:t>4) Gravações — o registro em vídeo captura prática, não só fala: o gesto, a sequência, o material escolhido. Pode não haver uma palavra dita, e ainda assim é conhecimento inteiro. Em gravação coletiva, cada participante tem direito próprio sobre a própria voz e imagem: a regra adotada por ora é a mais conservadora — se um pede reserva, a gravação inteira sai, e não editamos para suprimir alguém por conta própria. Caso concreto: o vídeo de 42 segundos em língua Panará, sem consentimento formalizado, sem transcrição com falante nativo e sem conferência da grafia — fora de qualquer publicação até que isso se resolva.</a:t>
+              <a:t>4) Gravações — o registro em vídeo captura prática, não só fala: o gesto, a sequência, o material escolhido. Pode não haver uma palavra dita, e ainda assim é conhecimento inteiro. Em gravação coletiva, cada participante tem direito próprio sobre a própria voz e imagem: a regra adotada por ora é a mais conservadora — se um pede reserva, a gravação inteira sai, e não editamos para suprimir alguém por conta própria. Regra geral: gravação sem consentimento formalizado, sem transcrição com falante nativo e sem conferência da grafia fica fora de qualquer publicação até que isso se resolva.</a:t>
             </a:r>
             <a:endParaRPr lang="pt-BR" sz="1200" b="0" u="none" strike="noStrike">
               <a:solidFill>
